--- a/outputs/019eb20b-c78d-7562-a3e1-1b44de512a93/presentations/economic-cost-optimization/output/economic-cost-optimization-in-optimex.pptx
+++ b/outputs/019eb20b-c78d-7562-a3e1-1b44de512a93/presentations/economic-cost-optimization/output/economic-cost-optimization-in-optimex.pptx
@@ -349,7 +349,176 @@
           <a:lstStyle/>
           <a:p>
             <a:r>
-              <a:t>Kurz einsteigen: Der Betreuer kennt Motivation und Modellidee bereits. Ich rahme deshalb nur den Stand: Was ist implementiert, wie fliesst Preisinput durch optimex, wie ist es getestet, und welche Entscheidungen brauche ich noch.</a:t>
+              <a:rPr dirty="0"/>
+              <a:t>Kurz </a:t>
+            </a:r>
+            <a:r>
+              <a:rPr dirty="0" err="1"/>
+              <a:t>einsteigen</a:t>
+            </a:r>
+            <a:r>
+              <a:rPr dirty="0"/>
+              <a:t>: Der </a:t>
+            </a:r>
+            <a:r>
+              <a:rPr dirty="0" err="1"/>
+              <a:t>Betreuer</a:t>
+            </a:r>
+            <a:r>
+              <a:rPr dirty="0"/>
+              <a:t> </a:t>
+            </a:r>
+            <a:r>
+              <a:rPr dirty="0" err="1"/>
+              <a:t>kennt</a:t>
+            </a:r>
+            <a:r>
+              <a:rPr dirty="0"/>
+              <a:t> Motivation und </a:t>
+            </a:r>
+            <a:r>
+              <a:rPr dirty="0" err="1"/>
+              <a:t>Modellidee</a:t>
+            </a:r>
+            <a:r>
+              <a:rPr dirty="0"/>
+              <a:t> </a:t>
+            </a:r>
+            <a:r>
+              <a:rPr dirty="0" err="1"/>
+              <a:t>bereits</a:t>
+            </a:r>
+            <a:r>
+              <a:rPr dirty="0"/>
+              <a:t>. Ich </a:t>
+            </a:r>
+            <a:r>
+              <a:rPr dirty="0" err="1"/>
+              <a:t>rahme</a:t>
+            </a:r>
+            <a:r>
+              <a:rPr dirty="0"/>
+              <a:t> </a:t>
+            </a:r>
+            <a:r>
+              <a:rPr dirty="0" err="1"/>
+              <a:t>deshalb</a:t>
+            </a:r>
+            <a:r>
+              <a:rPr dirty="0"/>
+              <a:t> </a:t>
+            </a:r>
+            <a:r>
+              <a:rPr dirty="0" err="1"/>
+              <a:t>nur</a:t>
+            </a:r>
+            <a:r>
+              <a:rPr dirty="0"/>
+              <a:t> den Stand: Was </a:t>
+            </a:r>
+            <a:r>
+              <a:rPr dirty="0" err="1"/>
+              <a:t>ist</a:t>
+            </a:r>
+            <a:r>
+              <a:rPr dirty="0"/>
+              <a:t> </a:t>
+            </a:r>
+            <a:r>
+              <a:rPr dirty="0" err="1"/>
+              <a:t>implementiert</a:t>
+            </a:r>
+            <a:r>
+              <a:rPr dirty="0"/>
+              <a:t>, </a:t>
+            </a:r>
+            <a:r>
+              <a:rPr dirty="0" err="1"/>
+              <a:t>wie</a:t>
+            </a:r>
+            <a:r>
+              <a:rPr dirty="0"/>
+              <a:t> </a:t>
+            </a:r>
+            <a:r>
+              <a:rPr dirty="0" err="1"/>
+              <a:t>fliesst</a:t>
+            </a:r>
+            <a:r>
+              <a:rPr dirty="0"/>
+              <a:t> </a:t>
+            </a:r>
+            <a:r>
+              <a:rPr dirty="0" err="1"/>
+              <a:t>Preisinput</a:t>
+            </a:r>
+            <a:r>
+              <a:rPr dirty="0"/>
+              <a:t> </a:t>
+            </a:r>
+            <a:r>
+              <a:rPr dirty="0" err="1"/>
+              <a:t>durch</a:t>
+            </a:r>
+            <a:r>
+              <a:rPr dirty="0"/>
+              <a:t> optimex, </a:t>
+            </a:r>
+            <a:r>
+              <a:rPr dirty="0" err="1"/>
+              <a:t>wie</a:t>
+            </a:r>
+            <a:r>
+              <a:rPr dirty="0"/>
+              <a:t> </a:t>
+            </a:r>
+            <a:r>
+              <a:rPr dirty="0" err="1"/>
+              <a:t>ist</a:t>
+            </a:r>
+            <a:r>
+              <a:rPr dirty="0"/>
+              <a:t> es </a:t>
+            </a:r>
+            <a:r>
+              <a:rPr dirty="0" err="1"/>
+              <a:t>getestet</a:t>
+            </a:r>
+            <a:r>
+              <a:rPr dirty="0"/>
+              <a:t>, und </a:t>
+            </a:r>
+            <a:r>
+              <a:rPr dirty="0" err="1"/>
+              <a:t>welche</a:t>
+            </a:r>
+            <a:r>
+              <a:rPr dirty="0"/>
+              <a:t> </a:t>
+            </a:r>
+            <a:r>
+              <a:rPr dirty="0" err="1"/>
+              <a:t>Entscheidungen</a:t>
+            </a:r>
+            <a:r>
+              <a:rPr dirty="0"/>
+              <a:t> </a:t>
+            </a:r>
+            <a:r>
+              <a:rPr dirty="0" err="1"/>
+              <a:t>brauche</a:t>
+            </a:r>
+            <a:r>
+              <a:rPr dirty="0"/>
+              <a:t> ich </a:t>
+            </a:r>
+            <a:r>
+              <a:rPr dirty="0" err="1"/>
+              <a:t>noch</a:t>
+            </a:r>
+            <a:r>
+              <a:rPr dirty="0"/>
+              <a:t>.</a:t>
             </a:r>
           </a:p>
         </p:txBody>
@@ -433,7 +602,164 @@
           <a:lstStyle/>
           <a:p>
             <a:r>
-              <a:t>Den Produktreife-Gedanken hervorheben: Ziel ist nicht nur, dass das Notebook irgendwie laeuft, sondern dass die Erweiterung als wartbare optimex-Funktion sichtbar ist.</a:t>
+              <a:rPr lang="de-DE" dirty="0"/>
+              <a:t>Ich habe den ganzen </a:t>
+            </a:r>
+            <a:r>
+              <a:rPr lang="de-DE" dirty="0" err="1"/>
+              <a:t>shit</a:t>
+            </a:r>
+            <a:r>
+              <a:rPr lang="de-DE" dirty="0"/>
+              <a:t> dokumentiert – </a:t>
+            </a:r>
+            <a:r>
+              <a:rPr lang="de-DE" dirty="0" err="1"/>
+              <a:t>doku</a:t>
+            </a:r>
+            <a:r>
+              <a:rPr lang="de-DE" dirty="0"/>
+              <a:t> zeigen</a:t>
+            </a:r>
+            <a:br>
+              <a:rPr lang="de-DE" dirty="0"/>
+            </a:br>
+            <a:br>
+              <a:rPr lang="de-DE" dirty="0"/>
+            </a:br>
+            <a:r>
+              <a:rPr dirty="0"/>
+              <a:t>Den </a:t>
+            </a:r>
+            <a:r>
+              <a:rPr dirty="0" err="1"/>
+              <a:t>Produktreife</a:t>
+            </a:r>
+            <a:r>
+              <a:rPr dirty="0"/>
+              <a:t>-Gedanken </a:t>
+            </a:r>
+            <a:r>
+              <a:rPr dirty="0" err="1"/>
+              <a:t>hervorheben</a:t>
+            </a:r>
+            <a:r>
+              <a:rPr dirty="0"/>
+              <a:t>: </a:t>
+            </a:r>
+            <a:br>
+              <a:rPr lang="de-DE" dirty="0"/>
+            </a:br>
+            <a:br>
+              <a:rPr lang="de-DE" dirty="0"/>
+            </a:br>
+            <a:r>
+              <a:rPr dirty="0"/>
+              <a:t>Ziel </a:t>
+            </a:r>
+            <a:r>
+              <a:rPr dirty="0" err="1"/>
+              <a:t>ist</a:t>
+            </a:r>
+            <a:r>
+              <a:rPr dirty="0"/>
+              <a:t> nicht </a:t>
+            </a:r>
+            <a:r>
+              <a:rPr dirty="0" err="1"/>
+              <a:t>nur</a:t>
+            </a:r>
+            <a:r>
+              <a:rPr dirty="0"/>
+              <a:t>, </a:t>
+            </a:r>
+            <a:r>
+              <a:rPr dirty="0" err="1"/>
+              <a:t>dass</a:t>
+            </a:r>
+            <a:r>
+              <a:rPr dirty="0"/>
+              <a:t> das Notebook </a:t>
+            </a:r>
+            <a:r>
+              <a:rPr dirty="0" err="1"/>
+              <a:t>irgendwie</a:t>
+            </a:r>
+            <a:r>
+              <a:rPr dirty="0"/>
+              <a:t> </a:t>
+            </a:r>
+            <a:r>
+              <a:rPr dirty="0" err="1"/>
+              <a:t>laeuft</a:t>
+            </a:r>
+            <a:r>
+              <a:rPr dirty="0"/>
+              <a:t>, </a:t>
+            </a:r>
+            <a:r>
+              <a:rPr dirty="0" err="1"/>
+              <a:t>sondern</a:t>
+            </a:r>
+            <a:r>
+              <a:rPr dirty="0"/>
+              <a:t> </a:t>
+            </a:r>
+            <a:r>
+              <a:rPr dirty="0" err="1"/>
+              <a:t>dass</a:t>
+            </a:r>
+            <a:r>
+              <a:rPr dirty="0"/>
+              <a:t> die </a:t>
+            </a:r>
+            <a:r>
+              <a:rPr dirty="0" err="1"/>
+              <a:t>Erweiterung</a:t>
+            </a:r>
+            <a:r>
+              <a:rPr dirty="0"/>
+              <a:t> </a:t>
+            </a:r>
+            <a:r>
+              <a:rPr dirty="0" err="1"/>
+              <a:t>als</a:t>
+            </a:r>
+            <a:r>
+              <a:rPr dirty="0"/>
+              <a:t> </a:t>
+            </a:r>
+            <a:r>
+              <a:rPr dirty="0" err="1"/>
+              <a:t>wartbare</a:t>
+            </a:r>
+            <a:r>
+              <a:rPr dirty="0"/>
+              <a:t> optimex-</a:t>
+            </a:r>
+            <a:r>
+              <a:rPr dirty="0" err="1"/>
+              <a:t>Funktion</a:t>
+            </a:r>
+            <a:r>
+              <a:rPr dirty="0"/>
+              <a:t> </a:t>
+            </a:r>
+            <a:r>
+              <a:rPr dirty="0" err="1"/>
+              <a:t>sichtbar</a:t>
+            </a:r>
+            <a:r>
+              <a:rPr dirty="0"/>
+              <a:t> </a:t>
+            </a:r>
+            <a:r>
+              <a:rPr dirty="0" err="1"/>
+              <a:t>ist</a:t>
+            </a:r>
+            <a:r>
+              <a:rPr dirty="0"/>
+              <a:t>.</a:t>
             </a:r>
           </a:p>
         </p:txBody>
@@ -685,7 +1011,123 @@
           <a:lstStyle/>
           <a:p>
             <a:r>
-              <a:t>Nur kurz rekapitulieren: Die Kostenlogik bewertet direkte Background-Einkaeufe des Foreground-Systems. Upstream bleibt fuer Umweltwirkungen relevant, wird aber nicht rekursiv bepreist.</a:t>
+              <a:rPr dirty="0"/>
+              <a:t>Nur </a:t>
+            </a:r>
+            <a:r>
+              <a:rPr dirty="0" err="1"/>
+              <a:t>kurz</a:t>
+            </a:r>
+            <a:r>
+              <a:rPr dirty="0"/>
+              <a:t> </a:t>
+            </a:r>
+            <a:r>
+              <a:rPr dirty="0" err="1"/>
+              <a:t>rekapitulieren</a:t>
+            </a:r>
+            <a:r>
+              <a:rPr dirty="0"/>
+              <a:t>: </a:t>
+            </a:r>
+            <a:br>
+              <a:rPr lang="de-DE" dirty="0"/>
+            </a:br>
+            <a:r>
+              <a:rPr lang="de-DE" dirty="0"/>
+              <a:t>- </a:t>
+            </a:r>
+            <a:r>
+              <a:rPr dirty="0"/>
+              <a:t>Die </a:t>
+            </a:r>
+            <a:r>
+              <a:rPr dirty="0" err="1"/>
+              <a:t>Kostenlogik</a:t>
+            </a:r>
+            <a:r>
+              <a:rPr dirty="0"/>
+              <a:t> </a:t>
+            </a:r>
+            <a:r>
+              <a:rPr dirty="0" err="1"/>
+              <a:t>bewertet</a:t>
+            </a:r>
+            <a:r>
+              <a:rPr dirty="0"/>
+              <a:t> </a:t>
+            </a:r>
+            <a:r>
+              <a:rPr dirty="0" err="1"/>
+              <a:t>direkte</a:t>
+            </a:r>
+            <a:r>
+              <a:rPr dirty="0"/>
+              <a:t> Background-</a:t>
+            </a:r>
+            <a:r>
+              <a:rPr dirty="0" err="1"/>
+              <a:t>Einkaeufe</a:t>
+            </a:r>
+            <a:r>
+              <a:rPr dirty="0"/>
+              <a:t> des Foreground-Systems. Upstream </a:t>
+            </a:r>
+            <a:r>
+              <a:rPr dirty="0" err="1"/>
+              <a:t>bleibt</a:t>
+            </a:r>
+            <a:r>
+              <a:rPr dirty="0"/>
+              <a:t> </a:t>
+            </a:r>
+            <a:r>
+              <a:rPr dirty="0" err="1"/>
+              <a:t>fuer</a:t>
+            </a:r>
+            <a:r>
+              <a:rPr dirty="0"/>
+              <a:t> </a:t>
+            </a:r>
+            <a:r>
+              <a:rPr dirty="0" err="1"/>
+              <a:t>Umweltwirkungen</a:t>
+            </a:r>
+            <a:r>
+              <a:rPr dirty="0"/>
+              <a:t> relevant, </a:t>
+            </a:r>
+            <a:r>
+              <a:rPr dirty="0" err="1"/>
+              <a:t>wird</a:t>
+            </a:r>
+            <a:r>
+              <a:rPr dirty="0"/>
+              <a:t> </a:t>
+            </a:r>
+            <a:r>
+              <a:rPr dirty="0" err="1"/>
+              <a:t>aber</a:t>
+            </a:r>
+            <a:r>
+              <a:rPr dirty="0"/>
+              <a:t> nicht </a:t>
+            </a:r>
+            <a:r>
+              <a:rPr dirty="0" err="1"/>
+              <a:t>rekursiv</a:t>
+            </a:r>
+            <a:r>
+              <a:rPr dirty="0"/>
+              <a:t> </a:t>
+            </a:r>
+            <a:r>
+              <a:rPr dirty="0" err="1"/>
+              <a:t>bepreist</a:t>
+            </a:r>
+            <a:r>
+              <a:rPr dirty="0"/>
+              <a:t>.</a:t>
             </a:r>
           </a:p>
         </p:txBody>
@@ -769,7 +1211,144 @@
           <a:lstStyle/>
           <a:p>
             <a:r>
-              <a:t>Hier den grossen Implementierungsfortschritt zeigen: Es ist nicht nur ein nachtraegliches Dict im Notebook, sondern die Informationen laufen vom Brightway-Preisinput bis zum Pyomo Objective durch.</a:t>
+              <a:rPr dirty="0"/>
+              <a:t>Hier den </a:t>
+            </a:r>
+            <a:r>
+              <a:rPr dirty="0" err="1"/>
+              <a:t>grossen</a:t>
+            </a:r>
+            <a:r>
+              <a:rPr dirty="0"/>
+              <a:t> </a:t>
+            </a:r>
+            <a:r>
+              <a:rPr dirty="0" err="1"/>
+              <a:t>Implementierungsfortschritt</a:t>
+            </a:r>
+            <a:r>
+              <a:rPr dirty="0"/>
+              <a:t> </a:t>
+            </a:r>
+            <a:r>
+              <a:rPr dirty="0" err="1"/>
+              <a:t>zeigen</a:t>
+            </a:r>
+            <a:r>
+              <a:rPr dirty="0"/>
+              <a:t>: Es </a:t>
+            </a:r>
+            <a:r>
+              <a:rPr dirty="0" err="1"/>
+              <a:t>ist</a:t>
+            </a:r>
+            <a:r>
+              <a:rPr dirty="0"/>
+              <a:t> nicht </a:t>
+            </a:r>
+            <a:r>
+              <a:rPr dirty="0" err="1"/>
+              <a:t>nur</a:t>
+            </a:r>
+            <a:r>
+              <a:rPr dirty="0"/>
+              <a:t> </a:t>
+            </a:r>
+            <a:r>
+              <a:rPr dirty="0" err="1"/>
+              <a:t>ein</a:t>
+            </a:r>
+            <a:r>
+              <a:rPr dirty="0"/>
+              <a:t> </a:t>
+            </a:r>
+            <a:r>
+              <a:rPr dirty="0" err="1"/>
+              <a:t>nachtraegliches</a:t>
+            </a:r>
+            <a:r>
+              <a:rPr dirty="0"/>
+              <a:t> </a:t>
+            </a:r>
+            <a:r>
+              <a:rPr dirty="0" err="1"/>
+              <a:t>Dict</a:t>
+            </a:r>
+            <a:r>
+              <a:rPr dirty="0"/>
+              <a:t> </a:t>
+            </a:r>
+            <a:r>
+              <a:rPr dirty="0" err="1"/>
+              <a:t>im</a:t>
+            </a:r>
+            <a:r>
+              <a:rPr dirty="0"/>
+              <a:t> Notebook, </a:t>
+            </a:r>
+            <a:r>
+              <a:rPr dirty="0" err="1"/>
+              <a:t>sondern</a:t>
+            </a:r>
+            <a:r>
+              <a:rPr dirty="0"/>
+              <a:t> die </a:t>
+            </a:r>
+            <a:r>
+              <a:rPr dirty="0" err="1"/>
+              <a:t>Informationen</a:t>
+            </a:r>
+            <a:r>
+              <a:rPr dirty="0"/>
+              <a:t> </a:t>
+            </a:r>
+            <a:r>
+              <a:rPr dirty="0" err="1"/>
+              <a:t>laufen</a:t>
+            </a:r>
+            <a:r>
+              <a:rPr dirty="0"/>
+              <a:t> </a:t>
+            </a:r>
+            <a:r>
+              <a:rPr dirty="0" err="1"/>
+              <a:t>vom</a:t>
+            </a:r>
+            <a:r>
+              <a:rPr dirty="0"/>
+              <a:t> </a:t>
+            </a:r>
+            <a:r>
+              <a:rPr dirty="0" err="1"/>
+              <a:t>Brightway-Preisinput</a:t>
+            </a:r>
+            <a:r>
+              <a:rPr dirty="0"/>
+              <a:t> bis </a:t>
+            </a:r>
+            <a:r>
+              <a:rPr dirty="0" err="1"/>
+              <a:t>zum</a:t>
+            </a:r>
+            <a:r>
+              <a:rPr dirty="0"/>
+              <a:t> </a:t>
+            </a:r>
+            <a:r>
+              <a:rPr dirty="0" err="1"/>
+              <a:t>Pyomo</a:t>
+            </a:r>
+            <a:r>
+              <a:rPr dirty="0"/>
+              <a:t> Objective </a:t>
+            </a:r>
+            <a:r>
+              <a:rPr dirty="0" err="1"/>
+              <a:t>durch</a:t>
+            </a:r>
+            <a:r>
+              <a:rPr dirty="0"/>
+              <a:t>.</a:t>
             </a:r>
           </a:p>
         </p:txBody>
@@ -852,6 +1431,23 @@
           <a:bodyPr/>
           <a:lstStyle/>
           <a:p>
+            <a:pPr marL="0" marR="0" lvl="0" indent="0" algn="l" defTabSz="914400" rtl="0" eaLnBrk="1" fontAlgn="auto" latinLnBrk="0" hangingPunct="1">
+              <a:lnSpc>
+                <a:spcPct val="100000"/>
+              </a:lnSpc>
+              <a:spcBef>
+                <a:spcPts val="0"/>
+              </a:spcBef>
+              <a:spcAft>
+                <a:spcPts val="0"/>
+              </a:spcAft>
+              <a:buClrTx/>
+              <a:buSzTx/>
+              <a:buFontTx/>
+              <a:buNone/>
+              <a:tabLst/>
+              <a:defRPr/>
+            </a:pPr>
             <a:r>
               <a:rPr dirty="0" err="1"/>
               <a:t>Diese</a:t>
@@ -892,6 +1488,16 @@
               <a:rPr dirty="0"/>
               <a:t>. </a:t>
             </a:r>
+            <a:br>
+              <a:rPr lang="de-DE" dirty="0"/>
+            </a:br>
+            <a:br>
+              <a:rPr lang="de-DE" dirty="0"/>
+            </a:br>
+            <a:r>
+              <a:rPr lang="de-DE" dirty="0"/>
+              <a:t>- </a:t>
+            </a:r>
             <a:r>
               <a:rPr dirty="0" err="1"/>
               <a:t>Nutzer</a:t>
@@ -922,7 +1528,43 @@
             </a:r>
             <a:r>
               <a:rPr dirty="0"/>
-              <a:t> Name, Location, Jahr und Preis an. Product und Unit </a:t>
+              <a:t> Name, Location, Jahr und Preis an.</a:t>
+            </a:r>
+            <a:br>
+              <a:rPr lang="de-DE" dirty="0"/>
+            </a:br>
+            <a:r>
+              <a:rPr lang="de-DE" dirty="0"/>
+              <a:t>- </a:t>
+            </a:r>
+            <a:r>
+              <a:rPr lang="en-US" sz="1200" b="0" kern="1200" dirty="0" err="1">
+                <a:effectLst/>
+              </a:rPr>
+              <a:t>pandas.DataFrame</a:t>
+            </a:r>
+            <a:r>
+              <a:rPr lang="en-US" sz="1200" b="0" kern="1200" dirty="0">
+                <a:effectLst/>
+              </a:rPr>
+              <a:t> or sequence of </a:t>
+            </a:r>
+            <a:r>
+              <a:rPr lang="en-US" sz="1200" b="0" kern="1200" dirty="0" err="1">
+                <a:effectLst/>
+              </a:rPr>
+              <a:t>dict</a:t>
+            </a:r>
+            <a:br>
+              <a:rPr lang="de-DE" dirty="0"/>
+            </a:br>
+            <a:r>
+              <a:rPr lang="de-DE" dirty="0"/>
+              <a:t>-</a:t>
+            </a:r>
+            <a:r>
+              <a:rPr dirty="0"/>
+              <a:t>Product und Unit </a:t>
             </a:r>
             <a:r>
               <a:rPr dirty="0" err="1"/>
@@ -946,7 +1588,25 @@
             </a:r>
             <a:r>
               <a:rPr dirty="0"/>
-              <a:t>. Brightway code </a:t>
+              <a:t>. </a:t>
+            </a:r>
+            <a:br>
+              <a:rPr lang="de-DE" dirty="0"/>
+            </a:br>
+            <a:br>
+              <a:rPr lang="de-DE" dirty="0"/>
+            </a:br>
+            <a:r>
+              <a:rPr lang="de-DE" dirty="0"/>
+              <a:t>-</a:t>
+            </a:r>
+            <a:r>
+              <a:rPr dirty="0" err="1"/>
+              <a:t>Brightway</a:t>
+            </a:r>
+            <a:r>
+              <a:rPr dirty="0"/>
+              <a:t> code </a:t>
             </a:r>
             <a:r>
               <a:rPr dirty="0" err="1"/>
@@ -1054,8 +1714,167 @@
           <a:lstStyle/>
           <a:p>
             <a:r>
-              <a:t>Hier den Kern des Datenflusses erklaeren: erst werden cost-relevante externe Intermediate-Flows erkannt, dann market_price pro Background-DB gelesen, per Mapping auf SYSTEM_TIME interpoliert und anhand der Foreground-Edge in cap/op geschrieben.</a:t>
-            </a:r>
+              <a:rPr dirty="0"/>
+              <a:t>Hier den Kern des </a:t>
+            </a:r>
+            <a:r>
+              <a:rPr dirty="0" err="1"/>
+              <a:t>Datenflusses</a:t>
+            </a:r>
+            <a:r>
+              <a:rPr dirty="0"/>
+              <a:t> </a:t>
+            </a:r>
+            <a:r>
+              <a:rPr dirty="0" err="1"/>
+              <a:t>erklaeren</a:t>
+            </a:r>
+            <a:r>
+              <a:rPr dirty="0"/>
+              <a:t>: </a:t>
+            </a:r>
+            <a:br>
+              <a:rPr lang="de-DE" dirty="0"/>
+            </a:br>
+            <a:br>
+              <a:rPr lang="de-DE" dirty="0"/>
+            </a:br>
+            <a:r>
+              <a:rPr lang="de-DE" dirty="0"/>
+              <a:t>1. </a:t>
+            </a:r>
+            <a:r>
+              <a:rPr dirty="0"/>
+              <a:t>erst </a:t>
+            </a:r>
+            <a:r>
+              <a:rPr dirty="0" err="1"/>
+              <a:t>werden</a:t>
+            </a:r>
+            <a:r>
+              <a:rPr dirty="0"/>
+              <a:t> cost-</a:t>
+            </a:r>
+            <a:r>
+              <a:rPr dirty="0" err="1"/>
+              <a:t>relevante</a:t>
+            </a:r>
+            <a:r>
+              <a:rPr dirty="0"/>
+              <a:t> externe Intermediate-Flows </a:t>
+            </a:r>
+            <a:r>
+              <a:rPr dirty="0" err="1"/>
+              <a:t>erkannt</a:t>
+            </a:r>
+            <a:r>
+              <a:rPr dirty="0"/>
+              <a:t>, </a:t>
+            </a:r>
+            <a:br>
+              <a:rPr lang="de-DE" dirty="0"/>
+            </a:br>
+            <a:r>
+              <a:rPr lang="de-DE" dirty="0"/>
+              <a:t>2. </a:t>
+            </a:r>
+            <a:r>
+              <a:rPr dirty="0" err="1"/>
+              <a:t>dann</a:t>
+            </a:r>
+            <a:r>
+              <a:rPr dirty="0"/>
+              <a:t> </a:t>
+            </a:r>
+            <a:r>
+              <a:rPr dirty="0" err="1"/>
+              <a:t>market_price</a:t>
+            </a:r>
+            <a:r>
+              <a:rPr dirty="0"/>
+              <a:t> pro Background-DB </a:t>
+            </a:r>
+            <a:r>
+              <a:rPr dirty="0" err="1"/>
+              <a:t>gelesen</a:t>
+            </a:r>
+            <a:r>
+              <a:rPr dirty="0"/>
+              <a:t>, </a:t>
+            </a:r>
+            <a:br>
+              <a:rPr lang="de-DE" dirty="0"/>
+            </a:br>
+            <a:r>
+              <a:rPr lang="de-DE" dirty="0"/>
+              <a:t>3. </a:t>
+            </a:r>
+            <a:r>
+              <a:rPr dirty="0"/>
+              <a:t>per Mapping auf SYSTEM_TIME </a:t>
+            </a:r>
+            <a:r>
+              <a:rPr dirty="0" err="1"/>
+              <a:t>interpoliert</a:t>
+            </a:r>
+            <a:r>
+              <a:rPr dirty="0"/>
+              <a:t> und </a:t>
+            </a:r>
+            <a:br>
+              <a:rPr lang="de-DE" dirty="0"/>
+            </a:br>
+            <a:r>
+              <a:rPr lang="de-DE" dirty="0"/>
+              <a:t>4. </a:t>
+            </a:r>
+            <a:r>
+              <a:rPr dirty="0" err="1"/>
+              <a:t>anhand</a:t>
+            </a:r>
+            <a:r>
+              <a:rPr dirty="0"/>
+              <a:t> der Foreground-Edge in cap/op </a:t>
+            </a:r>
+            <a:r>
+              <a:rPr dirty="0" err="1"/>
+              <a:t>geschrieben</a:t>
+            </a:r>
+            <a:r>
+              <a:rPr dirty="0"/>
+              <a:t>.</a:t>
+            </a:r>
+            <a:br>
+              <a:rPr lang="de-DE" dirty="0"/>
+            </a:br>
+            <a:br>
+              <a:rPr lang="de-DE" dirty="0"/>
+            </a:br>
+            <a:r>
+              <a:rPr lang="de-DE" dirty="0" err="1"/>
+              <a:t>warnung</a:t>
+            </a:r>
+            <a:r>
+              <a:rPr lang="de-DE" dirty="0"/>
+              <a:t> oder </a:t>
+            </a:r>
+            <a:r>
+              <a:rPr lang="de-DE" dirty="0" err="1"/>
+              <a:t>error</a:t>
+            </a:r>
+            <a:r>
+              <a:rPr lang="de-DE" dirty="0"/>
+              <a:t> (</a:t>
+            </a:r>
+            <a:r>
+              <a:rPr lang="de-DE" dirty="0" err="1"/>
+              <a:t>strict</a:t>
+            </a:r>
+            <a:r>
+              <a:rPr lang="de-DE" dirty="0"/>
+              <a:t>)</a:t>
+            </a:r>
+            <a:endParaRPr dirty="0"/>
           </a:p>
         </p:txBody>
       </p:sp>
@@ -1138,7 +1957,118 @@
           <a:lstStyle/>
           <a:p>
             <a:r>
-              <a:t>Diese Folie zeigt, dass die Pipeline nicht nur im Processor endet. Die neuen Felder sind im Datenmodell, werden validiert, aus dem Processor uebernommen und in JSON mit Tuple-Keys roundtripped.</a:t>
+              <a:rPr lang="de-DE" dirty="0" err="1"/>
+              <a:t>converter</a:t>
+            </a:r>
+            <a:r>
+              <a:rPr lang="de-DE" dirty="0"/>
+              <a:t> wurde um </a:t>
+            </a:r>
+            <a:r>
+              <a:rPr lang="de-DE" dirty="0" err="1"/>
+              <a:t>economic</a:t>
+            </a:r>
+            <a:r>
+              <a:rPr lang="de-DE" dirty="0"/>
+              <a:t> Felder erweitert. Validation + </a:t>
+            </a:r>
+            <a:r>
+              <a:rPr lang="de-DE" dirty="0" err="1"/>
+              <a:t>serialization</a:t>
+            </a:r>
+            <a:br>
+              <a:rPr lang="de-DE" dirty="0"/>
+            </a:br>
+            <a:br>
+              <a:rPr lang="de-DE" dirty="0"/>
+            </a:br>
+            <a:r>
+              <a:rPr dirty="0"/>
+              <a:t>Die </a:t>
+            </a:r>
+            <a:r>
+              <a:rPr dirty="0" err="1"/>
+              <a:t>neuen</a:t>
+            </a:r>
+            <a:r>
+              <a:rPr dirty="0"/>
+              <a:t> </a:t>
+            </a:r>
+            <a:r>
+              <a:rPr lang="de-DE" dirty="0" err="1"/>
+              <a:t>Economic</a:t>
+            </a:r>
+            <a:r>
+              <a:rPr lang="de-DE" dirty="0"/>
+              <a:t> </a:t>
+            </a:r>
+            <a:r>
+              <a:rPr dirty="0"/>
+              <a:t>Felder </a:t>
+            </a:r>
+            <a:r>
+              <a:rPr dirty="0" err="1"/>
+              <a:t>sind</a:t>
+            </a:r>
+            <a:r>
+              <a:rPr dirty="0"/>
+              <a:t> </a:t>
+            </a:r>
+            <a:r>
+              <a:rPr dirty="0" err="1"/>
+              <a:t>im</a:t>
+            </a:r>
+            <a:r>
+              <a:rPr dirty="0"/>
+              <a:t> </a:t>
+            </a:r>
+            <a:r>
+              <a:rPr dirty="0" err="1"/>
+              <a:t>Datenmodell</a:t>
+            </a:r>
+            <a:r>
+              <a:rPr dirty="0"/>
+              <a:t>, </a:t>
+            </a:r>
+            <a:r>
+              <a:rPr dirty="0" err="1"/>
+              <a:t>werden</a:t>
+            </a:r>
+            <a:r>
+              <a:rPr dirty="0"/>
+              <a:t> </a:t>
+            </a:r>
+            <a:r>
+              <a:rPr dirty="0" err="1"/>
+              <a:t>validiert</a:t>
+            </a:r>
+            <a:r>
+              <a:rPr dirty="0"/>
+              <a:t>, </a:t>
+            </a:r>
+            <a:r>
+              <a:rPr dirty="0" err="1"/>
+              <a:t>aus</a:t>
+            </a:r>
+            <a:r>
+              <a:rPr dirty="0"/>
+              <a:t> dem Processor </a:t>
+            </a:r>
+            <a:r>
+              <a:rPr dirty="0" err="1"/>
+              <a:t>uebernommen</a:t>
+            </a:r>
+            <a:r>
+              <a:rPr dirty="0"/>
+              <a:t> und in JSON </a:t>
+            </a:r>
+            <a:r>
+              <a:rPr dirty="0" err="1"/>
+              <a:t>mit</a:t>
+            </a:r>
+            <a:r>
+              <a:rPr dirty="0"/>
+              <a:t> Tuple-Keys roundtripped.</a:t>
             </a:r>
           </a:p>
         </p:txBody>
@@ -1222,7 +2152,113 @@
           <a:lstStyle/>
           <a:p>
             <a:r>
-              <a:t>Hier auf die konkreten Pyomo-Bausteine eingehen. Wichtig: background_purchase_cap/op rechnet die skalierten Technosphere-Mengen wieder in reale Einheiten um, bevor Preise angewendet werden.</a:t>
+              <a:rPr lang="de-DE" dirty="0" err="1"/>
+              <a:t>pyomo</a:t>
+            </a:r>
+            <a:r>
+              <a:rPr lang="de-DE" dirty="0"/>
+              <a:t> </a:t>
+            </a:r>
+            <a:r>
+              <a:rPr lang="de-DE" dirty="0" err="1"/>
+              <a:t>modell</a:t>
+            </a:r>
+            <a:r>
+              <a:rPr lang="de-DE" dirty="0"/>
+              <a:t> wurde auch erweitert + </a:t>
+            </a:r>
+            <a:r>
+              <a:rPr lang="de-DE" dirty="0" err="1"/>
+              <a:t>objective</a:t>
+            </a:r>
+            <a:r>
+              <a:rPr lang="de-DE" dirty="0"/>
+              <a:t> switch eingeführt</a:t>
+            </a:r>
+          </a:p>
+          <a:p>
+            <a:br>
+              <a:rPr lang="de-DE" dirty="0"/>
+            </a:br>
+            <a:r>
+              <a:rPr dirty="0" err="1"/>
+              <a:t>Wichtig</a:t>
+            </a:r>
+            <a:r>
+              <a:rPr dirty="0"/>
+              <a:t>: </a:t>
+            </a:r>
+            <a:r>
+              <a:rPr dirty="0" err="1"/>
+              <a:t>background_purchase_cap</a:t>
+            </a:r>
+            <a:r>
+              <a:rPr dirty="0"/>
+              <a:t>/op </a:t>
+            </a:r>
+            <a:r>
+              <a:rPr dirty="0" err="1"/>
+              <a:t>rechnet</a:t>
+            </a:r>
+            <a:r>
+              <a:rPr dirty="0"/>
+              <a:t> die </a:t>
+            </a:r>
+            <a:r>
+              <a:rPr dirty="0" err="1"/>
+              <a:t>skalierten</a:t>
+            </a:r>
+            <a:r>
+              <a:rPr dirty="0"/>
+              <a:t> Technosphere-Mengen </a:t>
+            </a:r>
+            <a:r>
+              <a:rPr dirty="0" err="1"/>
+              <a:t>wieder</a:t>
+            </a:r>
+            <a:r>
+              <a:rPr dirty="0"/>
+              <a:t> in </a:t>
+            </a:r>
+            <a:r>
+              <a:rPr dirty="0" err="1"/>
+              <a:t>reale</a:t>
+            </a:r>
+            <a:r>
+              <a:rPr dirty="0"/>
+              <a:t> </a:t>
+            </a:r>
+            <a:r>
+              <a:rPr dirty="0" err="1"/>
+              <a:t>Einheiten</a:t>
+            </a:r>
+            <a:r>
+              <a:rPr dirty="0"/>
+              <a:t> um, bevor </a:t>
+            </a:r>
+            <a:r>
+              <a:rPr dirty="0" err="1"/>
+              <a:t>Preise</a:t>
+            </a:r>
+            <a:r>
+              <a:rPr dirty="0"/>
+              <a:t> </a:t>
+            </a:r>
+            <a:r>
+              <a:rPr dirty="0" err="1"/>
+              <a:t>angewendet</a:t>
+            </a:r>
+            <a:r>
+              <a:rPr dirty="0"/>
+              <a:t> </a:t>
+            </a:r>
+            <a:r>
+              <a:rPr dirty="0" err="1"/>
+              <a:t>werden</a:t>
+            </a:r>
+            <a:r>
+              <a:rPr dirty="0"/>
+              <a:t>.</a:t>
             </a:r>
           </a:p>
         </p:txBody>
@@ -1390,7 +2426,122 @@
           <a:lstStyle/>
           <a:p>
             <a:r>
-              <a:t>Hier nicht jede Testfunktion vorlesen. Den Punkt machen: Die Erweiterung ist gegen User-Input, Datenfluss, Formelverhalten und Solver-Verhalten abgesichert.</a:t>
+              <a:rPr lang="de-DE" dirty="0"/>
+              <a:t>Ich habe eigentlich zu jedem </a:t>
+            </a:r>
+            <a:r>
+              <a:rPr lang="de-DE" dirty="0" err="1"/>
+              <a:t>shit</a:t>
+            </a:r>
+            <a:r>
+              <a:rPr lang="de-DE" dirty="0"/>
+              <a:t> den ich gemacht habe Tests erweitert oder ergänzt</a:t>
+            </a:r>
+            <a:br>
+              <a:rPr lang="de-DE" dirty="0"/>
+            </a:br>
+            <a:br>
+              <a:rPr lang="de-DE" dirty="0"/>
+            </a:br>
+            <a:r>
+              <a:rPr dirty="0"/>
+              <a:t>Hier nicht </a:t>
+            </a:r>
+            <a:r>
+              <a:rPr dirty="0" err="1"/>
+              <a:t>jede</a:t>
+            </a:r>
+            <a:r>
+              <a:rPr dirty="0"/>
+              <a:t> </a:t>
+            </a:r>
+            <a:r>
+              <a:rPr dirty="0" err="1"/>
+              <a:t>Testfunktion</a:t>
+            </a:r>
+            <a:r>
+              <a:rPr dirty="0"/>
+              <a:t> </a:t>
+            </a:r>
+            <a:r>
+              <a:rPr dirty="0" err="1"/>
+              <a:t>vorlesen</a:t>
+            </a:r>
+            <a:r>
+              <a:rPr dirty="0"/>
+              <a:t>. Den </a:t>
+            </a:r>
+            <a:r>
+              <a:rPr dirty="0" err="1"/>
+              <a:t>Punkt</a:t>
+            </a:r>
+            <a:r>
+              <a:rPr dirty="0"/>
+              <a:t> </a:t>
+            </a:r>
+            <a:r>
+              <a:rPr dirty="0" err="1"/>
+              <a:t>machen</a:t>
+            </a:r>
+            <a:r>
+              <a:rPr dirty="0"/>
+              <a:t>: Die </a:t>
+            </a:r>
+            <a:r>
+              <a:rPr dirty="0" err="1"/>
+              <a:t>Erweiterung</a:t>
+            </a:r>
+            <a:r>
+              <a:rPr dirty="0"/>
+              <a:t> </a:t>
+            </a:r>
+            <a:r>
+              <a:rPr dirty="0" err="1"/>
+              <a:t>ist</a:t>
+            </a:r>
+            <a:r>
+              <a:rPr dirty="0"/>
+              <a:t> </a:t>
+            </a:r>
+            <a:r>
+              <a:rPr dirty="0" err="1"/>
+              <a:t>gegen</a:t>
+            </a:r>
+            <a:r>
+              <a:rPr dirty="0"/>
+              <a:t> User-Input, </a:t>
+            </a:r>
+            <a:r>
+              <a:rPr dirty="0" err="1"/>
+              <a:t>Datenfluss</a:t>
+            </a:r>
+            <a:r>
+              <a:rPr dirty="0"/>
+              <a:t>, </a:t>
+            </a:r>
+            <a:r>
+              <a:rPr dirty="0" err="1"/>
+              <a:t>Formelverhalten</a:t>
+            </a:r>
+            <a:r>
+              <a:rPr dirty="0"/>
+              <a:t> und Solver-</a:t>
+            </a:r>
+            <a:r>
+              <a:rPr dirty="0" err="1"/>
+              <a:t>Verhalten</a:t>
+            </a:r>
+            <a:r>
+              <a:rPr dirty="0"/>
+              <a:t> </a:t>
+            </a:r>
+            <a:r>
+              <a:rPr dirty="0" err="1"/>
+              <a:t>abgesichert</a:t>
+            </a:r>
+            <a:r>
+              <a:rPr dirty="0"/>
+              <a:t>.</a:t>
             </a:r>
           </a:p>
         </p:txBody>
@@ -1810,7 +2961,7 @@
           <a:bodyPr/>
           <a:lstStyle/>
           <a:p>
-            <a:endParaRPr lang="en-US"/>
+            <a:endParaRPr lang="en-US" noProof="0" dirty="0"/>
           </a:p>
         </p:txBody>
       </p:sp>
@@ -1852,7 +3003,7 @@
           <a:bodyPr/>
           <a:lstStyle/>
           <a:p>
-            <a:endParaRPr lang="en-US"/>
+            <a:endParaRPr lang="en-US" noProof="0" dirty="0"/>
           </a:p>
         </p:txBody>
       </p:sp>
@@ -1907,7 +3058,7 @@
               </a:defRPr>
             </a:pPr>
             <a:r>
-              <a:rPr sz="3600" b="1">
+              <a:rPr lang="en-US" sz="3600" b="1" noProof="0" dirty="0">
                 <a:solidFill>
                   <a:srgbClr val="182225"/>
                 </a:solidFill>
@@ -1971,7 +3122,7 @@
               </a:defRPr>
             </a:pPr>
             <a:r>
-              <a:rPr sz="1725" b="0" dirty="0">
+              <a:rPr lang="en-US" sz="1725" b="0" noProof="0" dirty="0">
                 <a:solidFill>
                   <a:srgbClr val="5E7380"/>
                 </a:solidFill>
@@ -2035,7 +3186,7 @@
               </a:defRPr>
             </a:pPr>
             <a:r>
-              <a:rPr lang="de-DE" sz="1050" b="1" dirty="0">
+              <a:rPr lang="en-US" sz="1050" b="1" noProof="0" dirty="0">
                 <a:solidFill>
                   <a:srgbClr val="1E4D51"/>
                 </a:solidFill>
@@ -2043,18 +3194,7 @@
                 <a:ea typeface="Aptos"/>
                 <a:cs typeface="Aptos"/>
               </a:rPr>
-              <a:t>Implementation u</a:t>
-            </a:r>
-            <a:r>
-              <a:rPr sz="1050" b="1" dirty="0">
-                <a:solidFill>
-                  <a:srgbClr val="1E4D51"/>
-                </a:solidFill>
-                <a:latin typeface="Aptos"/>
-                <a:ea typeface="Aptos"/>
-                <a:cs typeface="Aptos"/>
-              </a:rPr>
-              <a:t>pdate</a:t>
+              <a:t>Implementation update</a:t>
             </a:r>
           </a:p>
         </p:txBody>
@@ -2110,15 +3250,15 @@
               </a:defRPr>
             </a:pPr>
             <a:r>
-              <a:rPr sz="1500" b="0" dirty="0">
-                <a:solidFill>
-                  <a:srgbClr val="182225"/>
-                </a:solidFill>
-                <a:latin typeface="Aptos"/>
-                <a:ea typeface="Aptos"/>
-                <a:cs typeface="Aptos"/>
-              </a:rPr>
-              <a:t>Focus: implemented pipeline, data flow, tests, documentation, and open decisions.</a:t>
+              <a:rPr lang="en-US" sz="1500" b="0" noProof="0" dirty="0">
+                <a:solidFill>
+                  <a:srgbClr val="182225"/>
+                </a:solidFill>
+                <a:latin typeface="Aptos"/>
+                <a:ea typeface="Aptos"/>
+                <a:cs typeface="Aptos"/>
+              </a:rPr>
+              <a:t>Focus: implemented pipeline, data flow, tests, documentation, and discussion points.</a:t>
             </a:r>
           </a:p>
         </p:txBody>
@@ -2159,7 +3299,7 @@
           <a:bodyPr/>
           <a:lstStyle/>
           <a:p>
-            <a:endParaRPr lang="en-US"/>
+            <a:endParaRPr lang="en-US" noProof="0" dirty="0"/>
           </a:p>
         </p:txBody>
       </p:sp>
@@ -2214,7 +3354,7 @@
               </a:defRPr>
             </a:pPr>
             <a:r>
-              <a:rPr sz="825" b="1">
+              <a:rPr lang="en-US" sz="825" b="1" noProof="0" dirty="0">
                 <a:solidFill>
                   <a:srgbClr val="1E4D51"/>
                 </a:solidFill>
@@ -2263,7 +3403,7 @@
           <a:bodyPr/>
           <a:lstStyle/>
           <a:p>
-            <a:endParaRPr lang="en-US"/>
+            <a:endParaRPr lang="en-US" noProof="0" dirty="0"/>
           </a:p>
         </p:txBody>
       </p:sp>
@@ -2318,7 +3458,7 @@
               </a:defRPr>
             </a:pPr>
             <a:r>
-              <a:rPr sz="825" b="1">
+              <a:rPr lang="en-US" sz="825" b="1" noProof="0" dirty="0">
                 <a:solidFill>
                   <a:srgbClr val="A65F3B"/>
                 </a:solidFill>
@@ -2367,7 +3507,7 @@
           <a:bodyPr/>
           <a:lstStyle/>
           <a:p>
-            <a:endParaRPr lang="en-US"/>
+            <a:endParaRPr lang="en-US" noProof="0" dirty="0"/>
           </a:p>
         </p:txBody>
       </p:sp>
@@ -2422,7 +3562,7 @@
               </a:defRPr>
             </a:pPr>
             <a:r>
-              <a:rPr sz="825" b="1">
+              <a:rPr lang="en-US" sz="825" b="1" noProof="0" dirty="0">
                 <a:solidFill>
                   <a:srgbClr val="5E7380"/>
                 </a:solidFill>
@@ -2473,7 +3613,7 @@
           <a:bodyPr/>
           <a:lstStyle/>
           <a:p>
-            <a:endParaRPr lang="en-US"/>
+            <a:endParaRPr lang="en-US" noProof="0" dirty="0"/>
           </a:p>
         </p:txBody>
       </p:sp>
@@ -2528,7 +3668,7 @@
               </a:defRPr>
             </a:pPr>
             <a:r>
-              <a:rPr sz="750" b="0">
+              <a:rPr lang="en-US" sz="750" b="0" noProof="0" dirty="0">
                 <a:solidFill>
                   <a:srgbClr val="5E7380"/>
                 </a:solidFill>
@@ -2536,7 +3676,29 @@
                 <a:ea typeface="Aptos"/>
                 <a:cs typeface="Aptos"/>
               </a:rPr>
-              <a:t>Sources: optimex repository, economic optimization docs, roadmap, tests, methanol_and_iron_cost notebook</a:t>
+              <a:t>Sources: optimex repository, economic optimization docs, roadmap, tests, </a:t>
+            </a:r>
+            <a:r>
+              <a:rPr lang="en-US" sz="750" b="0" noProof="0" dirty="0" err="1">
+                <a:solidFill>
+                  <a:srgbClr val="5E7380"/>
+                </a:solidFill>
+                <a:latin typeface="Aptos"/>
+                <a:ea typeface="Aptos"/>
+                <a:cs typeface="Aptos"/>
+              </a:rPr>
+              <a:t>methanol_and_iron_cost</a:t>
+            </a:r>
+            <a:r>
+              <a:rPr lang="en-US" sz="750" b="0" noProof="0" dirty="0">
+                <a:solidFill>
+                  <a:srgbClr val="5E7380"/>
+                </a:solidFill>
+                <a:latin typeface="Aptos"/>
+                <a:ea typeface="Aptos"/>
+                <a:cs typeface="Aptos"/>
+              </a:rPr>
+              <a:t> notebook</a:t>
             </a:r>
           </a:p>
         </p:txBody>
@@ -2592,7 +3754,7 @@
               </a:defRPr>
             </a:pPr>
             <a:r>
-              <a:rPr sz="825" b="0">
+              <a:rPr lang="en-US" sz="825" b="0" noProof="0" dirty="0">
                 <a:solidFill>
                   <a:srgbClr val="5E7380"/>
                 </a:solidFill>
@@ -2673,7 +3835,7 @@
           <a:bodyPr/>
           <a:lstStyle/>
           <a:p>
-            <a:endParaRPr lang="en-US"/>
+            <a:endParaRPr lang="en-US" noProof="0" dirty="0"/>
           </a:p>
         </p:txBody>
       </p:sp>
@@ -2715,7 +3877,7 @@
           <a:bodyPr/>
           <a:lstStyle/>
           <a:p>
-            <a:endParaRPr lang="en-US"/>
+            <a:endParaRPr lang="en-US" noProof="0" dirty="0"/>
           </a:p>
         </p:txBody>
       </p:sp>
@@ -2770,7 +3932,7 @@
               </a:defRPr>
             </a:pPr>
             <a:r>
-              <a:rPr sz="900" b="1">
+              <a:rPr lang="en-US" sz="1200" b="1" noProof="0" dirty="0">
                 <a:solidFill>
                   <a:srgbClr val="1E4D51"/>
                 </a:solidFill>
@@ -2834,7 +3996,7 @@
               </a:defRPr>
             </a:pPr>
             <a:r>
-              <a:rPr sz="2550" b="1">
+              <a:rPr lang="en-US" sz="2550" b="1" noProof="0" dirty="0">
                 <a:solidFill>
                   <a:srgbClr val="182225"/>
                 </a:solidFill>
@@ -2842,7 +4004,7 @@
                 <a:ea typeface="Aptos Display"/>
                 <a:cs typeface="Aptos Display"/>
               </a:rPr>
-              <a:t>The feature is documented as an optimex capability, not only as thesis code.</a:t>
+              <a:t>The economic extension is documented as an optimex capability</a:t>
             </a:r>
           </a:p>
         </p:txBody>
@@ -2885,7 +4047,7 @@
           <a:bodyPr/>
           <a:lstStyle/>
           <a:p>
-            <a:endParaRPr lang="en-US"/>
+            <a:endParaRPr lang="en-US" noProof="0" dirty="0"/>
           </a:p>
         </p:txBody>
       </p:sp>
@@ -2940,7 +4102,7 @@
               </a:defRPr>
             </a:pPr>
             <a:r>
-              <a:rPr sz="750" b="0">
+              <a:rPr lang="en-US" sz="750" b="0" noProof="0" dirty="0">
                 <a:solidFill>
                   <a:srgbClr val="5E7380"/>
                 </a:solidFill>
@@ -2948,7 +4110,29 @@
                 <a:ea typeface="Aptos"/>
                 <a:cs typeface="Aptos"/>
               </a:rPr>
-              <a:t>Sources: docs/content/economic_optimization.md; docs/api/optimizer.md; roadmap</a:t>
+              <a:t>Sources: docs/content/economic_optimization.md; docs/</a:t>
+            </a:r>
+            <a:r>
+              <a:rPr lang="en-US" sz="750" b="0" noProof="0" dirty="0" err="1">
+                <a:solidFill>
+                  <a:srgbClr val="5E7380"/>
+                </a:solidFill>
+                <a:latin typeface="Aptos"/>
+                <a:ea typeface="Aptos"/>
+                <a:cs typeface="Aptos"/>
+              </a:rPr>
+              <a:t>api</a:t>
+            </a:r>
+            <a:r>
+              <a:rPr lang="en-US" sz="750" b="0" noProof="0" dirty="0">
+                <a:solidFill>
+                  <a:srgbClr val="5E7380"/>
+                </a:solidFill>
+                <a:latin typeface="Aptos"/>
+                <a:ea typeface="Aptos"/>
+                <a:cs typeface="Aptos"/>
+              </a:rPr>
+              <a:t>/optimizer.md; roadmap</a:t>
             </a:r>
           </a:p>
         </p:txBody>
@@ -3004,7 +4188,7 @@
               </a:defRPr>
             </a:pPr>
             <a:r>
-              <a:rPr sz="825" b="0">
+              <a:rPr lang="en-US" sz="825" b="0" noProof="0" dirty="0">
                 <a:solidFill>
                   <a:srgbClr val="5E7380"/>
                 </a:solidFill>
@@ -3053,7 +4237,7 @@
           <a:bodyPr/>
           <a:lstStyle/>
           <a:p>
-            <a:endParaRPr lang="en-US"/>
+            <a:endParaRPr lang="en-US" noProof="0" dirty="0"/>
           </a:p>
         </p:txBody>
       </p:sp>
@@ -3108,7 +4292,7 @@
               </a:defRPr>
             </a:pPr>
             <a:r>
-              <a:rPr sz="975" b="1">
+              <a:rPr lang="en-US" sz="975" b="1" noProof="0" dirty="0">
                 <a:solidFill>
                   <a:srgbClr val="1E4D51"/>
                 </a:solidFill>
@@ -3157,7 +4341,7 @@
           <a:bodyPr/>
           <a:lstStyle/>
           <a:p>
-            <a:endParaRPr lang="en-US"/>
+            <a:endParaRPr lang="en-US" noProof="0" dirty="0"/>
           </a:p>
         </p:txBody>
       </p:sp>
@@ -3212,7 +4396,7 @@
               </a:defRPr>
             </a:pPr>
             <a:r>
-              <a:rPr sz="975" b="1">
+              <a:rPr lang="en-US" sz="975" b="1" noProof="0" dirty="0">
                 <a:solidFill>
                   <a:srgbClr val="1E4D51"/>
                 </a:solidFill>
@@ -3261,7 +4445,7 @@
           <a:bodyPr/>
           <a:lstStyle/>
           <a:p>
-            <a:endParaRPr lang="en-US"/>
+            <a:endParaRPr lang="en-US" noProof="0" dirty="0"/>
           </a:p>
         </p:txBody>
       </p:sp>
@@ -3316,7 +4500,7 @@
               </a:defRPr>
             </a:pPr>
             <a:r>
-              <a:rPr sz="1050" b="1">
+              <a:rPr lang="en-US" sz="1050" b="1" noProof="0" dirty="0">
                 <a:solidFill>
                   <a:srgbClr val="182225"/>
                 </a:solidFill>
@@ -3365,7 +4549,7 @@
           <a:bodyPr/>
           <a:lstStyle/>
           <a:p>
-            <a:endParaRPr lang="en-US"/>
+            <a:endParaRPr lang="en-US" noProof="0" dirty="0"/>
           </a:p>
         </p:txBody>
       </p:sp>
@@ -3420,7 +4604,7 @@
               </a:defRPr>
             </a:pPr>
             <a:r>
-              <a:rPr sz="1050" b="0">
+              <a:rPr lang="en-US" sz="1050" b="0" noProof="0" dirty="0">
                 <a:solidFill>
                   <a:srgbClr val="182225"/>
                 </a:solidFill>
@@ -3469,7 +4653,7 @@
           <a:bodyPr/>
           <a:lstStyle/>
           <a:p>
-            <a:endParaRPr lang="en-US"/>
+            <a:endParaRPr lang="en-US" noProof="0" dirty="0"/>
           </a:p>
         </p:txBody>
       </p:sp>
@@ -3524,7 +4708,7 @@
               </a:defRPr>
             </a:pPr>
             <a:r>
-              <a:rPr sz="1050" b="1">
+              <a:rPr lang="en-US" sz="1050" b="1" noProof="0" dirty="0">
                 <a:solidFill>
                   <a:srgbClr val="182225"/>
                 </a:solidFill>
@@ -3573,7 +4757,7 @@
           <a:bodyPr/>
           <a:lstStyle/>
           <a:p>
-            <a:endParaRPr lang="en-US"/>
+            <a:endParaRPr lang="en-US" noProof="0" dirty="0"/>
           </a:p>
         </p:txBody>
       </p:sp>
@@ -3628,7 +4812,7 @@
               </a:defRPr>
             </a:pPr>
             <a:r>
-              <a:rPr sz="1050" b="0">
+              <a:rPr lang="en-US" sz="1050" b="0" noProof="0" dirty="0">
                 <a:solidFill>
                   <a:srgbClr val="182225"/>
                 </a:solidFill>
@@ -3677,7 +4861,7 @@
           <a:bodyPr/>
           <a:lstStyle/>
           <a:p>
-            <a:endParaRPr lang="en-US"/>
+            <a:endParaRPr lang="en-US" noProof="0" dirty="0"/>
           </a:p>
         </p:txBody>
       </p:sp>
@@ -3732,7 +4916,7 @@
               </a:defRPr>
             </a:pPr>
             <a:r>
-              <a:rPr sz="1050" b="1">
+              <a:rPr lang="en-US" sz="1050" b="1" noProof="0" dirty="0">
                 <a:solidFill>
                   <a:srgbClr val="182225"/>
                 </a:solidFill>
@@ -3781,7 +4965,7 @@
           <a:bodyPr/>
           <a:lstStyle/>
           <a:p>
-            <a:endParaRPr lang="en-US"/>
+            <a:endParaRPr lang="en-US" noProof="0" dirty="0"/>
           </a:p>
         </p:txBody>
       </p:sp>
@@ -3836,7 +5020,7 @@
               </a:defRPr>
             </a:pPr>
             <a:r>
-              <a:rPr sz="1050" b="0">
+              <a:rPr lang="en-US" sz="1050" b="0" noProof="0" dirty="0">
                 <a:solidFill>
                   <a:srgbClr val="182225"/>
                 </a:solidFill>
@@ -3885,7 +5069,7 @@
           <a:bodyPr/>
           <a:lstStyle/>
           <a:p>
-            <a:endParaRPr lang="en-US"/>
+            <a:endParaRPr lang="en-US" noProof="0" dirty="0"/>
           </a:p>
         </p:txBody>
       </p:sp>
@@ -3940,7 +5124,7 @@
               </a:defRPr>
             </a:pPr>
             <a:r>
-              <a:rPr sz="1050" b="1">
+              <a:rPr lang="en-US" sz="1050" b="1" noProof="0" dirty="0">
                 <a:solidFill>
                   <a:srgbClr val="182225"/>
                 </a:solidFill>
@@ -3989,7 +5173,7 @@
           <a:bodyPr/>
           <a:lstStyle/>
           <a:p>
-            <a:endParaRPr lang="en-US"/>
+            <a:endParaRPr lang="en-US" noProof="0" dirty="0"/>
           </a:p>
         </p:txBody>
       </p:sp>
@@ -4044,7 +5228,7 @@
               </a:defRPr>
             </a:pPr>
             <a:r>
-              <a:rPr sz="1050" b="0">
+              <a:rPr lang="en-US" sz="1050" b="0" noProof="0" dirty="0">
                 <a:solidFill>
                   <a:srgbClr val="182225"/>
                 </a:solidFill>
@@ -4093,7 +5277,7 @@
           <a:bodyPr/>
           <a:lstStyle/>
           <a:p>
-            <a:endParaRPr lang="en-US"/>
+            <a:endParaRPr lang="en-US" noProof="0" dirty="0"/>
           </a:p>
         </p:txBody>
       </p:sp>
@@ -4148,7 +5332,7 @@
               </a:defRPr>
             </a:pPr>
             <a:r>
-              <a:rPr sz="1650" b="1">
+              <a:rPr lang="en-US" sz="1650" b="1" noProof="0" dirty="0">
                 <a:solidFill>
                   <a:srgbClr val="1E4D51"/>
                 </a:solidFill>
@@ -4199,7 +5383,7 @@
           <a:bodyPr/>
           <a:lstStyle/>
           <a:p>
-            <a:endParaRPr lang="en-US"/>
+            <a:endParaRPr lang="en-US" noProof="0" dirty="0"/>
           </a:p>
         </p:txBody>
       </p:sp>
@@ -4254,7 +5438,7 @@
               </a:defRPr>
             </a:pPr>
             <a:r>
-              <a:rPr sz="1050" b="0">
+              <a:rPr lang="en-US" sz="1050" b="0" noProof="0" dirty="0">
                 <a:solidFill>
                   <a:srgbClr val="182225"/>
                 </a:solidFill>
@@ -4305,7 +5489,7 @@
           <a:bodyPr/>
           <a:lstStyle/>
           <a:p>
-            <a:endParaRPr lang="en-US"/>
+            <a:endParaRPr lang="en-US" noProof="0" dirty="0"/>
           </a:p>
         </p:txBody>
       </p:sp>
@@ -4325,7 +5509,7 @@
         </p:nvSpPr>
         <p:spPr>
           <a:xfrm>
-            <a:off x="8343900" y="3524250"/>
+            <a:off x="8343900" y="3545516"/>
             <a:ext cx="2000250" cy="361950"/>
           </a:xfrm>
           <a:prstGeom prst="rect">
@@ -4360,7 +5544,7 @@
               </a:defRPr>
             </a:pPr>
             <a:r>
-              <a:rPr sz="1050" b="0">
+              <a:rPr lang="en-US" sz="1050" b="0" noProof="0" dirty="0">
                 <a:solidFill>
                   <a:srgbClr val="182225"/>
                 </a:solidFill>
@@ -4411,7 +5595,7 @@
           <a:bodyPr/>
           <a:lstStyle/>
           <a:p>
-            <a:endParaRPr lang="en-US"/>
+            <a:endParaRPr lang="en-US" noProof="0" dirty="0"/>
           </a:p>
         </p:txBody>
       </p:sp>
@@ -4431,7 +5615,7 @@
         </p:nvSpPr>
         <p:spPr>
           <a:xfrm>
-            <a:off x="8343900" y="3924300"/>
+            <a:off x="8343900" y="3956199"/>
             <a:ext cx="2000250" cy="361950"/>
           </a:xfrm>
           <a:prstGeom prst="rect">
@@ -4466,7 +5650,7 @@
               </a:defRPr>
             </a:pPr>
             <a:r>
-              <a:rPr sz="1050" b="0">
+              <a:rPr lang="en-US" sz="1050" b="0" noProof="0" dirty="0">
                 <a:solidFill>
                   <a:srgbClr val="182225"/>
                 </a:solidFill>
@@ -4517,7 +5701,7 @@
           <a:bodyPr/>
           <a:lstStyle/>
           <a:p>
-            <a:endParaRPr lang="en-US"/>
+            <a:endParaRPr lang="en-US" noProof="0" dirty="0"/>
           </a:p>
         </p:txBody>
       </p:sp>
@@ -4537,7 +5721,7 @@
         </p:nvSpPr>
         <p:spPr>
           <a:xfrm>
-            <a:off x="8343900" y="4324350"/>
+            <a:off x="8343900" y="4345616"/>
             <a:ext cx="2000250" cy="361950"/>
           </a:xfrm>
           <a:prstGeom prst="rect">
@@ -4572,7 +5756,7 @@
               </a:defRPr>
             </a:pPr>
             <a:r>
-              <a:rPr sz="1050" b="0">
+              <a:rPr lang="en-US" sz="1050" b="0" noProof="0" dirty="0">
                 <a:solidFill>
                   <a:srgbClr val="182225"/>
                 </a:solidFill>
@@ -4653,7 +5837,7 @@
           <a:bodyPr/>
           <a:lstStyle/>
           <a:p>
-            <a:endParaRPr lang="en-US"/>
+            <a:endParaRPr lang="en-US" noProof="0" dirty="0"/>
           </a:p>
         </p:txBody>
       </p:sp>
@@ -4695,7 +5879,7 @@
           <a:bodyPr/>
           <a:lstStyle/>
           <a:p>
-            <a:endParaRPr lang="en-US"/>
+            <a:endParaRPr lang="en-US" noProof="0" dirty="0"/>
           </a:p>
         </p:txBody>
       </p:sp>
@@ -4750,7 +5934,7 @@
               </a:defRPr>
             </a:pPr>
             <a:r>
-              <a:rPr sz="900" b="1">
+              <a:rPr lang="en-US" sz="1200" b="1" noProof="0" dirty="0">
                 <a:solidFill>
                   <a:srgbClr val="1E4D51"/>
                 </a:solidFill>
@@ -4814,7 +5998,7 @@
               </a:defRPr>
             </a:pPr>
             <a:r>
-              <a:rPr sz="2550" b="1">
+              <a:rPr lang="en-US" sz="2550" b="1" noProof="0" dirty="0">
                 <a:solidFill>
                   <a:srgbClr val="182225"/>
                 </a:solidFill>
@@ -4865,7 +6049,7 @@
           <a:bodyPr/>
           <a:lstStyle/>
           <a:p>
-            <a:endParaRPr lang="en-US"/>
+            <a:endParaRPr lang="en-US" noProof="0" dirty="0"/>
           </a:p>
         </p:txBody>
       </p:sp>
@@ -4920,7 +6104,7 @@
               </a:defRPr>
             </a:pPr>
             <a:r>
-              <a:rPr sz="750" b="0">
+              <a:rPr lang="en-US" sz="750" b="0" noProof="0" dirty="0">
                 <a:solidFill>
                   <a:srgbClr val="5E7380"/>
                 </a:solidFill>
@@ -4928,7 +6112,29 @@
                 <a:ea typeface="Aptos"/>
                 <a:cs typeface="Aptos"/>
               </a:rPr>
-              <a:t>Source: notebooks/methanol_and_iron_cost.ipynb; roadmap step 19</a:t>
+              <a:t>Source: notebooks/</a:t>
+            </a:r>
+            <a:r>
+              <a:rPr lang="en-US" sz="750" b="0" noProof="0" dirty="0" err="1">
+                <a:solidFill>
+                  <a:srgbClr val="5E7380"/>
+                </a:solidFill>
+                <a:latin typeface="Aptos"/>
+                <a:ea typeface="Aptos"/>
+                <a:cs typeface="Aptos"/>
+              </a:rPr>
+              <a:t>methanol_and_iron_cost.ipynb</a:t>
+            </a:r>
+            <a:r>
+              <a:rPr lang="en-US" sz="750" b="0" noProof="0" dirty="0">
+                <a:solidFill>
+                  <a:srgbClr val="5E7380"/>
+                </a:solidFill>
+                <a:latin typeface="Aptos"/>
+                <a:ea typeface="Aptos"/>
+                <a:cs typeface="Aptos"/>
+              </a:rPr>
+              <a:t>; roadmap step 19</a:t>
             </a:r>
           </a:p>
         </p:txBody>
@@ -4984,7 +6190,7 @@
               </a:defRPr>
             </a:pPr>
             <a:r>
-              <a:rPr sz="825" b="0">
+              <a:rPr lang="en-US" sz="825" b="0" noProof="0" dirty="0">
                 <a:solidFill>
                   <a:srgbClr val="5E7380"/>
                 </a:solidFill>
@@ -5033,7 +6239,7 @@
           <a:bodyPr/>
           <a:lstStyle/>
           <a:p>
-            <a:endParaRPr lang="en-US"/>
+            <a:endParaRPr lang="en-US" noProof="0" dirty="0"/>
           </a:p>
         </p:txBody>
       </p:sp>
@@ -5075,7 +6281,7 @@
           <a:bodyPr/>
           <a:lstStyle/>
           <a:p>
-            <a:endParaRPr lang="en-US"/>
+            <a:endParaRPr lang="en-US" noProof="0" dirty="0"/>
           </a:p>
         </p:txBody>
       </p:sp>
@@ -5130,7 +6336,7 @@
               </a:defRPr>
             </a:pPr>
             <a:r>
-              <a:rPr sz="1125" b="1">
+              <a:rPr lang="en-US" sz="1125" b="1" noProof="0" dirty="0">
                 <a:solidFill>
                   <a:srgbClr val="182225"/>
                 </a:solidFill>
@@ -5194,7 +6400,7 @@
               </a:defRPr>
             </a:pPr>
             <a:r>
-              <a:rPr sz="900" b="0">
+              <a:rPr lang="en-US" sz="900" b="0" noProof="0" dirty="0">
                 <a:solidFill>
                   <a:srgbClr val="5E7380"/>
                 </a:solidFill>
@@ -5202,8 +6408,27 @@
                 <a:ea typeface="Aptos"/>
                 <a:cs typeface="Aptos"/>
               </a:rPr>
-              <a:t>copied from methanol_and_iron.ipynb</a:t>
-            </a:r>
+              <a:t>copied from </a:t>
+            </a:r>
+            <a:r>
+              <a:rPr lang="en-US" sz="900" b="0" noProof="0" dirty="0" err="1">
+                <a:solidFill>
+                  <a:srgbClr val="5E7380"/>
+                </a:solidFill>
+                <a:latin typeface="Aptos"/>
+                <a:ea typeface="Aptos"/>
+                <a:cs typeface="Aptos"/>
+              </a:rPr>
+              <a:t>methanol_and_iron.ipynb</a:t>
+            </a:r>
+            <a:endParaRPr lang="en-US" sz="900" b="0" noProof="0" dirty="0">
+              <a:solidFill>
+                <a:srgbClr val="5E7380"/>
+              </a:solidFill>
+              <a:latin typeface="Aptos"/>
+              <a:ea typeface="Aptos"/>
+              <a:cs typeface="Aptos"/>
+            </a:endParaRPr>
           </a:p>
         </p:txBody>
       </p:sp>
@@ -5258,7 +6483,7 @@
               </a:defRPr>
             </a:pPr>
             <a:r>
-              <a:rPr sz="1950" b="1">
+              <a:rPr lang="en-US" sz="1950" b="1" noProof="0" dirty="0">
                 <a:solidFill>
                   <a:srgbClr val="2D6F73"/>
                 </a:solidFill>
@@ -5307,7 +6532,7 @@
           <a:bodyPr/>
           <a:lstStyle/>
           <a:p>
-            <a:endParaRPr lang="en-US"/>
+            <a:endParaRPr lang="en-US" noProof="0" dirty="0"/>
           </a:p>
         </p:txBody>
       </p:sp>
@@ -5349,7 +6574,7 @@
           <a:bodyPr/>
           <a:lstStyle/>
           <a:p>
-            <a:endParaRPr lang="en-US"/>
+            <a:endParaRPr lang="en-US" noProof="0" dirty="0"/>
           </a:p>
         </p:txBody>
       </p:sp>
@@ -5404,7 +6629,7 @@
               </a:defRPr>
             </a:pPr>
             <a:r>
-              <a:rPr sz="1125" b="1">
+              <a:rPr lang="en-US" sz="1125" b="1" noProof="0" dirty="0">
                 <a:solidFill>
                   <a:srgbClr val="182225"/>
                 </a:solidFill>
@@ -5468,7 +6693,7 @@
               </a:defRPr>
             </a:pPr>
             <a:r>
-              <a:rPr sz="900" b="0">
+              <a:rPr lang="en-US" sz="900" b="0" noProof="0" dirty="0">
                 <a:solidFill>
                   <a:srgbClr val="5E7380"/>
                 </a:solidFill>
@@ -5532,7 +6757,7 @@
               </a:defRPr>
             </a:pPr>
             <a:r>
-              <a:rPr sz="1950" b="1">
+              <a:rPr lang="en-US" sz="1950" b="1" noProof="0" dirty="0">
                 <a:solidFill>
                   <a:srgbClr val="2D6F73"/>
                 </a:solidFill>
@@ -5581,7 +6806,7 @@
           <a:bodyPr/>
           <a:lstStyle/>
           <a:p>
-            <a:endParaRPr lang="en-US"/>
+            <a:endParaRPr lang="en-US" noProof="0" dirty="0"/>
           </a:p>
         </p:txBody>
       </p:sp>
@@ -5623,7 +6848,7 @@
           <a:bodyPr/>
           <a:lstStyle/>
           <a:p>
-            <a:endParaRPr lang="en-US"/>
+            <a:endParaRPr lang="en-US" noProof="0" dirty="0"/>
           </a:p>
         </p:txBody>
       </p:sp>
@@ -5678,7 +6903,7 @@
               </a:defRPr>
             </a:pPr>
             <a:r>
-              <a:rPr sz="1125" b="1">
+              <a:rPr lang="en-US" sz="1125" b="1" noProof="0" dirty="0">
                 <a:solidFill>
                   <a:srgbClr val="182225"/>
                 </a:solidFill>
@@ -5742,7 +6967,7 @@
               </a:defRPr>
             </a:pPr>
             <a:r>
-              <a:rPr sz="900" b="0">
+              <a:rPr lang="en-US" sz="900" b="0" noProof="0" dirty="0">
                 <a:solidFill>
                   <a:srgbClr val="5E7380"/>
                 </a:solidFill>
@@ -5791,7 +7016,7 @@
           <a:bodyPr/>
           <a:lstStyle/>
           <a:p>
-            <a:endParaRPr lang="en-US"/>
+            <a:endParaRPr lang="en-US" noProof="0" dirty="0"/>
           </a:p>
         </p:txBody>
       </p:sp>
@@ -5833,7 +7058,7 @@
           <a:bodyPr/>
           <a:lstStyle/>
           <a:p>
-            <a:endParaRPr lang="en-US"/>
+            <a:endParaRPr lang="en-US" noProof="0" dirty="0"/>
           </a:p>
         </p:txBody>
       </p:sp>
@@ -5888,7 +7113,7 @@
               </a:defRPr>
             </a:pPr>
             <a:r>
-              <a:rPr sz="1125" b="1">
+              <a:rPr lang="en-US" sz="1125" b="1" noProof="0" dirty="0">
                 <a:solidFill>
                   <a:srgbClr val="182225"/>
                 </a:solidFill>
@@ -5952,7 +7177,7 @@
               </a:defRPr>
             </a:pPr>
             <a:r>
-              <a:rPr sz="900" b="0">
+              <a:rPr lang="en-US" sz="900" b="0" noProof="0" dirty="0" err="1">
                 <a:solidFill>
                   <a:srgbClr val="5E7380"/>
                 </a:solidFill>
@@ -5960,7 +7185,18 @@
                 <a:ea typeface="Aptos"/>
                 <a:cs typeface="Aptos"/>
               </a:rPr>
-              <a:t>create_model(... objective="cost")</a:t>
+              <a:t>create_model</a:t>
+            </a:r>
+            <a:r>
+              <a:rPr lang="en-US" sz="900" b="0" noProof="0" dirty="0">
+                <a:solidFill>
+                  <a:srgbClr val="5E7380"/>
+                </a:solidFill>
+                <a:latin typeface="Aptos"/>
+                <a:ea typeface="Aptos"/>
+                <a:cs typeface="Aptos"/>
+              </a:rPr>
+              <a:t>(... objective="cost")</a:t>
             </a:r>
           </a:p>
         </p:txBody>
@@ -6016,7 +7252,7 @@
               </a:defRPr>
             </a:pPr>
             <a:r>
-              <a:rPr sz="1950" b="1">
+              <a:rPr lang="en-US" sz="1950" b="1" noProof="0" dirty="0">
                 <a:solidFill>
                   <a:srgbClr val="2D6F73"/>
                 </a:solidFill>
@@ -6065,7 +7301,7 @@
           <a:bodyPr/>
           <a:lstStyle/>
           <a:p>
-            <a:endParaRPr lang="en-US"/>
+            <a:endParaRPr lang="en-US" noProof="0" dirty="0"/>
           </a:p>
         </p:txBody>
       </p:sp>
@@ -6107,7 +7343,7 @@
           <a:bodyPr/>
           <a:lstStyle/>
           <a:p>
-            <a:endParaRPr lang="en-US"/>
+            <a:endParaRPr lang="en-US" noProof="0" dirty="0"/>
           </a:p>
         </p:txBody>
       </p:sp>
@@ -6162,7 +7398,7 @@
               </a:defRPr>
             </a:pPr>
             <a:r>
-              <a:rPr sz="1125" b="1">
+              <a:rPr lang="en-US" sz="1125" b="1" noProof="0" dirty="0">
                 <a:solidFill>
                   <a:srgbClr val="182225"/>
                 </a:solidFill>
@@ -6226,7 +7462,7 @@
               </a:defRPr>
             </a:pPr>
             <a:r>
-              <a:rPr sz="900" b="0">
+              <a:rPr lang="en-US" sz="900" b="0" noProof="0" dirty="0" err="1">
                 <a:solidFill>
                   <a:srgbClr val="5E7380"/>
                 </a:solidFill>
@@ -6234,7 +7470,62 @@
                 <a:ea typeface="Aptos"/>
                 <a:cs typeface="Aptos"/>
               </a:rPr>
-              <a:t>total_cost, cost_cap, cost_op by year</a:t>
+              <a:t>total_cost</a:t>
+            </a:r>
+            <a:r>
+              <a:rPr lang="en-US" sz="900" b="0" noProof="0" dirty="0">
+                <a:solidFill>
+                  <a:srgbClr val="5E7380"/>
+                </a:solidFill>
+                <a:latin typeface="Aptos"/>
+                <a:ea typeface="Aptos"/>
+                <a:cs typeface="Aptos"/>
+              </a:rPr>
+              <a:t>, </a:t>
+            </a:r>
+            <a:r>
+              <a:rPr lang="en-US" sz="900" b="0" noProof="0" dirty="0" err="1">
+                <a:solidFill>
+                  <a:srgbClr val="5E7380"/>
+                </a:solidFill>
+                <a:latin typeface="Aptos"/>
+                <a:ea typeface="Aptos"/>
+                <a:cs typeface="Aptos"/>
+              </a:rPr>
+              <a:t>cost_cap</a:t>
+            </a:r>
+            <a:r>
+              <a:rPr lang="en-US" sz="900" b="0" noProof="0" dirty="0">
+                <a:solidFill>
+                  <a:srgbClr val="5E7380"/>
+                </a:solidFill>
+                <a:latin typeface="Aptos"/>
+                <a:ea typeface="Aptos"/>
+                <a:cs typeface="Aptos"/>
+              </a:rPr>
+              <a:t>, </a:t>
+            </a:r>
+            <a:r>
+              <a:rPr lang="en-US" sz="900" b="0" noProof="0" dirty="0" err="1">
+                <a:solidFill>
+                  <a:srgbClr val="5E7380"/>
+                </a:solidFill>
+                <a:latin typeface="Aptos"/>
+                <a:ea typeface="Aptos"/>
+                <a:cs typeface="Aptos"/>
+              </a:rPr>
+              <a:t>cost_op</a:t>
+            </a:r>
+            <a:r>
+              <a:rPr lang="en-US" sz="900" b="0" noProof="0" dirty="0">
+                <a:solidFill>
+                  <a:srgbClr val="5E7380"/>
+                </a:solidFill>
+                <a:latin typeface="Aptos"/>
+                <a:ea typeface="Aptos"/>
+                <a:cs typeface="Aptos"/>
+              </a:rPr>
+              <a:t> by year</a:t>
             </a:r>
           </a:p>
         </p:txBody>
@@ -6275,7 +7566,7 @@
           <a:bodyPr/>
           <a:lstStyle/>
           <a:p>
-            <a:endParaRPr lang="en-US"/>
+            <a:endParaRPr lang="en-US" noProof="0" dirty="0"/>
           </a:p>
         </p:txBody>
       </p:sp>
@@ -6330,7 +7621,7 @@
               </a:defRPr>
             </a:pPr>
             <a:r>
-              <a:rPr sz="1350" b="1">
+              <a:rPr lang="en-US" sz="1350" b="1" noProof="0" dirty="0">
                 <a:solidFill>
                   <a:srgbClr val="5E7380"/>
                 </a:solidFill>
@@ -6394,7 +7685,7 @@
               </a:defRPr>
             </a:pPr>
             <a:r>
-              <a:rPr sz="975" b="0">
+              <a:rPr lang="en-US" sz="975" b="0" noProof="0" dirty="0">
                 <a:solidFill>
                   <a:srgbClr val="182225"/>
                 </a:solidFill>
@@ -6421,7 +7712,7 @@
 </file>
 
 <file path=ppt/slides/slide12.xml><?xml version="1.0" encoding="utf-8"?>
-<p:sld xmlns:a="http://schemas.openxmlformats.org/drawingml/2006/main" xmlns:r="http://schemas.openxmlformats.org/officeDocument/2006/relationships" xmlns:p="http://schemas.openxmlformats.org/presentationml/2006/main">
+<p:sld xmlns:a="http://schemas.openxmlformats.org/drawingml/2006/main" xmlns:r="http://schemas.openxmlformats.org/officeDocument/2006/relationships" xmlns:p="http://schemas.openxmlformats.org/presentationml/2006/main" show="0">
   <p:cSld>
     <p:spTree>
       <p:nvGrpSpPr>
@@ -6475,7 +7766,7 @@
           <a:bodyPr/>
           <a:lstStyle/>
           <a:p>
-            <a:endParaRPr lang="en-US"/>
+            <a:endParaRPr lang="en-US" noProof="0" dirty="0"/>
           </a:p>
         </p:txBody>
       </p:sp>
@@ -6517,7 +7808,7 @@
           <a:bodyPr/>
           <a:lstStyle/>
           <a:p>
-            <a:endParaRPr lang="en-US"/>
+            <a:endParaRPr lang="en-US" noProof="0" dirty="0"/>
           </a:p>
         </p:txBody>
       </p:sp>
@@ -6572,7 +7863,7 @@
               </a:defRPr>
             </a:pPr>
             <a:r>
-              <a:rPr sz="900" b="1">
+              <a:rPr lang="en-US" sz="1200" b="1" noProof="0" dirty="0">
                 <a:solidFill>
                   <a:srgbClr val="1E4D51"/>
                 </a:solidFill>
@@ -6636,7 +7927,7 @@
               </a:defRPr>
             </a:pPr>
             <a:r>
-              <a:rPr sz="2550" b="1" dirty="0">
+              <a:rPr lang="en-US" sz="2550" b="1" noProof="0" dirty="0">
                 <a:solidFill>
                   <a:srgbClr val="182225"/>
                 </a:solidFill>
@@ -6687,7 +7978,7 @@
           <a:bodyPr/>
           <a:lstStyle/>
           <a:p>
-            <a:endParaRPr lang="en-US"/>
+            <a:endParaRPr lang="en-US" noProof="0" dirty="0"/>
           </a:p>
         </p:txBody>
       </p:sp>
@@ -6742,7 +8033,7 @@
               </a:defRPr>
             </a:pPr>
             <a:r>
-              <a:rPr sz="750" b="0">
+              <a:rPr lang="en-US" sz="750" b="0" noProof="0" dirty="0">
                 <a:solidFill>
                   <a:srgbClr val="5E7380"/>
                 </a:solidFill>
@@ -6806,7 +8097,7 @@
               </a:defRPr>
             </a:pPr>
             <a:r>
-              <a:rPr sz="825" b="0">
+              <a:rPr lang="en-US" sz="825" b="0" noProof="0" dirty="0">
                 <a:solidFill>
                   <a:srgbClr val="5E7380"/>
                 </a:solidFill>
@@ -6855,7 +8146,7 @@
           <a:bodyPr/>
           <a:lstStyle/>
           <a:p>
-            <a:endParaRPr lang="en-US"/>
+            <a:endParaRPr lang="en-US" noProof="0" dirty="0"/>
           </a:p>
         </p:txBody>
       </p:sp>
@@ -6910,7 +8201,7 @@
               </a:defRPr>
             </a:pPr>
             <a:r>
-              <a:rPr sz="975" b="1">
+              <a:rPr lang="en-US" sz="975" b="1" noProof="0" dirty="0">
                 <a:solidFill>
                   <a:srgbClr val="1E4D51"/>
                 </a:solidFill>
@@ -6959,7 +8250,7 @@
           <a:bodyPr/>
           <a:lstStyle/>
           <a:p>
-            <a:endParaRPr lang="en-US"/>
+            <a:endParaRPr lang="en-US" noProof="0" dirty="0"/>
           </a:p>
         </p:txBody>
       </p:sp>
@@ -7014,7 +8305,7 @@
               </a:defRPr>
             </a:pPr>
             <a:r>
-              <a:rPr sz="975" b="1">
+              <a:rPr lang="en-US" sz="975" b="1" noProof="0" dirty="0">
                 <a:solidFill>
                   <a:srgbClr val="1E4D51"/>
                 </a:solidFill>
@@ -7063,7 +8354,7 @@
           <a:bodyPr/>
           <a:lstStyle/>
           <a:p>
-            <a:endParaRPr lang="en-US"/>
+            <a:endParaRPr lang="en-US" noProof="0" dirty="0"/>
           </a:p>
         </p:txBody>
       </p:sp>
@@ -7118,7 +8409,7 @@
               </a:defRPr>
             </a:pPr>
             <a:r>
-              <a:rPr sz="1050" b="1">
+              <a:rPr lang="en-US" sz="1050" b="1" noProof="0" dirty="0">
                 <a:solidFill>
                   <a:srgbClr val="182225"/>
                 </a:solidFill>
@@ -7167,7 +8458,7 @@
           <a:bodyPr/>
           <a:lstStyle/>
           <a:p>
-            <a:endParaRPr lang="en-US"/>
+            <a:endParaRPr lang="en-US" noProof="0" dirty="0"/>
           </a:p>
         </p:txBody>
       </p:sp>
@@ -7222,7 +8513,7 @@
               </a:defRPr>
             </a:pPr>
             <a:r>
-              <a:rPr sz="1050" b="1">
+              <a:rPr lang="en-US" sz="1050" b="1" noProof="0" dirty="0">
                 <a:solidFill>
                   <a:srgbClr val="A65F3B"/>
                 </a:solidFill>
@@ -7271,7 +8562,7 @@
           <a:bodyPr/>
           <a:lstStyle/>
           <a:p>
-            <a:endParaRPr lang="en-US"/>
+            <a:endParaRPr lang="en-US" noProof="0" dirty="0"/>
           </a:p>
         </p:txBody>
       </p:sp>
@@ -7326,7 +8617,7 @@
               </a:defRPr>
             </a:pPr>
             <a:r>
-              <a:rPr sz="1050" b="1">
+              <a:rPr lang="en-US" sz="1050" b="1" noProof="0" dirty="0">
                 <a:solidFill>
                   <a:srgbClr val="182225"/>
                 </a:solidFill>
@@ -7375,7 +8666,7 @@
           <a:bodyPr/>
           <a:lstStyle/>
           <a:p>
-            <a:endParaRPr lang="en-US"/>
+            <a:endParaRPr lang="en-US" noProof="0" dirty="0"/>
           </a:p>
         </p:txBody>
       </p:sp>
@@ -7430,7 +8721,7 @@
               </a:defRPr>
             </a:pPr>
             <a:r>
-              <a:rPr sz="1050" b="1">
+              <a:rPr lang="en-US" sz="1050" b="1" noProof="0" dirty="0">
                 <a:solidFill>
                   <a:srgbClr val="A65F3B"/>
                 </a:solidFill>
@@ -7479,7 +8770,7 @@
           <a:bodyPr/>
           <a:lstStyle/>
           <a:p>
-            <a:endParaRPr lang="en-US"/>
+            <a:endParaRPr lang="en-US" noProof="0" dirty="0"/>
           </a:p>
         </p:txBody>
       </p:sp>
@@ -7534,7 +8825,7 @@
               </a:defRPr>
             </a:pPr>
             <a:r>
-              <a:rPr sz="1050" b="1">
+              <a:rPr lang="en-US" sz="1050" b="1" noProof="0" dirty="0">
                 <a:solidFill>
                   <a:srgbClr val="182225"/>
                 </a:solidFill>
@@ -7583,7 +8874,7 @@
           <a:bodyPr/>
           <a:lstStyle/>
           <a:p>
-            <a:endParaRPr lang="en-US"/>
+            <a:endParaRPr lang="en-US" noProof="0" dirty="0"/>
           </a:p>
         </p:txBody>
       </p:sp>
@@ -7638,7 +8929,7 @@
               </a:defRPr>
             </a:pPr>
             <a:r>
-              <a:rPr sz="1050" b="1">
+              <a:rPr lang="en-US" sz="1050" b="1" noProof="0" dirty="0">
                 <a:solidFill>
                   <a:srgbClr val="A65F3B"/>
                 </a:solidFill>
@@ -7687,7 +8978,7 @@
           <a:bodyPr/>
           <a:lstStyle/>
           <a:p>
-            <a:endParaRPr lang="en-US"/>
+            <a:endParaRPr lang="en-US" noProof="0" dirty="0"/>
           </a:p>
         </p:txBody>
       </p:sp>
@@ -7742,7 +9033,7 @@
               </a:defRPr>
             </a:pPr>
             <a:r>
-              <a:rPr sz="1050" b="1">
+              <a:rPr lang="en-US" sz="1050" b="1" noProof="0" dirty="0">
                 <a:solidFill>
                   <a:srgbClr val="182225"/>
                 </a:solidFill>
@@ -7791,7 +9082,7 @@
           <a:bodyPr/>
           <a:lstStyle/>
           <a:p>
-            <a:endParaRPr lang="en-US"/>
+            <a:endParaRPr lang="en-US" noProof="0" dirty="0"/>
           </a:p>
         </p:txBody>
       </p:sp>
@@ -7846,7 +9137,7 @@
               </a:defRPr>
             </a:pPr>
             <a:r>
-              <a:rPr sz="1050" b="1">
+              <a:rPr lang="en-US" sz="1050" b="1" noProof="0" dirty="0">
                 <a:solidFill>
                   <a:srgbClr val="A65F3B"/>
                 </a:solidFill>
@@ -7895,7 +9186,7 @@
           <a:bodyPr/>
           <a:lstStyle/>
           <a:p>
-            <a:endParaRPr lang="en-US"/>
+            <a:endParaRPr lang="en-US" noProof="0" dirty="0"/>
           </a:p>
         </p:txBody>
       </p:sp>
@@ -7950,7 +9241,7 @@
               </a:defRPr>
             </a:pPr>
             <a:r>
-              <a:rPr sz="1050" b="1">
+              <a:rPr lang="en-US" sz="1050" b="1" noProof="0" dirty="0">
                 <a:solidFill>
                   <a:srgbClr val="182225"/>
                 </a:solidFill>
@@ -7999,7 +9290,7 @@
           <a:bodyPr/>
           <a:lstStyle/>
           <a:p>
-            <a:endParaRPr lang="en-US"/>
+            <a:endParaRPr lang="en-US" noProof="0" dirty="0"/>
           </a:p>
         </p:txBody>
       </p:sp>
@@ -8054,7 +9345,7 @@
               </a:defRPr>
             </a:pPr>
             <a:r>
-              <a:rPr sz="1050" b="1">
+              <a:rPr lang="en-US" sz="1050" b="1" noProof="0" dirty="0">
                 <a:solidFill>
                   <a:srgbClr val="A65F3B"/>
                 </a:solidFill>
@@ -8135,7 +9426,7 @@
           <a:bodyPr/>
           <a:lstStyle/>
           <a:p>
-            <a:endParaRPr lang="en-US"/>
+            <a:endParaRPr lang="en-US" noProof="0" dirty="0"/>
           </a:p>
         </p:txBody>
       </p:sp>
@@ -8177,7 +9468,7 @@
           <a:bodyPr/>
           <a:lstStyle/>
           <a:p>
-            <a:endParaRPr lang="en-US"/>
+            <a:endParaRPr lang="en-US" noProof="0" dirty="0"/>
           </a:p>
         </p:txBody>
       </p:sp>
@@ -8232,7 +9523,7 @@
               </a:defRPr>
             </a:pPr>
             <a:r>
-              <a:rPr sz="900" b="1">
+              <a:rPr lang="en-US" sz="1200" b="1" noProof="0" dirty="0">
                 <a:solidFill>
                   <a:srgbClr val="1E4D51"/>
                 </a:solidFill>
@@ -8296,7 +9587,7 @@
               </a:defRPr>
             </a:pPr>
             <a:r>
-              <a:rPr sz="2550" b="1" dirty="0">
+              <a:rPr lang="en-US" sz="2550" b="1" noProof="0" dirty="0">
                 <a:solidFill>
                   <a:srgbClr val="182225"/>
                 </a:solidFill>
@@ -8304,7 +9595,7 @@
                 <a:ea typeface="Aptos Display"/>
                 <a:cs typeface="Aptos Display"/>
               </a:rPr>
-              <a:t>The known modeling boundary is now encoded as first-level background pricing.</a:t>
+              <a:t>Modeling choices</a:t>
             </a:r>
           </a:p>
         </p:txBody>
@@ -8347,7 +9638,7 @@
           <a:bodyPr/>
           <a:lstStyle/>
           <a:p>
-            <a:endParaRPr lang="en-US"/>
+            <a:endParaRPr lang="en-US" noProof="0" dirty="0"/>
           </a:p>
         </p:txBody>
       </p:sp>
@@ -8402,7 +9693,7 @@
               </a:defRPr>
             </a:pPr>
             <a:r>
-              <a:rPr sz="750" b="0">
+              <a:rPr lang="en-US" sz="750" b="0" noProof="0" dirty="0">
                 <a:solidFill>
                   <a:srgbClr val="5E7380"/>
                 </a:solidFill>
@@ -8466,7 +9757,7 @@
               </a:defRPr>
             </a:pPr>
             <a:r>
-              <a:rPr sz="825" b="0">
+              <a:rPr lang="en-US" sz="825" b="0" noProof="0" dirty="0">
                 <a:solidFill>
                   <a:srgbClr val="5E7380"/>
                 </a:solidFill>
@@ -8515,7 +9806,7 @@
           <a:bodyPr/>
           <a:lstStyle/>
           <a:p>
-            <a:endParaRPr lang="en-US"/>
+            <a:endParaRPr lang="en-US" noProof="0" dirty="0"/>
           </a:p>
         </p:txBody>
       </p:sp>
@@ -8570,7 +9861,7 @@
               </a:defRPr>
             </a:pPr>
             <a:r>
-              <a:rPr sz="1200" b="1">
+              <a:rPr lang="en-US" sz="1200" b="1" noProof="0" dirty="0">
                 <a:solidFill>
                   <a:srgbClr val="A65F3B"/>
                 </a:solidFill>
@@ -8634,7 +9925,7 @@
               </a:defRPr>
             </a:pPr>
             <a:r>
-              <a:rPr sz="1650" b="1">
+              <a:rPr lang="en-US" sz="1650" b="1" noProof="0" dirty="0">
                 <a:solidFill>
                   <a:srgbClr val="182225"/>
                 </a:solidFill>
@@ -8698,15 +9989,37 @@
               </a:defRPr>
             </a:pPr>
             <a:r>
-              <a:rPr sz="1350" b="0" dirty="0">
-                <a:solidFill>
-                  <a:srgbClr val="182225"/>
-                </a:solidFill>
-                <a:latin typeface="Aptos"/>
-                <a:ea typeface="Aptos"/>
-                <a:cs typeface="Aptos"/>
-              </a:rPr>
-              <a:t>Prices apply only to direct first-level background purchases required by the foreground system.</a:t>
+              <a:rPr lang="en-US" sz="1350" b="0" noProof="0" dirty="0">
+                <a:solidFill>
+                  <a:srgbClr val="182225"/>
+                </a:solidFill>
+                <a:latin typeface="Aptos"/>
+                <a:ea typeface="Aptos"/>
+                <a:cs typeface="Aptos"/>
+              </a:rPr>
+              <a:t>Prices apply only to direct </a:t>
+            </a:r>
+            <a:r>
+              <a:rPr lang="en-US" sz="1350" b="1" noProof="0" dirty="0">
+                <a:solidFill>
+                  <a:srgbClr val="182225"/>
+                </a:solidFill>
+                <a:latin typeface="Aptos"/>
+                <a:ea typeface="Aptos"/>
+                <a:cs typeface="Aptos"/>
+              </a:rPr>
+              <a:t>first-level background</a:t>
+            </a:r>
+            <a:r>
+              <a:rPr lang="en-US" sz="1350" b="0" noProof="0" dirty="0">
+                <a:solidFill>
+                  <a:srgbClr val="182225"/>
+                </a:solidFill>
+                <a:latin typeface="Aptos"/>
+                <a:ea typeface="Aptos"/>
+                <a:cs typeface="Aptos"/>
+              </a:rPr>
+              <a:t> purchases required by the foreground system.</a:t>
             </a:r>
           </a:p>
         </p:txBody>
@@ -8747,7 +10060,7 @@
           <a:bodyPr/>
           <a:lstStyle/>
           <a:p>
-            <a:endParaRPr lang="en-US"/>
+            <a:endParaRPr lang="en-US" noProof="0" dirty="0"/>
           </a:p>
         </p:txBody>
       </p:sp>
@@ -8802,7 +10115,7 @@
               </a:defRPr>
             </a:pPr>
             <a:r>
-              <a:rPr sz="1200" b="1">
+              <a:rPr lang="en-US" sz="1200" b="1" noProof="0" dirty="0">
                 <a:solidFill>
                   <a:srgbClr val="1E4D51"/>
                 </a:solidFill>
@@ -8855,7 +10168,7 @@
           <a:bodyPr lIns="0" tIns="0" rIns="0" bIns="0" anchor="t"/>
           <a:lstStyle/>
           <a:p>
-            <a:pPr algn="l">
+            <a:pPr>
               <a:defRPr sz="1650" b="1">
                 <a:solidFill>
                   <a:srgbClr val="182225"/>
@@ -8866,7 +10179,7 @@
               </a:defRPr>
             </a:pPr>
             <a:r>
-              <a:rPr sz="1650" b="1">
+              <a:rPr lang="en-US" sz="1650" noProof="0" dirty="0">
                 <a:solidFill>
                   <a:srgbClr val="182225"/>
                 </a:solidFill>
@@ -8874,7 +10187,7 @@
                 <a:ea typeface="Aptos Display"/>
                 <a:cs typeface="Aptos Display"/>
               </a:rPr>
-              <a:t>Time logic</a:t>
+              <a:t>Background node attributes</a:t>
             </a:r>
           </a:p>
         </p:txBody>
@@ -8930,7 +10243,7 @@
               </a:defRPr>
             </a:pPr>
             <a:r>
-              <a:rPr sz="1350" b="0" dirty="0" err="1">
+              <a:rPr lang="en-US" sz="1350" b="0" noProof="0" dirty="0" err="1">
                 <a:solidFill>
                   <a:srgbClr val="182225"/>
                 </a:solidFill>
@@ -8941,15 +10254,81 @@
               <a:t>market_price</a:t>
             </a:r>
             <a:r>
-              <a:rPr sz="1350" b="0" dirty="0">
-                <a:solidFill>
-                  <a:srgbClr val="182225"/>
-                </a:solidFill>
-                <a:latin typeface="Aptos"/>
-                <a:ea typeface="Aptos"/>
-                <a:cs typeface="Aptos"/>
-              </a:rPr>
-              <a:t> is stored on the corresponding background node in each time-specific database.</a:t>
+              <a:rPr lang="en-US" sz="1350" b="0" noProof="0" dirty="0">
+                <a:solidFill>
+                  <a:srgbClr val="182225"/>
+                </a:solidFill>
+                <a:latin typeface="Aptos"/>
+                <a:ea typeface="Aptos"/>
+                <a:cs typeface="Aptos"/>
+              </a:rPr>
+              <a:t> is </a:t>
+            </a:r>
+            <a:r>
+              <a:rPr lang="en-US" sz="1350" b="1" noProof="0" dirty="0">
+                <a:solidFill>
+                  <a:srgbClr val="182225"/>
+                </a:solidFill>
+                <a:latin typeface="Aptos"/>
+                <a:ea typeface="Aptos"/>
+                <a:cs typeface="Aptos"/>
+              </a:rPr>
+              <a:t>stored</a:t>
+            </a:r>
+            <a:r>
+              <a:rPr lang="en-US" sz="1350" b="0" noProof="0" dirty="0">
+                <a:solidFill>
+                  <a:srgbClr val="182225"/>
+                </a:solidFill>
+                <a:latin typeface="Aptos"/>
+                <a:ea typeface="Aptos"/>
+                <a:cs typeface="Aptos"/>
+              </a:rPr>
+              <a:t> on the corresponding </a:t>
+            </a:r>
+            <a:r>
+              <a:rPr lang="en-US" sz="1350" b="1" noProof="0" dirty="0">
+                <a:solidFill>
+                  <a:srgbClr val="182225"/>
+                </a:solidFill>
+                <a:latin typeface="Aptos"/>
+                <a:ea typeface="Aptos"/>
+                <a:cs typeface="Aptos"/>
+              </a:rPr>
+              <a:t>background</a:t>
+            </a:r>
+            <a:r>
+              <a:rPr lang="en-US" sz="1350" b="0" noProof="0" dirty="0">
+                <a:solidFill>
+                  <a:srgbClr val="182225"/>
+                </a:solidFill>
+                <a:latin typeface="Aptos"/>
+                <a:ea typeface="Aptos"/>
+                <a:cs typeface="Aptos"/>
+              </a:rPr>
+              <a:t> </a:t>
+            </a:r>
+            <a:r>
+              <a:rPr lang="en-US" sz="1350" b="1" noProof="0" dirty="0">
+                <a:solidFill>
+                  <a:srgbClr val="182225"/>
+                </a:solidFill>
+                <a:latin typeface="Aptos"/>
+                <a:ea typeface="Aptos"/>
+                <a:cs typeface="Aptos"/>
+              </a:rPr>
+              <a:t>node</a:t>
+            </a:r>
+            <a:r>
+              <a:rPr lang="en-US" sz="1350" b="0" noProof="0" dirty="0">
+                <a:solidFill>
+                  <a:srgbClr val="182225"/>
+                </a:solidFill>
+                <a:latin typeface="Aptos"/>
+                <a:ea typeface="Aptos"/>
+                <a:cs typeface="Aptos"/>
+              </a:rPr>
+              <a:t> in each time-specific database.</a:t>
             </a:r>
           </a:p>
         </p:txBody>
@@ -8990,7 +10369,7 @@
           <a:bodyPr/>
           <a:lstStyle/>
           <a:p>
-            <a:endParaRPr lang="en-US"/>
+            <a:endParaRPr lang="en-US" noProof="0" dirty="0"/>
           </a:p>
         </p:txBody>
       </p:sp>
@@ -9045,7 +10424,7 @@
               </a:defRPr>
             </a:pPr>
             <a:r>
-              <a:rPr sz="1200" b="1">
+              <a:rPr lang="en-US" sz="1200" b="1" noProof="0" dirty="0">
                 <a:solidFill>
                   <a:srgbClr val="A65F3B"/>
                 </a:solidFill>
@@ -9109,7 +10488,7 @@
               </a:defRPr>
             </a:pPr>
             <a:r>
-              <a:rPr sz="1650" b="1">
+              <a:rPr lang="en-US" sz="1650" b="1" noProof="0" dirty="0">
                 <a:solidFill>
                   <a:srgbClr val="182225"/>
                 </a:solidFill>
@@ -9117,7 +10496,7 @@
                 <a:ea typeface="Aptos Display"/>
                 <a:cs typeface="Aptos Display"/>
               </a:rPr>
-              <a:t>Accounting split</a:t>
+              <a:t>CAPEX/OPEX split</a:t>
             </a:r>
           </a:p>
         </p:txBody>
@@ -9173,15 +10552,59 @@
               </a:defRPr>
             </a:pPr>
             <a:r>
-              <a:rPr sz="1350" b="0" dirty="0">
-                <a:solidFill>
-                  <a:srgbClr val="182225"/>
-                </a:solidFill>
-                <a:latin typeface="Aptos"/>
-                <a:ea typeface="Aptos"/>
-                <a:cs typeface="Aptos"/>
-              </a:rPr>
-              <a:t>operation=True contributes to operation-related costs; otherwise to installation-related costs.</a:t>
+              <a:rPr lang="en-US" sz="1350" b="0" noProof="0" dirty="0">
+                <a:solidFill>
+                  <a:srgbClr val="182225"/>
+                </a:solidFill>
+                <a:latin typeface="Aptos"/>
+                <a:ea typeface="Aptos"/>
+                <a:cs typeface="Aptos"/>
+              </a:rPr>
+              <a:t>operation=True contributes to </a:t>
+            </a:r>
+            <a:r>
+              <a:rPr lang="en-US" sz="1350" b="1" noProof="0" dirty="0">
+                <a:solidFill>
+                  <a:srgbClr val="182225"/>
+                </a:solidFill>
+                <a:latin typeface="Aptos"/>
+                <a:ea typeface="Aptos"/>
+                <a:cs typeface="Aptos"/>
+              </a:rPr>
+              <a:t>operation-related</a:t>
+            </a:r>
+            <a:r>
+              <a:rPr lang="en-US" sz="1350" b="0" noProof="0" dirty="0">
+                <a:solidFill>
+                  <a:srgbClr val="182225"/>
+                </a:solidFill>
+                <a:latin typeface="Aptos"/>
+                <a:ea typeface="Aptos"/>
+                <a:cs typeface="Aptos"/>
+              </a:rPr>
+              <a:t> costs; otherwise to </a:t>
+            </a:r>
+            <a:r>
+              <a:rPr lang="en-US" sz="1350" b="1" noProof="0" dirty="0">
+                <a:solidFill>
+                  <a:srgbClr val="182225"/>
+                </a:solidFill>
+                <a:latin typeface="Aptos"/>
+                <a:ea typeface="Aptos"/>
+                <a:cs typeface="Aptos"/>
+              </a:rPr>
+              <a:t>installation-related</a:t>
+            </a:r>
+            <a:r>
+              <a:rPr lang="en-US" sz="1350" b="0" noProof="0" dirty="0">
+                <a:solidFill>
+                  <a:srgbClr val="182225"/>
+                </a:solidFill>
+                <a:latin typeface="Aptos"/>
+                <a:ea typeface="Aptos"/>
+                <a:cs typeface="Aptos"/>
+              </a:rPr>
+              <a:t> costs.</a:t>
             </a:r>
           </a:p>
         </p:txBody>
@@ -9224,7 +10647,7 @@
           <a:bodyPr/>
           <a:lstStyle/>
           <a:p>
-            <a:endParaRPr lang="en-US"/>
+            <a:endParaRPr lang="en-US" noProof="0" dirty="0"/>
           </a:p>
         </p:txBody>
       </p:sp>
@@ -9279,7 +10702,7 @@
               </a:defRPr>
             </a:pPr>
             <a:r>
-              <a:rPr sz="1200" b="0">
+              <a:rPr lang="en-US" sz="1200" b="0" noProof="0" dirty="0">
                 <a:solidFill>
                   <a:srgbClr val="182225"/>
                 </a:solidFill>
@@ -9330,7 +10753,7 @@
           <a:bodyPr/>
           <a:lstStyle/>
           <a:p>
-            <a:endParaRPr lang="en-US"/>
+            <a:endParaRPr lang="en-US" noProof="0" dirty="0"/>
           </a:p>
         </p:txBody>
       </p:sp>
@@ -9385,7 +10808,7 @@
               </a:defRPr>
             </a:pPr>
             <a:r>
-              <a:rPr sz="1200" b="0" dirty="0">
+              <a:rPr lang="en-US" sz="1200" b="0" noProof="0" dirty="0">
                 <a:solidFill>
                   <a:srgbClr val="182225"/>
                 </a:solidFill>
@@ -9436,7 +10859,7 @@
           <a:bodyPr/>
           <a:lstStyle/>
           <a:p>
-            <a:endParaRPr lang="en-US"/>
+            <a:endParaRPr lang="en-US" noProof="0" dirty="0"/>
           </a:p>
         </p:txBody>
       </p:sp>
@@ -9491,7 +10914,7 @@
               </a:defRPr>
             </a:pPr>
             <a:r>
-              <a:rPr sz="1200" b="0" dirty="0">
+              <a:rPr lang="en-US" sz="1200" b="0" noProof="0" dirty="0">
                 <a:solidFill>
                   <a:srgbClr val="182225"/>
                 </a:solidFill>
@@ -9550,7 +10973,7 @@
         </p:nvSpPr>
         <p:spPr>
           <a:xfrm>
-            <a:off x="0" y="0"/>
+            <a:off x="0" y="-10633"/>
             <a:ext cx="12192000" cy="6858000"/>
           </a:xfrm>
           <a:prstGeom prst="rect">
@@ -9572,7 +10995,7 @@
           <a:bodyPr/>
           <a:lstStyle/>
           <a:p>
-            <a:endParaRPr lang="en-US"/>
+            <a:endParaRPr lang="en-US" noProof="0" dirty="0"/>
           </a:p>
         </p:txBody>
       </p:sp>
@@ -9614,7 +11037,7 @@
           <a:bodyPr/>
           <a:lstStyle/>
           <a:p>
-            <a:endParaRPr lang="en-US"/>
+            <a:endParaRPr lang="en-US" noProof="0" dirty="0"/>
           </a:p>
         </p:txBody>
       </p:sp>
@@ -9669,7 +11092,7 @@
               </a:defRPr>
             </a:pPr>
             <a:r>
-              <a:rPr sz="900" b="1">
+              <a:rPr lang="en-US" sz="1200" b="1" noProof="0" dirty="0">
                 <a:solidFill>
                   <a:srgbClr val="1E4D51"/>
                 </a:solidFill>
@@ -9733,7 +11156,7 @@
               </a:defRPr>
             </a:pPr>
             <a:r>
-              <a:rPr sz="2550" b="1">
+              <a:rPr lang="en-US" sz="2550" b="1" noProof="0" dirty="0">
                 <a:solidFill>
                   <a:srgbClr val="182225"/>
                 </a:solidFill>
@@ -9784,7 +11207,7 @@
           <a:bodyPr/>
           <a:lstStyle/>
           <a:p>
-            <a:endParaRPr lang="en-US"/>
+            <a:endParaRPr lang="en-US" noProof="0" dirty="0"/>
           </a:p>
         </p:txBody>
       </p:sp>
@@ -9839,7 +11262,7 @@
               </a:defRPr>
             </a:pPr>
             <a:r>
-              <a:rPr sz="750" b="0">
+              <a:rPr lang="en-US" sz="750" b="0" noProof="0" dirty="0">
                 <a:solidFill>
                   <a:srgbClr val="5E7380"/>
                 </a:solidFill>
@@ -9903,7 +11326,7 @@
               </a:defRPr>
             </a:pPr>
             <a:r>
-              <a:rPr sz="825" b="0">
+              <a:rPr lang="en-US" sz="825" b="0" noProof="0" dirty="0">
                 <a:solidFill>
                   <a:srgbClr val="5E7380"/>
                 </a:solidFill>
@@ -9952,7 +11375,7 @@
           <a:bodyPr/>
           <a:lstStyle/>
           <a:p>
-            <a:endParaRPr lang="en-US"/>
+            <a:endParaRPr lang="en-US" noProof="0" dirty="0"/>
           </a:p>
         </p:txBody>
       </p:sp>
@@ -9994,7 +11417,7 @@
           <a:bodyPr/>
           <a:lstStyle/>
           <a:p>
-            <a:endParaRPr lang="en-US"/>
+            <a:endParaRPr lang="en-US" noProof="0" dirty="0"/>
           </a:p>
         </p:txBody>
       </p:sp>
@@ -10049,15 +11472,26 @@
               </a:defRPr>
             </a:pPr>
             <a:r>
-              <a:rPr sz="1125" b="1" dirty="0">
-                <a:solidFill>
-                  <a:srgbClr val="182225"/>
-                </a:solidFill>
-                <a:latin typeface="Aptos"/>
-                <a:ea typeface="Aptos"/>
-                <a:cs typeface="Aptos"/>
-              </a:rPr>
-              <a:t>Brightway price input</a:t>
+              <a:rPr lang="en-US" sz="1200" b="1" noProof="0" dirty="0" err="1">
+                <a:solidFill>
+                  <a:srgbClr val="182225"/>
+                </a:solidFill>
+                <a:latin typeface="Aptos"/>
+                <a:ea typeface="Aptos"/>
+                <a:cs typeface="Aptos"/>
+              </a:rPr>
+              <a:t>Brightway</a:t>
+            </a:r>
+            <a:r>
+              <a:rPr lang="en-US" sz="1200" b="1" noProof="0" dirty="0">
+                <a:solidFill>
+                  <a:srgbClr val="182225"/>
+                </a:solidFill>
+                <a:latin typeface="Aptos"/>
+                <a:ea typeface="Aptos"/>
+                <a:cs typeface="Aptos"/>
+              </a:rPr>
+              <a:t> price input</a:t>
             </a:r>
           </a:p>
         </p:txBody>
@@ -10113,7 +11547,7 @@
               </a:defRPr>
             </a:pPr>
             <a:r>
-              <a:rPr sz="900" b="0">
+              <a:rPr lang="en-US" sz="1000" b="0" noProof="0" dirty="0">
                 <a:solidFill>
                   <a:srgbClr val="5E7380"/>
                 </a:solidFill>
@@ -10121,7 +11555,29 @@
                 <a:ea typeface="Aptos"/>
                 <a:cs typeface="Aptos"/>
               </a:rPr>
-              <a:t>set_market_prices writes market_price to background nodes</a:t>
+              <a:t>set_market_prices writes </a:t>
+            </a:r>
+            <a:r>
+              <a:rPr lang="en-US" sz="1000" b="0" noProof="0" dirty="0" err="1">
+                <a:solidFill>
+                  <a:srgbClr val="5E7380"/>
+                </a:solidFill>
+                <a:latin typeface="Aptos"/>
+                <a:ea typeface="Aptos"/>
+                <a:cs typeface="Aptos"/>
+              </a:rPr>
+              <a:t>market_price</a:t>
+            </a:r>
+            <a:r>
+              <a:rPr lang="en-US" sz="1000" b="0" noProof="0" dirty="0">
+                <a:solidFill>
+                  <a:srgbClr val="5E7380"/>
+                </a:solidFill>
+                <a:latin typeface="Aptos"/>
+                <a:ea typeface="Aptos"/>
+                <a:cs typeface="Aptos"/>
+              </a:rPr>
+              <a:t> to background nodes</a:t>
             </a:r>
           </a:p>
         </p:txBody>
@@ -10177,7 +11633,7 @@
               </a:defRPr>
             </a:pPr>
             <a:r>
-              <a:rPr sz="1950" b="1">
+              <a:rPr lang="en-US" sz="1950" b="1" noProof="0" dirty="0">
                 <a:solidFill>
                   <a:srgbClr val="2D6F73"/>
                 </a:solidFill>
@@ -10226,7 +11682,7 @@
           <a:bodyPr/>
           <a:lstStyle/>
           <a:p>
-            <a:endParaRPr lang="en-US"/>
+            <a:endParaRPr lang="en-US" noProof="0" dirty="0"/>
           </a:p>
         </p:txBody>
       </p:sp>
@@ -10268,7 +11724,7 @@
           <a:bodyPr/>
           <a:lstStyle/>
           <a:p>
-            <a:endParaRPr lang="en-US"/>
+            <a:endParaRPr lang="en-US" noProof="0" dirty="0"/>
           </a:p>
         </p:txBody>
       </p:sp>
@@ -10323,7 +11779,7 @@
               </a:defRPr>
             </a:pPr>
             <a:r>
-              <a:rPr sz="1125" b="1">
+              <a:rPr lang="en-US" sz="1200" b="1" noProof="0" dirty="0" err="1">
                 <a:solidFill>
                   <a:srgbClr val="182225"/>
                 </a:solidFill>
@@ -10333,6 +11789,14 @@
               </a:rPr>
               <a:t>LCADataProcessor</a:t>
             </a:r>
+            <a:endParaRPr lang="en-US" sz="1200" b="1" noProof="0" dirty="0">
+              <a:solidFill>
+                <a:srgbClr val="182225"/>
+              </a:solidFill>
+              <a:latin typeface="Aptos"/>
+              <a:ea typeface="Aptos"/>
+              <a:cs typeface="Aptos"/>
+            </a:endParaRPr>
           </a:p>
         </p:txBody>
       </p:sp>
@@ -10353,7 +11817,7 @@
         <p:spPr>
           <a:xfrm>
             <a:off x="2952750" y="2743200"/>
-            <a:ext cx="1524000" cy="685800"/>
+            <a:ext cx="1638300" cy="685800"/>
           </a:xfrm>
           <a:prstGeom prst="rect">
             <a:avLst/>
@@ -10387,7 +11851,7 @@
               </a:defRPr>
             </a:pPr>
             <a:r>
-              <a:rPr sz="900" b="0">
+              <a:rPr lang="en-US" sz="1000" b="0" noProof="0" dirty="0">
                 <a:solidFill>
                   <a:srgbClr val="5E7380"/>
                 </a:solidFill>
@@ -10395,7 +11859,7 @@
                 <a:ea typeface="Aptos"/>
                 <a:cs typeface="Aptos"/>
               </a:rPr>
-              <a:t>detects cost-relevant flows, reads prices, interpolates</a:t>
+              <a:t>detects cost-relevant flows, reads prices, distinguishes cap/op, interpolates to SYSTEM_TIME</a:t>
             </a:r>
           </a:p>
         </p:txBody>
@@ -10451,7 +11915,7 @@
               </a:defRPr>
             </a:pPr>
             <a:r>
-              <a:rPr sz="1950" b="1">
+              <a:rPr lang="en-US" sz="1950" b="1" noProof="0" dirty="0">
                 <a:solidFill>
                   <a:srgbClr val="2D6F73"/>
                 </a:solidFill>
@@ -10500,7 +11964,7 @@
           <a:bodyPr/>
           <a:lstStyle/>
           <a:p>
-            <a:endParaRPr lang="en-US"/>
+            <a:endParaRPr lang="en-US" noProof="0" dirty="0"/>
           </a:p>
         </p:txBody>
       </p:sp>
@@ -10542,7 +12006,7 @@
           <a:bodyPr/>
           <a:lstStyle/>
           <a:p>
-            <a:endParaRPr lang="en-US"/>
+            <a:endParaRPr lang="en-US" noProof="0" dirty="0"/>
           </a:p>
         </p:txBody>
       </p:sp>
@@ -10597,7 +12061,7 @@
               </a:defRPr>
             </a:pPr>
             <a:r>
-              <a:rPr sz="1125" b="1">
+              <a:rPr lang="en-US" sz="1200" b="1" noProof="0" dirty="0">
                 <a:solidFill>
                   <a:srgbClr val="182225"/>
                 </a:solidFill>
@@ -10661,7 +12125,7 @@
               </a:defRPr>
             </a:pPr>
             <a:r>
-              <a:rPr sz="900" b="0">
+              <a:rPr lang="en-US" sz="1000" b="0" noProof="0" dirty="0" err="1">
                 <a:solidFill>
                   <a:srgbClr val="5E7380"/>
                 </a:solidFill>
@@ -10669,7 +12133,18 @@
                 <a:ea typeface="Aptos"/>
                 <a:cs typeface="Aptos"/>
               </a:rPr>
-              <a:t>OptimizationModelInputs stores cap/op prices plus discount settings</a:t>
+              <a:t>OptimizationModelInputs</a:t>
+            </a:r>
+            <a:r>
+              <a:rPr lang="en-US" sz="1000" b="0" noProof="0" dirty="0">
+                <a:solidFill>
+                  <a:srgbClr val="5E7380"/>
+                </a:solidFill>
+                <a:latin typeface="Aptos"/>
+                <a:ea typeface="Aptos"/>
+                <a:cs typeface="Aptos"/>
+              </a:rPr>
+              <a:t> stores cap/op prices plus discount settings, creates model</a:t>
             </a:r>
           </a:p>
         </p:txBody>
@@ -10725,7 +12200,7 @@
               </a:defRPr>
             </a:pPr>
             <a:r>
-              <a:rPr sz="1950" b="1">
+              <a:rPr lang="en-US" sz="1950" b="1" noProof="0" dirty="0">
                 <a:solidFill>
                   <a:srgbClr val="2D6F73"/>
                 </a:solidFill>
@@ -10774,7 +12249,7 @@
           <a:bodyPr/>
           <a:lstStyle/>
           <a:p>
-            <a:endParaRPr lang="en-US"/>
+            <a:endParaRPr lang="en-US" noProof="0" dirty="0"/>
           </a:p>
         </p:txBody>
       </p:sp>
@@ -10816,7 +12291,7 @@
           <a:bodyPr/>
           <a:lstStyle/>
           <a:p>
-            <a:endParaRPr lang="en-US"/>
+            <a:endParaRPr lang="en-US" noProof="0" dirty="0"/>
           </a:p>
         </p:txBody>
       </p:sp>
@@ -10871,15 +12346,26 @@
               </a:defRPr>
             </a:pPr>
             <a:r>
-              <a:rPr sz="1125" b="1">
-                <a:solidFill>
-                  <a:srgbClr val="182225"/>
-                </a:solidFill>
-                <a:latin typeface="Aptos"/>
-                <a:ea typeface="Aptos"/>
-                <a:cs typeface="Aptos"/>
-              </a:rPr>
-              <a:t>Pyomo model</a:t>
+              <a:rPr lang="en-US" sz="1200" b="1" noProof="0" dirty="0" err="1">
+                <a:solidFill>
+                  <a:srgbClr val="182225"/>
+                </a:solidFill>
+                <a:latin typeface="Aptos"/>
+                <a:ea typeface="Aptos"/>
+                <a:cs typeface="Aptos"/>
+              </a:rPr>
+              <a:t>Pyomo</a:t>
+            </a:r>
+            <a:r>
+              <a:rPr lang="en-US" sz="1200" b="1" noProof="0" dirty="0">
+                <a:solidFill>
+                  <a:srgbClr val="182225"/>
+                </a:solidFill>
+                <a:latin typeface="Aptos"/>
+                <a:ea typeface="Aptos"/>
+                <a:cs typeface="Aptos"/>
+              </a:rPr>
+              <a:t> model</a:t>
             </a:r>
           </a:p>
         </p:txBody>
@@ -10935,7 +12421,7 @@
               </a:defRPr>
             </a:pPr>
             <a:r>
-              <a:rPr sz="900" b="0">
+              <a:rPr lang="en-US" sz="1000" b="0" noProof="0" dirty="0">
                 <a:solidFill>
                   <a:srgbClr val="5E7380"/>
                 </a:solidFill>
@@ -10999,7 +12485,7 @@
               </a:defRPr>
             </a:pPr>
             <a:r>
-              <a:rPr sz="1950" b="1">
+              <a:rPr lang="en-US" sz="1950" b="1" noProof="0" dirty="0">
                 <a:solidFill>
                   <a:srgbClr val="2D6F73"/>
                 </a:solidFill>
@@ -11048,7 +12534,7 @@
           <a:bodyPr/>
           <a:lstStyle/>
           <a:p>
-            <a:endParaRPr lang="en-US"/>
+            <a:endParaRPr lang="en-US" noProof="0" dirty="0"/>
           </a:p>
         </p:txBody>
       </p:sp>
@@ -11090,7 +12576,7 @@
           <a:bodyPr/>
           <a:lstStyle/>
           <a:p>
-            <a:endParaRPr lang="en-US"/>
+            <a:endParaRPr lang="en-US" noProof="0" dirty="0"/>
           </a:p>
         </p:txBody>
       </p:sp>
@@ -11145,7 +12631,7 @@
               </a:defRPr>
             </a:pPr>
             <a:r>
-              <a:rPr sz="1125" b="1">
+              <a:rPr lang="en-US" sz="1200" b="1" noProof="0" dirty="0" err="1">
                 <a:solidFill>
                   <a:srgbClr val="182225"/>
                 </a:solidFill>
@@ -11155,6 +12641,14 @@
               </a:rPr>
               <a:t>solve_model</a:t>
             </a:r>
+            <a:endParaRPr lang="en-US" sz="1200" b="1" noProof="0" dirty="0">
+              <a:solidFill>
+                <a:srgbClr val="182225"/>
+              </a:solidFill>
+              <a:latin typeface="Aptos"/>
+              <a:ea typeface="Aptos"/>
+              <a:cs typeface="Aptos"/>
+            </a:endParaRPr>
           </a:p>
         </p:txBody>
       </p:sp>
@@ -11209,7 +12703,7 @@
               </a:defRPr>
             </a:pPr>
             <a:r>
-              <a:rPr sz="900" b="0">
+              <a:rPr lang="en-US" sz="1000" b="0" noProof="0" dirty="0">
                 <a:solidFill>
                   <a:srgbClr val="5E7380"/>
                 </a:solidFill>
@@ -11258,7 +12752,7 @@
           <a:bodyPr/>
           <a:lstStyle/>
           <a:p>
-            <a:endParaRPr lang="en-US"/>
+            <a:endParaRPr lang="en-US" noProof="0" dirty="0"/>
           </a:p>
         </p:txBody>
       </p:sp>
@@ -11313,7 +12807,7 @@
               </a:defRPr>
             </a:pPr>
             <a:r>
-              <a:rPr sz="975" b="1">
+              <a:rPr lang="en-US" sz="975" b="1" noProof="0" dirty="0">
                 <a:solidFill>
                   <a:srgbClr val="1E4D51"/>
                 </a:solidFill>
@@ -11362,7 +12856,7 @@
           <a:bodyPr/>
           <a:lstStyle/>
           <a:p>
-            <a:endParaRPr lang="en-US"/>
+            <a:endParaRPr lang="en-US" noProof="0" dirty="0"/>
           </a:p>
         </p:txBody>
       </p:sp>
@@ -11417,7 +12911,7 @@
               </a:defRPr>
             </a:pPr>
             <a:r>
-              <a:rPr sz="975" b="1">
+              <a:rPr lang="en-US" sz="975" b="1" noProof="0" dirty="0">
                 <a:solidFill>
                   <a:srgbClr val="1E4D51"/>
                 </a:solidFill>
@@ -11466,7 +12960,7 @@
           <a:bodyPr/>
           <a:lstStyle/>
           <a:p>
-            <a:endParaRPr lang="en-US"/>
+            <a:endParaRPr lang="en-US" noProof="0" dirty="0"/>
           </a:p>
         </p:txBody>
       </p:sp>
@@ -11521,7 +13015,7 @@
               </a:defRPr>
             </a:pPr>
             <a:r>
-              <a:rPr sz="975" b="1">
+              <a:rPr lang="en-US" sz="975" b="1" noProof="0" dirty="0">
                 <a:solidFill>
                   <a:srgbClr val="1E4D51"/>
                 </a:solidFill>
@@ -11570,7 +13064,7 @@
           <a:bodyPr/>
           <a:lstStyle/>
           <a:p>
-            <a:endParaRPr lang="en-US"/>
+            <a:endParaRPr lang="en-US" noProof="0" dirty="0"/>
           </a:p>
         </p:txBody>
       </p:sp>
@@ -11625,7 +13119,7 @@
               </a:defRPr>
             </a:pPr>
             <a:r>
-              <a:rPr sz="1050" b="1">
+              <a:rPr lang="en-US" sz="1050" b="1" noProof="0" dirty="0">
                 <a:solidFill>
                   <a:srgbClr val="182225"/>
                 </a:solidFill>
@@ -11674,7 +13168,7 @@
           <a:bodyPr/>
           <a:lstStyle/>
           <a:p>
-            <a:endParaRPr lang="en-US"/>
+            <a:endParaRPr lang="en-US" noProof="0" dirty="0"/>
           </a:p>
         </p:txBody>
       </p:sp>
@@ -11729,15 +13223,15 @@
               </a:defRPr>
             </a:pPr>
             <a:r>
-              <a:rPr sz="1050" b="0">
-                <a:solidFill>
-                  <a:srgbClr val="182225"/>
-                </a:solidFill>
-                <a:latin typeface="Aptos"/>
-                <a:ea typeface="Aptos"/>
-                <a:cs typeface="Aptos"/>
-              </a:rPr>
-              <a:t>Node-based market price writer</a:t>
+              <a:rPr lang="en-US" sz="1050" b="0" noProof="0" dirty="0">
+                <a:solidFill>
+                  <a:srgbClr val="182225"/>
+                </a:solidFill>
+                <a:latin typeface="Aptos"/>
+                <a:ea typeface="Aptos"/>
+                <a:cs typeface="Aptos"/>
+              </a:rPr>
+              <a:t>Node-based market price writer `set_market_prices`</a:t>
             </a:r>
           </a:p>
         </p:txBody>
@@ -11778,7 +13272,7 @@
           <a:bodyPr/>
           <a:lstStyle/>
           <a:p>
-            <a:endParaRPr lang="en-US"/>
+            <a:endParaRPr lang="en-US" noProof="0" dirty="0"/>
           </a:p>
         </p:txBody>
       </p:sp>
@@ -11833,7 +13327,7 @@
               </a:defRPr>
             </a:pPr>
             <a:r>
-              <a:rPr sz="1050" b="1">
+              <a:rPr lang="en-US" sz="1050" b="1" noProof="0" dirty="0">
                 <a:solidFill>
                   <a:srgbClr val="1E4D51"/>
                 </a:solidFill>
@@ -11882,7 +13376,7 @@
           <a:bodyPr/>
           <a:lstStyle/>
           <a:p>
-            <a:endParaRPr lang="en-US"/>
+            <a:endParaRPr lang="en-US" noProof="0" dirty="0"/>
           </a:p>
         </p:txBody>
       </p:sp>
@@ -11937,7 +13431,7 @@
               </a:defRPr>
             </a:pPr>
             <a:r>
-              <a:rPr sz="1050" b="1">
+              <a:rPr lang="en-US" sz="1050" b="1" noProof="0" dirty="0">
                 <a:solidFill>
                   <a:srgbClr val="182225"/>
                 </a:solidFill>
@@ -11986,7 +13480,7 @@
           <a:bodyPr/>
           <a:lstStyle/>
           <a:p>
-            <a:endParaRPr lang="en-US"/>
+            <a:endParaRPr lang="en-US" noProof="0" dirty="0"/>
           </a:p>
         </p:txBody>
       </p:sp>
@@ -12041,7 +13535,7 @@
               </a:defRPr>
             </a:pPr>
             <a:r>
-              <a:rPr sz="1050" b="0">
+              <a:rPr lang="en-US" sz="1050" b="0" noProof="0" dirty="0">
                 <a:solidFill>
                   <a:srgbClr val="182225"/>
                 </a:solidFill>
@@ -12090,7 +13584,7 @@
           <a:bodyPr/>
           <a:lstStyle/>
           <a:p>
-            <a:endParaRPr lang="en-US"/>
+            <a:endParaRPr lang="en-US" noProof="0" dirty="0"/>
           </a:p>
         </p:txBody>
       </p:sp>
@@ -12145,7 +13639,7 @@
               </a:defRPr>
             </a:pPr>
             <a:r>
-              <a:rPr sz="1050" b="1">
+              <a:rPr lang="en-US" sz="1050" b="1" noProof="0" dirty="0">
                 <a:solidFill>
                   <a:srgbClr val="1E4D51"/>
                 </a:solidFill>
@@ -12194,7 +13688,7 @@
           <a:bodyPr/>
           <a:lstStyle/>
           <a:p>
-            <a:endParaRPr lang="en-US"/>
+            <a:endParaRPr lang="en-US" noProof="0" dirty="0"/>
           </a:p>
         </p:txBody>
       </p:sp>
@@ -12249,7 +13743,7 @@
               </a:defRPr>
             </a:pPr>
             <a:r>
-              <a:rPr sz="1050" b="1">
+              <a:rPr lang="en-US" sz="1050" b="1" noProof="0" dirty="0">
                 <a:solidFill>
                   <a:srgbClr val="182225"/>
                 </a:solidFill>
@@ -12298,7 +13792,7 @@
           <a:bodyPr/>
           <a:lstStyle/>
           <a:p>
-            <a:endParaRPr lang="en-US"/>
+            <a:endParaRPr lang="en-US" noProof="0" dirty="0"/>
           </a:p>
         </p:txBody>
       </p:sp>
@@ -12353,7 +13847,7 @@
               </a:defRPr>
             </a:pPr>
             <a:r>
-              <a:rPr sz="1050" b="0">
+              <a:rPr lang="en-US" sz="1050" b="0" noProof="0" dirty="0">
                 <a:solidFill>
                   <a:srgbClr val="182225"/>
                 </a:solidFill>
@@ -12402,7 +13896,7 @@
           <a:bodyPr/>
           <a:lstStyle/>
           <a:p>
-            <a:endParaRPr lang="en-US"/>
+            <a:endParaRPr lang="en-US" noProof="0" dirty="0"/>
           </a:p>
         </p:txBody>
       </p:sp>
@@ -12457,7 +13951,7 @@
               </a:defRPr>
             </a:pPr>
             <a:r>
-              <a:rPr sz="1050" b="1">
+              <a:rPr lang="en-US" sz="1050" b="1" noProof="0" dirty="0">
                 <a:solidFill>
                   <a:srgbClr val="1E4D51"/>
                 </a:solidFill>
@@ -12538,7 +14032,7 @@
           <a:bodyPr/>
           <a:lstStyle/>
           <a:p>
-            <a:endParaRPr lang="en-US"/>
+            <a:endParaRPr lang="en-US" noProof="0" dirty="0"/>
           </a:p>
         </p:txBody>
       </p:sp>
@@ -12580,7 +14074,7 @@
           <a:bodyPr/>
           <a:lstStyle/>
           <a:p>
-            <a:endParaRPr lang="en-US"/>
+            <a:endParaRPr lang="en-US" noProof="0" dirty="0"/>
           </a:p>
         </p:txBody>
       </p:sp>
@@ -12635,7 +14129,7 @@
               </a:defRPr>
             </a:pPr>
             <a:r>
-              <a:rPr sz="900" b="1">
+              <a:rPr lang="en-US" sz="1200" b="1" noProof="0" dirty="0">
                 <a:solidFill>
                   <a:srgbClr val="1E4D51"/>
                 </a:solidFill>
@@ -12699,7 +14193,7 @@
               </a:defRPr>
             </a:pPr>
             <a:r>
-              <a:rPr sz="2550" b="1" dirty="0">
+              <a:rPr lang="en-US" sz="2550" b="1" noProof="0" dirty="0">
                 <a:solidFill>
                   <a:srgbClr val="182225"/>
                 </a:solidFill>
@@ -12707,8 +14201,43 @@
                 <a:ea typeface="Aptos Display"/>
                 <a:cs typeface="Aptos Display"/>
               </a:rPr>
-              <a:t>Price input is node-based and avoids premise code instability.</a:t>
-            </a:r>
+              <a:t>Price user input via set_market_prices helper function.</a:t>
+            </a:r>
+            <a:br>
+              <a:rPr lang="en-US" sz="2550" b="1" noProof="0" dirty="0">
+                <a:solidFill>
+                  <a:srgbClr val="182225"/>
+                </a:solidFill>
+                <a:latin typeface="Aptos Display"/>
+                <a:ea typeface="Aptos Display"/>
+                <a:cs typeface="Aptos Display"/>
+              </a:rPr>
+            </a:br>
+            <a:r>
+              <a:rPr lang="en-US" sz="2000" b="1" noProof="0" dirty="0">
+                <a:solidFill>
+                  <a:schemeClr val="tx1">
+                    <a:lumMod val="50000"/>
+                    <a:lumOff val="50000"/>
+                  </a:schemeClr>
+                </a:solidFill>
+                <a:latin typeface="Aptos Display"/>
+                <a:ea typeface="Aptos Display"/>
+                <a:cs typeface="Aptos Display"/>
+              </a:rPr>
+              <a:t>writes time-specific prices on background nodes</a:t>
+            </a:r>
+            <a:endParaRPr lang="en-US" sz="2550" b="1" noProof="0" dirty="0">
+              <a:solidFill>
+                <a:schemeClr val="tx1">
+                  <a:lumMod val="50000"/>
+                  <a:lumOff val="50000"/>
+                </a:schemeClr>
+              </a:solidFill>
+              <a:latin typeface="Aptos Display"/>
+              <a:ea typeface="Aptos Display"/>
+              <a:cs typeface="Aptos Display"/>
+            </a:endParaRPr>
           </a:p>
         </p:txBody>
       </p:sp>
@@ -12750,7 +14279,7 @@
           <a:bodyPr/>
           <a:lstStyle/>
           <a:p>
-            <a:endParaRPr lang="en-US"/>
+            <a:endParaRPr lang="en-US" noProof="0" dirty="0"/>
           </a:p>
         </p:txBody>
       </p:sp>
@@ -12805,7 +14334,7 @@
               </a:defRPr>
             </a:pPr>
             <a:r>
-              <a:rPr sz="750" b="0">
+              <a:rPr lang="en-US" sz="750" b="0" noProof="0" dirty="0">
                 <a:solidFill>
                   <a:srgbClr val="5E7380"/>
                 </a:solidFill>
@@ -12813,7 +14342,29 @@
                 <a:ea typeface="Aptos"/>
                 <a:cs typeface="Aptos"/>
               </a:rPr>
-              <a:t>Sources: src/optimex/economics.py; docs/content/economic_optimization.md</a:t>
+              <a:t>Sources: </a:t>
+            </a:r>
+            <a:r>
+              <a:rPr lang="en-US" sz="750" b="0" noProof="0" dirty="0" err="1">
+                <a:solidFill>
+                  <a:srgbClr val="5E7380"/>
+                </a:solidFill>
+                <a:latin typeface="Aptos"/>
+                <a:ea typeface="Aptos"/>
+                <a:cs typeface="Aptos"/>
+              </a:rPr>
+              <a:t>src</a:t>
+            </a:r>
+            <a:r>
+              <a:rPr lang="en-US" sz="750" b="0" noProof="0" dirty="0">
+                <a:solidFill>
+                  <a:srgbClr val="5E7380"/>
+                </a:solidFill>
+                <a:latin typeface="Aptos"/>
+                <a:ea typeface="Aptos"/>
+                <a:cs typeface="Aptos"/>
+              </a:rPr>
+              <a:t>/optimex/economics.py; docs/content/economic_optimization.md</a:t>
             </a:r>
           </a:p>
         </p:txBody>
@@ -12869,7 +14420,7 @@
               </a:defRPr>
             </a:pPr>
             <a:r>
-              <a:rPr sz="825" b="0">
+              <a:rPr lang="en-US" sz="825" b="0" noProof="0" dirty="0">
                 <a:solidFill>
                   <a:srgbClr val="5E7380"/>
                 </a:solidFill>
@@ -12898,8 +14449,8 @@
         </p:nvSpPr>
         <p:spPr>
           <a:xfrm>
-            <a:off x="685800" y="2000250"/>
-            <a:ext cx="1920240" cy="476250"/>
+            <a:off x="6062772" y="1841277"/>
+            <a:ext cx="1412777" cy="527685"/>
           </a:xfrm>
           <a:prstGeom prst="rect">
             <a:avLst/>
@@ -12918,7 +14469,7 @@
           <a:bodyPr/>
           <a:lstStyle/>
           <a:p>
-            <a:endParaRPr lang="en-US"/>
+            <a:endParaRPr lang="en-US" noProof="0" dirty="0"/>
           </a:p>
         </p:txBody>
       </p:sp>
@@ -12938,8 +14489,8 @@
         </p:nvSpPr>
         <p:spPr>
           <a:xfrm>
-            <a:off x="819150" y="2114550"/>
-            <a:ext cx="1653540" cy="247650"/>
+            <a:off x="6196122" y="1955578"/>
+            <a:ext cx="1216558" cy="274396"/>
           </a:xfrm>
           <a:prstGeom prst="rect">
             <a:avLst/>
@@ -12973,7 +14524,7 @@
               </a:defRPr>
             </a:pPr>
             <a:r>
-              <a:rPr sz="975" b="1">
+              <a:rPr lang="en-US" sz="975" b="1" noProof="0" dirty="0">
                 <a:solidFill>
                   <a:srgbClr val="1E4D51"/>
                 </a:solidFill>
@@ -13002,8 +14553,8 @@
         </p:nvSpPr>
         <p:spPr>
           <a:xfrm>
-            <a:off x="2606040" y="2000250"/>
-            <a:ext cx="3429000" cy="476250"/>
+            <a:off x="7525814" y="1841277"/>
+            <a:ext cx="2522816" cy="527685"/>
           </a:xfrm>
           <a:prstGeom prst="rect">
             <a:avLst/>
@@ -13022,7 +14573,7 @@
           <a:bodyPr/>
           <a:lstStyle/>
           <a:p>
-            <a:endParaRPr lang="en-US"/>
+            <a:endParaRPr lang="en-US" noProof="0" dirty="0"/>
           </a:p>
         </p:txBody>
       </p:sp>
@@ -13042,8 +14593,8 @@
         </p:nvSpPr>
         <p:spPr>
           <a:xfrm>
-            <a:off x="2739390" y="2114550"/>
-            <a:ext cx="3162300" cy="247650"/>
+            <a:off x="7659164" y="1955578"/>
+            <a:ext cx="2326597" cy="274396"/>
           </a:xfrm>
           <a:prstGeom prst="rect">
             <a:avLst/>
@@ -13077,7 +14628,7 @@
               </a:defRPr>
             </a:pPr>
             <a:r>
-              <a:rPr sz="975" b="1">
+              <a:rPr lang="en-US" sz="975" b="1" noProof="0" dirty="0">
                 <a:solidFill>
                   <a:srgbClr val="1E4D51"/>
                 </a:solidFill>
@@ -13106,8 +14657,8 @@
         </p:nvSpPr>
         <p:spPr>
           <a:xfrm>
-            <a:off x="6035040" y="2000250"/>
-            <a:ext cx="1508760" cy="476250"/>
+            <a:off x="10093574" y="1841277"/>
+            <a:ext cx="1110039" cy="527685"/>
           </a:xfrm>
           <a:prstGeom prst="rect">
             <a:avLst/>
@@ -13126,7 +14677,7 @@
           <a:bodyPr/>
           <a:lstStyle/>
           <a:p>
-            <a:endParaRPr lang="en-US"/>
+            <a:endParaRPr lang="en-US" noProof="0" dirty="0"/>
           </a:p>
         </p:txBody>
       </p:sp>
@@ -13146,8 +14697,8 @@
         </p:nvSpPr>
         <p:spPr>
           <a:xfrm>
-            <a:off x="6168390" y="2114550"/>
-            <a:ext cx="1242060" cy="247650"/>
+            <a:off x="10226924" y="1955578"/>
+            <a:ext cx="913820" cy="274396"/>
           </a:xfrm>
           <a:prstGeom prst="rect">
             <a:avLst/>
@@ -13181,7 +14732,7 @@
               </a:defRPr>
             </a:pPr>
             <a:r>
-              <a:rPr sz="975" b="1">
+              <a:rPr lang="en-US" sz="975" b="1" noProof="0" dirty="0">
                 <a:solidFill>
                   <a:srgbClr val="1E4D51"/>
                 </a:solidFill>
@@ -13210,8 +14761,8 @@
         </p:nvSpPr>
         <p:spPr>
           <a:xfrm>
-            <a:off x="685800" y="2476500"/>
-            <a:ext cx="1920240" cy="476250"/>
+            <a:off x="6062772" y="2317527"/>
+            <a:ext cx="1412777" cy="527685"/>
           </a:xfrm>
           <a:prstGeom prst="rect">
             <a:avLst/>
@@ -13230,7 +14781,7 @@
           <a:bodyPr/>
           <a:lstStyle/>
           <a:p>
-            <a:endParaRPr lang="en-US"/>
+            <a:endParaRPr lang="en-US" noProof="0" dirty="0"/>
           </a:p>
         </p:txBody>
       </p:sp>
@@ -13250,8 +14801,8 @@
         </p:nvSpPr>
         <p:spPr>
           <a:xfrm>
-            <a:off x="819150" y="2571750"/>
-            <a:ext cx="1653540" cy="247650"/>
+            <a:off x="6196122" y="2412778"/>
+            <a:ext cx="1216558" cy="274396"/>
           </a:xfrm>
           <a:prstGeom prst="rect">
             <a:avLst/>
@@ -13285,7 +14836,7 @@
               </a:defRPr>
             </a:pPr>
             <a:r>
-              <a:rPr sz="1050" b="1">
+              <a:rPr lang="en-US" sz="1050" b="1" noProof="0" dirty="0">
                 <a:solidFill>
                   <a:srgbClr val="182225"/>
                 </a:solidFill>
@@ -13314,8 +14865,8 @@
         </p:nvSpPr>
         <p:spPr>
           <a:xfrm>
-            <a:off x="2606040" y="2476500"/>
-            <a:ext cx="3429000" cy="476250"/>
+            <a:off x="7525814" y="2317527"/>
+            <a:ext cx="2522816" cy="527685"/>
           </a:xfrm>
           <a:prstGeom prst="rect">
             <a:avLst/>
@@ -13334,7 +14885,7 @@
           <a:bodyPr/>
           <a:lstStyle/>
           <a:p>
-            <a:endParaRPr lang="en-US"/>
+            <a:endParaRPr lang="en-US" noProof="0" dirty="0"/>
           </a:p>
         </p:txBody>
       </p:sp>
@@ -13354,8 +14905,8 @@
         </p:nvSpPr>
         <p:spPr>
           <a:xfrm>
-            <a:off x="2739390" y="2571750"/>
-            <a:ext cx="3162300" cy="247650"/>
+            <a:off x="7659164" y="2412778"/>
+            <a:ext cx="2326597" cy="274396"/>
           </a:xfrm>
           <a:prstGeom prst="rect">
             <a:avLst/>
@@ -13389,15 +14940,26 @@
               </a:defRPr>
             </a:pPr>
             <a:r>
-              <a:rPr sz="1050" b="0" dirty="0">
-                <a:solidFill>
-                  <a:srgbClr val="182225"/>
-                </a:solidFill>
-                <a:latin typeface="Aptos"/>
-                <a:ea typeface="Aptos"/>
-                <a:cs typeface="Aptos"/>
-              </a:rPr>
-              <a:t>Brightway activity/process name</a:t>
+              <a:rPr lang="en-US" sz="1050" b="0" noProof="0" dirty="0" err="1">
+                <a:solidFill>
+                  <a:srgbClr val="182225"/>
+                </a:solidFill>
+                <a:latin typeface="Aptos"/>
+                <a:ea typeface="Aptos"/>
+                <a:cs typeface="Aptos"/>
+              </a:rPr>
+              <a:t>Brightway</a:t>
+            </a:r>
+            <a:r>
+              <a:rPr lang="en-US" sz="1050" b="0" noProof="0" dirty="0">
+                <a:solidFill>
+                  <a:srgbClr val="182225"/>
+                </a:solidFill>
+                <a:latin typeface="Aptos"/>
+                <a:ea typeface="Aptos"/>
+                <a:cs typeface="Aptos"/>
+              </a:rPr>
+              <a:t> activity/process name</a:t>
             </a:r>
           </a:p>
         </p:txBody>
@@ -13418,8 +14980,8 @@
         </p:nvSpPr>
         <p:spPr>
           <a:xfrm>
-            <a:off x="6035040" y="2476500"/>
-            <a:ext cx="1508760" cy="476250"/>
+            <a:off x="10093574" y="2317527"/>
+            <a:ext cx="1110039" cy="527685"/>
           </a:xfrm>
           <a:prstGeom prst="rect">
             <a:avLst/>
@@ -13438,7 +15000,7 @@
           <a:bodyPr/>
           <a:lstStyle/>
           <a:p>
-            <a:endParaRPr lang="en-US"/>
+            <a:endParaRPr lang="en-US" noProof="0" dirty="0"/>
           </a:p>
         </p:txBody>
       </p:sp>
@@ -13458,8 +15020,8 @@
         </p:nvSpPr>
         <p:spPr>
           <a:xfrm>
-            <a:off x="6168390" y="2571750"/>
-            <a:ext cx="1242060" cy="247650"/>
+            <a:off x="10226924" y="2412778"/>
+            <a:ext cx="913820" cy="274396"/>
           </a:xfrm>
           <a:prstGeom prst="rect">
             <a:avLst/>
@@ -13493,7 +15055,7 @@
               </a:defRPr>
             </a:pPr>
             <a:r>
-              <a:rPr sz="1050" b="1">
+              <a:rPr lang="en-US" sz="1050" b="1" noProof="0" dirty="0">
                 <a:solidFill>
                   <a:srgbClr val="1E4D51"/>
                 </a:solidFill>
@@ -13522,8 +15084,8 @@
         </p:nvSpPr>
         <p:spPr>
           <a:xfrm>
-            <a:off x="685800" y="2952750"/>
-            <a:ext cx="1920240" cy="476250"/>
+            <a:off x="6062772" y="2793777"/>
+            <a:ext cx="1412777" cy="527685"/>
           </a:xfrm>
           <a:prstGeom prst="rect">
             <a:avLst/>
@@ -13542,7 +15104,7 @@
           <a:bodyPr/>
           <a:lstStyle/>
           <a:p>
-            <a:endParaRPr lang="en-US"/>
+            <a:endParaRPr lang="en-US" noProof="0" dirty="0"/>
           </a:p>
         </p:txBody>
       </p:sp>
@@ -13562,8 +15124,8 @@
         </p:nvSpPr>
         <p:spPr>
           <a:xfrm>
-            <a:off x="819150" y="3048000"/>
-            <a:ext cx="1653540" cy="247650"/>
+            <a:off x="6196122" y="2889028"/>
+            <a:ext cx="1216558" cy="274396"/>
           </a:xfrm>
           <a:prstGeom prst="rect">
             <a:avLst/>
@@ -13597,7 +15159,7 @@
               </a:defRPr>
             </a:pPr>
             <a:r>
-              <a:rPr sz="1050" b="1">
+              <a:rPr lang="en-US" sz="1050" b="1" noProof="0" dirty="0">
                 <a:solidFill>
                   <a:srgbClr val="182225"/>
                 </a:solidFill>
@@ -13626,8 +15188,8 @@
         </p:nvSpPr>
         <p:spPr>
           <a:xfrm>
-            <a:off x="2606040" y="2952750"/>
-            <a:ext cx="3429000" cy="476250"/>
+            <a:off x="7525814" y="2793777"/>
+            <a:ext cx="2522816" cy="527685"/>
           </a:xfrm>
           <a:prstGeom prst="rect">
             <a:avLst/>
@@ -13646,7 +15208,7 @@
           <a:bodyPr/>
           <a:lstStyle/>
           <a:p>
-            <a:endParaRPr lang="en-US"/>
+            <a:endParaRPr lang="en-US" noProof="0" dirty="0"/>
           </a:p>
         </p:txBody>
       </p:sp>
@@ -13666,8 +15228,8 @@
         </p:nvSpPr>
         <p:spPr>
           <a:xfrm>
-            <a:off x="2739390" y="3048000"/>
-            <a:ext cx="3162300" cy="247650"/>
+            <a:off x="7659164" y="2889028"/>
+            <a:ext cx="2326597" cy="274396"/>
           </a:xfrm>
           <a:prstGeom prst="rect">
             <a:avLst/>
@@ -13701,7 +15263,7 @@
               </a:defRPr>
             </a:pPr>
             <a:r>
-              <a:rPr sz="1050" b="0">
+              <a:rPr lang="en-US" sz="1050" b="0" noProof="0" dirty="0">
                 <a:solidFill>
                   <a:srgbClr val="182225"/>
                 </a:solidFill>
@@ -13730,8 +15292,8 @@
         </p:nvSpPr>
         <p:spPr>
           <a:xfrm>
-            <a:off x="6035040" y="2952750"/>
-            <a:ext cx="1508760" cy="476250"/>
+            <a:off x="10093574" y="2793777"/>
+            <a:ext cx="1110039" cy="527685"/>
           </a:xfrm>
           <a:prstGeom prst="rect">
             <a:avLst/>
@@ -13750,7 +15312,7 @@
           <a:bodyPr/>
           <a:lstStyle/>
           <a:p>
-            <a:endParaRPr lang="en-US"/>
+            <a:endParaRPr lang="en-US" noProof="0" dirty="0"/>
           </a:p>
         </p:txBody>
       </p:sp>
@@ -13770,8 +15332,8 @@
         </p:nvSpPr>
         <p:spPr>
           <a:xfrm>
-            <a:off x="6168390" y="3048000"/>
-            <a:ext cx="1242060" cy="247650"/>
+            <a:off x="10226924" y="2889028"/>
+            <a:ext cx="913820" cy="274396"/>
           </a:xfrm>
           <a:prstGeom prst="rect">
             <a:avLst/>
@@ -13805,7 +15367,7 @@
               </a:defRPr>
             </a:pPr>
             <a:r>
-              <a:rPr sz="1050" b="1">
+              <a:rPr lang="en-US" sz="1050" b="1" noProof="0" dirty="0">
                 <a:solidFill>
                   <a:srgbClr val="1E4D51"/>
                 </a:solidFill>
@@ -13834,8 +15396,8 @@
         </p:nvSpPr>
         <p:spPr>
           <a:xfrm>
-            <a:off x="685800" y="3429000"/>
-            <a:ext cx="1920240" cy="476250"/>
+            <a:off x="6062772" y="3270027"/>
+            <a:ext cx="1412777" cy="527685"/>
           </a:xfrm>
           <a:prstGeom prst="rect">
             <a:avLst/>
@@ -13854,7 +15416,7 @@
           <a:bodyPr/>
           <a:lstStyle/>
           <a:p>
-            <a:endParaRPr lang="en-US"/>
+            <a:endParaRPr lang="en-US" noProof="0" dirty="0"/>
           </a:p>
         </p:txBody>
       </p:sp>
@@ -13874,8 +15436,8 @@
         </p:nvSpPr>
         <p:spPr>
           <a:xfrm>
-            <a:off x="819150" y="3524250"/>
-            <a:ext cx="1653540" cy="247650"/>
+            <a:off x="6196122" y="3365278"/>
+            <a:ext cx="1216558" cy="274396"/>
           </a:xfrm>
           <a:prstGeom prst="rect">
             <a:avLst/>
@@ -13909,7 +15471,7 @@
               </a:defRPr>
             </a:pPr>
             <a:r>
-              <a:rPr sz="1050" b="1">
+              <a:rPr lang="en-US" sz="1050" b="1" noProof="0" dirty="0">
                 <a:solidFill>
                   <a:srgbClr val="182225"/>
                 </a:solidFill>
@@ -13938,8 +15500,8 @@
         </p:nvSpPr>
         <p:spPr>
           <a:xfrm>
-            <a:off x="2606040" y="3429000"/>
-            <a:ext cx="3429000" cy="476250"/>
+            <a:off x="7525814" y="3270027"/>
+            <a:ext cx="2522816" cy="527685"/>
           </a:xfrm>
           <a:prstGeom prst="rect">
             <a:avLst/>
@@ -13958,7 +15520,7 @@
           <a:bodyPr/>
           <a:lstStyle/>
           <a:p>
-            <a:endParaRPr lang="en-US"/>
+            <a:endParaRPr lang="en-US" noProof="0" dirty="0"/>
           </a:p>
         </p:txBody>
       </p:sp>
@@ -13978,8 +15540,8 @@
         </p:nvSpPr>
         <p:spPr>
           <a:xfrm>
-            <a:off x="2739390" y="3524250"/>
-            <a:ext cx="3162300" cy="247650"/>
+            <a:off x="7659164" y="3365278"/>
+            <a:ext cx="2326597" cy="274396"/>
           </a:xfrm>
           <a:prstGeom prst="rect">
             <a:avLst/>
@@ -14013,7 +15575,7 @@
               </a:defRPr>
             </a:pPr>
             <a:r>
-              <a:rPr sz="1050" b="0">
+              <a:rPr lang="en-US" sz="1050" b="0" noProof="0" dirty="0">
                 <a:solidFill>
                   <a:srgbClr val="182225"/>
                 </a:solidFill>
@@ -14042,8 +15604,8 @@
         </p:nvSpPr>
         <p:spPr>
           <a:xfrm>
-            <a:off x="6035040" y="3429000"/>
-            <a:ext cx="1508760" cy="476250"/>
+            <a:off x="10093574" y="3270027"/>
+            <a:ext cx="1110039" cy="527685"/>
           </a:xfrm>
           <a:prstGeom prst="rect">
             <a:avLst/>
@@ -14062,7 +15624,7 @@
           <a:bodyPr/>
           <a:lstStyle/>
           <a:p>
-            <a:endParaRPr lang="en-US"/>
+            <a:endParaRPr lang="en-US" noProof="0" dirty="0"/>
           </a:p>
         </p:txBody>
       </p:sp>
@@ -14082,8 +15644,8 @@
         </p:nvSpPr>
         <p:spPr>
           <a:xfrm>
-            <a:off x="6168390" y="3524250"/>
-            <a:ext cx="1242060" cy="247650"/>
+            <a:off x="10226924" y="3365278"/>
+            <a:ext cx="913820" cy="274396"/>
           </a:xfrm>
           <a:prstGeom prst="rect">
             <a:avLst/>
@@ -14117,7 +15679,7 @@
               </a:defRPr>
             </a:pPr>
             <a:r>
-              <a:rPr sz="1050" b="1">
+              <a:rPr lang="en-US" sz="1050" b="1" noProof="0" dirty="0">
                 <a:solidFill>
                   <a:srgbClr val="1E4D51"/>
                 </a:solidFill>
@@ -14146,8 +15708,8 @@
         </p:nvSpPr>
         <p:spPr>
           <a:xfrm>
-            <a:off x="685800" y="3905250"/>
-            <a:ext cx="1920240" cy="476250"/>
+            <a:off x="6062772" y="3746277"/>
+            <a:ext cx="1412777" cy="527685"/>
           </a:xfrm>
           <a:prstGeom prst="rect">
             <a:avLst/>
@@ -14166,7 +15728,7 @@
           <a:bodyPr/>
           <a:lstStyle/>
           <a:p>
-            <a:endParaRPr lang="en-US"/>
+            <a:endParaRPr lang="en-US" noProof="0" dirty="0"/>
           </a:p>
         </p:txBody>
       </p:sp>
@@ -14186,8 +15748,8 @@
         </p:nvSpPr>
         <p:spPr>
           <a:xfrm>
-            <a:off x="819150" y="4000500"/>
-            <a:ext cx="1653540" cy="247650"/>
+            <a:off x="6196122" y="3841528"/>
+            <a:ext cx="1216558" cy="274396"/>
           </a:xfrm>
           <a:prstGeom prst="rect">
             <a:avLst/>
@@ -14221,7 +15783,7 @@
               </a:defRPr>
             </a:pPr>
             <a:r>
-              <a:rPr sz="1050" b="1">
+              <a:rPr lang="en-US" sz="1050" b="1" noProof="0" dirty="0">
                 <a:solidFill>
                   <a:srgbClr val="182225"/>
                 </a:solidFill>
@@ -14250,8 +15812,8 @@
         </p:nvSpPr>
         <p:spPr>
           <a:xfrm>
-            <a:off x="2606040" y="3905250"/>
-            <a:ext cx="3429000" cy="476250"/>
+            <a:off x="7525814" y="3746277"/>
+            <a:ext cx="2522816" cy="527685"/>
           </a:xfrm>
           <a:prstGeom prst="rect">
             <a:avLst/>
@@ -14270,7 +15832,7 @@
           <a:bodyPr/>
           <a:lstStyle/>
           <a:p>
-            <a:endParaRPr lang="en-US"/>
+            <a:endParaRPr lang="en-US" noProof="0" dirty="0"/>
           </a:p>
         </p:txBody>
       </p:sp>
@@ -14290,8 +15852,8 @@
         </p:nvSpPr>
         <p:spPr>
           <a:xfrm>
-            <a:off x="2739390" y="4000500"/>
-            <a:ext cx="3162300" cy="247650"/>
+            <a:off x="7659164" y="3841528"/>
+            <a:ext cx="2326597" cy="274396"/>
           </a:xfrm>
           <a:prstGeom prst="rect">
             <a:avLst/>
@@ -14325,15 +15887,37 @@
               </a:defRPr>
             </a:pPr>
             <a:r>
-              <a:rPr sz="1050" b="0">
-                <a:solidFill>
-                  <a:srgbClr val="182225"/>
-                </a:solidFill>
-                <a:latin typeface="Aptos"/>
-                <a:ea typeface="Aptos"/>
-                <a:cs typeface="Aptos"/>
-              </a:rPr>
-              <a:t>value written to node["market_price"]</a:t>
+              <a:rPr lang="en-US" sz="1050" b="0" noProof="0" dirty="0">
+                <a:solidFill>
+                  <a:srgbClr val="182225"/>
+                </a:solidFill>
+                <a:latin typeface="Aptos"/>
+                <a:ea typeface="Aptos"/>
+                <a:cs typeface="Aptos"/>
+              </a:rPr>
+              <a:t>value written to node["</a:t>
+            </a:r>
+            <a:r>
+              <a:rPr lang="en-US" sz="1050" b="0" noProof="0" dirty="0" err="1">
+                <a:solidFill>
+                  <a:srgbClr val="182225"/>
+                </a:solidFill>
+                <a:latin typeface="Aptos"/>
+                <a:ea typeface="Aptos"/>
+                <a:cs typeface="Aptos"/>
+              </a:rPr>
+              <a:t>market_price</a:t>
+            </a:r>
+            <a:r>
+              <a:rPr lang="en-US" sz="1050" b="0" noProof="0" dirty="0">
+                <a:solidFill>
+                  <a:srgbClr val="182225"/>
+                </a:solidFill>
+                <a:latin typeface="Aptos"/>
+                <a:ea typeface="Aptos"/>
+                <a:cs typeface="Aptos"/>
+              </a:rPr>
+              <a:t>"]</a:t>
             </a:r>
           </a:p>
         </p:txBody>
@@ -14354,8 +15938,8 @@
         </p:nvSpPr>
         <p:spPr>
           <a:xfrm>
-            <a:off x="6035040" y="3905250"/>
-            <a:ext cx="1508760" cy="476250"/>
+            <a:off x="10093574" y="3746277"/>
+            <a:ext cx="1110039" cy="527685"/>
           </a:xfrm>
           <a:prstGeom prst="rect">
             <a:avLst/>
@@ -14374,7 +15958,7 @@
           <a:bodyPr/>
           <a:lstStyle/>
           <a:p>
-            <a:endParaRPr lang="en-US"/>
+            <a:endParaRPr lang="en-US" noProof="0" dirty="0"/>
           </a:p>
         </p:txBody>
       </p:sp>
@@ -14394,8 +15978,8 @@
         </p:nvSpPr>
         <p:spPr>
           <a:xfrm>
-            <a:off x="6168390" y="4000500"/>
-            <a:ext cx="1242060" cy="247650"/>
+            <a:off x="10226924" y="3841528"/>
+            <a:ext cx="913820" cy="274396"/>
           </a:xfrm>
           <a:prstGeom prst="rect">
             <a:avLst/>
@@ -14429,7 +16013,7 @@
               </a:defRPr>
             </a:pPr>
             <a:r>
-              <a:rPr sz="1050" b="1">
+              <a:rPr lang="en-US" sz="1050" b="1" noProof="0" dirty="0">
                 <a:solidFill>
                   <a:srgbClr val="1E4D51"/>
                 </a:solidFill>
@@ -14458,8 +16042,8 @@
         </p:nvSpPr>
         <p:spPr>
           <a:xfrm>
-            <a:off x="685800" y="4381500"/>
-            <a:ext cx="1920240" cy="476250"/>
+            <a:off x="6062772" y="4222527"/>
+            <a:ext cx="1412777" cy="527685"/>
           </a:xfrm>
           <a:prstGeom prst="rect">
             <a:avLst/>
@@ -14478,7 +16062,7 @@
           <a:bodyPr/>
           <a:lstStyle/>
           <a:p>
-            <a:endParaRPr lang="en-US"/>
+            <a:endParaRPr lang="en-US" noProof="0" dirty="0"/>
           </a:p>
         </p:txBody>
       </p:sp>
@@ -14498,8 +16082,8 @@
         </p:nvSpPr>
         <p:spPr>
           <a:xfrm>
-            <a:off x="819150" y="4476750"/>
-            <a:ext cx="1653540" cy="247650"/>
+            <a:off x="6196122" y="4317778"/>
+            <a:ext cx="1216558" cy="274396"/>
           </a:xfrm>
           <a:prstGeom prst="rect">
             <a:avLst/>
@@ -14533,7 +16117,7 @@
               </a:defRPr>
             </a:pPr>
             <a:r>
-              <a:rPr sz="1050" b="1">
+              <a:rPr lang="en-US" sz="1050" b="1" noProof="0" dirty="0">
                 <a:solidFill>
                   <a:srgbClr val="182225"/>
                 </a:solidFill>
@@ -14562,8 +16146,8 @@
         </p:nvSpPr>
         <p:spPr>
           <a:xfrm>
-            <a:off x="2606040" y="4381500"/>
-            <a:ext cx="3429000" cy="476250"/>
+            <a:off x="7525814" y="4222527"/>
+            <a:ext cx="2522816" cy="527685"/>
           </a:xfrm>
           <a:prstGeom prst="rect">
             <a:avLst/>
@@ -14582,7 +16166,7 @@
           <a:bodyPr/>
           <a:lstStyle/>
           <a:p>
-            <a:endParaRPr lang="en-US"/>
+            <a:endParaRPr lang="en-US" noProof="0" dirty="0"/>
           </a:p>
         </p:txBody>
       </p:sp>
@@ -14602,8 +16186,8 @@
         </p:nvSpPr>
         <p:spPr>
           <a:xfrm>
-            <a:off x="2739390" y="4476750"/>
-            <a:ext cx="3162300" cy="247650"/>
+            <a:off x="7659164" y="4317778"/>
+            <a:ext cx="2326597" cy="274396"/>
           </a:xfrm>
           <a:prstGeom prst="rect">
             <a:avLst/>
@@ -14637,7 +16221,7 @@
               </a:defRPr>
             </a:pPr>
             <a:r>
-              <a:rPr sz="1050" b="0">
+              <a:rPr lang="en-US" sz="1050" b="0" noProof="0" dirty="0">
                 <a:solidFill>
                   <a:srgbClr val="182225"/>
                 </a:solidFill>
@@ -14666,8 +16250,8 @@
         </p:nvSpPr>
         <p:spPr>
           <a:xfrm>
-            <a:off x="6035040" y="4381500"/>
-            <a:ext cx="1508760" cy="476250"/>
+            <a:off x="10093574" y="4222527"/>
+            <a:ext cx="1110039" cy="527685"/>
           </a:xfrm>
           <a:prstGeom prst="rect">
             <a:avLst/>
@@ -14686,7 +16270,7 @@
           <a:bodyPr/>
           <a:lstStyle/>
           <a:p>
-            <a:endParaRPr lang="en-US"/>
+            <a:endParaRPr lang="en-US" noProof="0" dirty="0"/>
           </a:p>
         </p:txBody>
       </p:sp>
@@ -14706,8 +16290,8 @@
         </p:nvSpPr>
         <p:spPr>
           <a:xfrm>
-            <a:off x="6168390" y="4476750"/>
-            <a:ext cx="1242060" cy="247650"/>
+            <a:off x="10226924" y="4317778"/>
+            <a:ext cx="913820" cy="274396"/>
           </a:xfrm>
           <a:prstGeom prst="rect">
             <a:avLst/>
@@ -14741,7 +16325,7 @@
               </a:defRPr>
             </a:pPr>
             <a:r>
-              <a:rPr sz="1050" b="1">
+              <a:rPr lang="en-US" sz="1050" b="1" noProof="0" dirty="0">
                 <a:solidFill>
                   <a:srgbClr val="1E4D51"/>
                 </a:solidFill>
@@ -14770,8 +16354,8 @@
         </p:nvSpPr>
         <p:spPr>
           <a:xfrm>
-            <a:off x="8096250" y="2171700"/>
-            <a:ext cx="2914650" cy="2438400"/>
+            <a:off x="6196121" y="4883641"/>
+            <a:ext cx="5007491" cy="1227471"/>
           </a:xfrm>
           <a:prstGeom prst="rect">
             <a:avLst/>
@@ -14790,7 +16374,7 @@
           <a:bodyPr/>
           <a:lstStyle/>
           <a:p>
-            <a:endParaRPr lang="en-US"/>
+            <a:endParaRPr lang="en-US" noProof="0" dirty="0"/>
           </a:p>
         </p:txBody>
       </p:sp>
@@ -14810,8 +16394,8 @@
         </p:nvSpPr>
         <p:spPr>
           <a:xfrm>
-            <a:off x="8324850" y="2476500"/>
-            <a:ext cx="2381250" cy="266700"/>
+            <a:off x="6414089" y="4965929"/>
+            <a:ext cx="4118000" cy="177753"/>
           </a:xfrm>
           <a:prstGeom prst="rect">
             <a:avLst/>
@@ -14845,7 +16429,7 @@
               </a:defRPr>
             </a:pPr>
             <a:r>
-              <a:rPr sz="1500" b="1" dirty="0">
+              <a:rPr lang="en-US" sz="1500" b="1" noProof="0" dirty="0">
                 <a:solidFill>
                   <a:srgbClr val="A65F3B"/>
                 </a:solidFill>
@@ -14853,7 +16437,29 @@
                 <a:ea typeface="Aptos Display"/>
                 <a:cs typeface="Aptos Display"/>
               </a:rPr>
-              <a:t>Why not Brightway code?</a:t>
+              <a:t>Why not </a:t>
+            </a:r>
+            <a:r>
+              <a:rPr lang="en-US" sz="1500" b="1" noProof="0" dirty="0" err="1">
+                <a:solidFill>
+                  <a:srgbClr val="A65F3B"/>
+                </a:solidFill>
+                <a:latin typeface="Aptos Display"/>
+                <a:ea typeface="Aptos Display"/>
+                <a:cs typeface="Aptos Display"/>
+              </a:rPr>
+              <a:t>Brightway</a:t>
+            </a:r>
+            <a:r>
+              <a:rPr lang="en-US" sz="1500" b="1" noProof="0" dirty="0">
+                <a:solidFill>
+                  <a:srgbClr val="A65F3B"/>
+                </a:solidFill>
+                <a:latin typeface="Aptos Display"/>
+                <a:ea typeface="Aptos Display"/>
+                <a:cs typeface="Aptos Display"/>
+              </a:rPr>
+              <a:t> “code”?</a:t>
             </a:r>
           </a:p>
         </p:txBody>
@@ -14874,8 +16480,8 @@
         </p:nvSpPr>
         <p:spPr>
           <a:xfrm>
-            <a:off x="8324850" y="3086100"/>
-            <a:ext cx="66675" cy="66675"/>
+            <a:off x="6414089" y="5310267"/>
+            <a:ext cx="115304" cy="45719"/>
           </a:xfrm>
           <a:prstGeom prst="rect">
             <a:avLst/>
@@ -14896,7 +16502,7 @@
           <a:bodyPr/>
           <a:lstStyle/>
           <a:p>
-            <a:endParaRPr lang="en-US"/>
+            <a:endParaRPr lang="en-US" noProof="0" dirty="0"/>
           </a:p>
         </p:txBody>
       </p:sp>
@@ -14916,8 +16522,8 @@
         </p:nvSpPr>
         <p:spPr>
           <a:xfrm>
-            <a:off x="8515350" y="3009900"/>
-            <a:ext cx="2076450" cy="390525"/>
+            <a:off x="6625855" y="5234068"/>
+            <a:ext cx="3590896" cy="260282"/>
           </a:xfrm>
           <a:prstGeom prst="rect">
             <a:avLst/>
@@ -14951,7 +16557,7 @@
               </a:defRPr>
             </a:pPr>
             <a:r>
-              <a:rPr sz="1050" b="0">
+              <a:rPr lang="en-US" sz="1050" b="0" noProof="0" dirty="0">
                 <a:solidFill>
                   <a:srgbClr val="182225"/>
                 </a:solidFill>
@@ -14980,8 +16586,8 @@
         </p:nvSpPr>
         <p:spPr>
           <a:xfrm>
-            <a:off x="8324850" y="3514725"/>
-            <a:ext cx="66675" cy="66675"/>
+            <a:off x="6424722" y="5536875"/>
+            <a:ext cx="115304" cy="45719"/>
           </a:xfrm>
           <a:prstGeom prst="rect">
             <a:avLst/>
@@ -15002,7 +16608,7 @@
           <a:bodyPr/>
           <a:lstStyle/>
           <a:p>
-            <a:endParaRPr lang="en-US"/>
+            <a:endParaRPr lang="en-US" noProof="0" dirty="0"/>
           </a:p>
         </p:txBody>
       </p:sp>
@@ -15022,8 +16628,8 @@
         </p:nvSpPr>
         <p:spPr>
           <a:xfrm>
-            <a:off x="8515350" y="3438525"/>
-            <a:ext cx="2076450" cy="390525"/>
+            <a:off x="6615222" y="5460676"/>
+            <a:ext cx="3590896" cy="260282"/>
           </a:xfrm>
           <a:prstGeom prst="rect">
             <a:avLst/>
@@ -15057,7 +16663,7 @@
               </a:defRPr>
             </a:pPr>
             <a:r>
-              <a:rPr sz="1050" b="0">
+              <a:rPr lang="en-US" sz="1050" b="0" noProof="0" dirty="0">
                 <a:solidFill>
                   <a:srgbClr val="182225"/>
                 </a:solidFill>
@@ -15086,8 +16692,8 @@
         </p:nvSpPr>
         <p:spPr>
           <a:xfrm>
-            <a:off x="8324850" y="3943350"/>
-            <a:ext cx="66675" cy="66675"/>
+            <a:off x="6424722" y="5784744"/>
+            <a:ext cx="115304" cy="45719"/>
           </a:xfrm>
           <a:prstGeom prst="rect">
             <a:avLst/>
@@ -15108,7 +16714,7 @@
           <a:bodyPr/>
           <a:lstStyle/>
           <a:p>
-            <a:endParaRPr lang="en-US"/>
+            <a:endParaRPr lang="en-US" noProof="0" dirty="0"/>
           </a:p>
         </p:txBody>
       </p:sp>
@@ -15128,8 +16734,8 @@
         </p:nvSpPr>
         <p:spPr>
           <a:xfrm>
-            <a:off x="8515350" y="3867150"/>
-            <a:ext cx="2076450" cy="390525"/>
+            <a:off x="6615222" y="5708549"/>
+            <a:ext cx="3590896" cy="260282"/>
           </a:xfrm>
           <a:prstGeom prst="rect">
             <a:avLst/>
@@ -15163,7 +16769,7 @@
               </a:defRPr>
             </a:pPr>
             <a:r>
-              <a:rPr sz="1050" b="0" dirty="0">
+              <a:rPr lang="en-US" sz="1050" b="0" noProof="0" dirty="0">
                 <a:solidFill>
                   <a:srgbClr val="182225"/>
                 </a:solidFill>
@@ -15192,8 +16798,8 @@
         </p:nvSpPr>
         <p:spPr>
           <a:xfrm>
-            <a:off x="914400" y="4972050"/>
-            <a:ext cx="7239000" cy="323850"/>
+            <a:off x="656076" y="1795532"/>
+            <a:ext cx="3937189" cy="3733587"/>
           </a:xfrm>
           <a:prstGeom prst="rect">
             <a:avLst/>
@@ -15216,26 +16822,995 @@
           <a:bodyPr lIns="0" tIns="0" rIns="0" bIns="0" anchor="t"/>
           <a:lstStyle/>
           <a:p>
-            <a:pPr algn="l">
-              <a:defRPr sz="1350" b="0">
-                <a:solidFill>
-                  <a:srgbClr val="1E4D51"/>
-                </a:solidFill>
-                <a:latin typeface="Aptos Mono"/>
-                <a:ea typeface="Aptos Mono"/>
-                <a:cs typeface="Aptos Mono"/>
-              </a:defRPr>
-            </a:pPr>
-            <a:r>
-              <a:rPr sz="1350" b="0">
-                <a:solidFill>
-                  <a:srgbClr val="1E4D51"/>
-                </a:solidFill>
-                <a:latin typeface="Aptos Mono"/>
-                <a:ea typeface="Aptos Mono"/>
-                <a:cs typeface="Aptos Mono"/>
-              </a:rPr>
-              <a:t>set_market_prices(..., product_col="product", unit_col="unit")</a:t>
+            <a:r>
+              <a:rPr lang="en-US" noProof="0" dirty="0">
+                <a:solidFill>
+                  <a:srgbClr val="FFC000"/>
+                </a:solidFill>
+              </a:rPr>
+              <a:t>set_market_prices</a:t>
+            </a:r>
+            <a:r>
+              <a:rPr lang="en-US" noProof="0" dirty="0">
+                <a:solidFill>
+                  <a:srgbClr val="FFFF00"/>
+                </a:solidFill>
+              </a:rPr>
+              <a:t>(</a:t>
+            </a:r>
+          </a:p>
+          <a:p>
+            <a:r>
+              <a:rPr lang="en-US" noProof="0" dirty="0"/>
+              <a:t>    </a:t>
+            </a:r>
+            <a:r>
+              <a:rPr lang="en-US" noProof="0" dirty="0" err="1">
+                <a:solidFill>
+                  <a:schemeClr val="tx2">
+                    <a:lumMod val="50000"/>
+                    <a:lumOff val="50000"/>
+                  </a:schemeClr>
+                </a:solidFill>
+              </a:rPr>
+              <a:t>price_data</a:t>
+            </a:r>
+            <a:r>
+              <a:rPr lang="en-US" noProof="0" dirty="0"/>
+              <a:t>:</a:t>
+            </a:r>
+            <a:r>
+              <a:rPr lang="en-US" noProof="0" dirty="0">
+                <a:solidFill>
+                  <a:schemeClr val="tx2">
+                    <a:lumMod val="50000"/>
+                    <a:lumOff val="50000"/>
+                  </a:schemeClr>
+                </a:solidFill>
+              </a:rPr>
+              <a:t> </a:t>
+            </a:r>
+            <a:r>
+              <a:rPr lang="en-US" noProof="0" dirty="0">
+                <a:solidFill>
+                  <a:schemeClr val="accent3">
+                    <a:lumMod val="60000"/>
+                    <a:lumOff val="40000"/>
+                  </a:schemeClr>
+                </a:solidFill>
+              </a:rPr>
+              <a:t>Any</a:t>
+            </a:r>
+            <a:r>
+              <a:rPr lang="en-US" noProof="0" dirty="0"/>
+              <a:t>,</a:t>
+            </a:r>
+          </a:p>
+          <a:p>
+            <a:r>
+              <a:rPr lang="en-US" noProof="0" dirty="0">
+                <a:solidFill>
+                  <a:schemeClr val="tx2">
+                    <a:lumMod val="50000"/>
+                    <a:lumOff val="50000"/>
+                  </a:schemeClr>
+                </a:solidFill>
+              </a:rPr>
+              <a:t>    </a:t>
+            </a:r>
+            <a:r>
+              <a:rPr lang="en-US" noProof="0" dirty="0" err="1">
+                <a:solidFill>
+                  <a:schemeClr val="tx2">
+                    <a:lumMod val="50000"/>
+                    <a:lumOff val="50000"/>
+                  </a:schemeClr>
+                </a:solidFill>
+              </a:rPr>
+              <a:t>background_databases</a:t>
+            </a:r>
+            <a:r>
+              <a:rPr lang="en-US" noProof="0" dirty="0"/>
+              <a:t>:</a:t>
+            </a:r>
+            <a:r>
+              <a:rPr lang="en-US" noProof="0" dirty="0">
+                <a:solidFill>
+                  <a:schemeClr val="tx2">
+                    <a:lumMod val="50000"/>
+                    <a:lumOff val="50000"/>
+                  </a:schemeClr>
+                </a:solidFill>
+              </a:rPr>
+              <a:t> </a:t>
+            </a:r>
+            <a:r>
+              <a:rPr lang="en-US" noProof="0" dirty="0" err="1">
+                <a:solidFill>
+                  <a:schemeClr val="accent3">
+                    <a:lumMod val="60000"/>
+                    <a:lumOff val="40000"/>
+                  </a:schemeClr>
+                </a:solidFill>
+              </a:rPr>
+              <a:t>dict</a:t>
+            </a:r>
+            <a:r>
+              <a:rPr lang="en-US" noProof="0" dirty="0">
+                <a:solidFill>
+                  <a:schemeClr val="accent3">
+                    <a:lumMod val="60000"/>
+                    <a:lumOff val="40000"/>
+                  </a:schemeClr>
+                </a:solidFill>
+              </a:rPr>
+              <a:t>[int, str]</a:t>
+            </a:r>
+            <a:r>
+              <a:rPr lang="en-US" noProof="0" dirty="0"/>
+              <a:t>,</a:t>
+            </a:r>
+          </a:p>
+          <a:p>
+            <a:r>
+              <a:rPr lang="en-US" noProof="0" dirty="0">
+                <a:solidFill>
+                  <a:schemeClr val="tx2">
+                    <a:lumMod val="50000"/>
+                    <a:lumOff val="50000"/>
+                  </a:schemeClr>
+                </a:solidFill>
+              </a:rPr>
+              <a:t>    </a:t>
+            </a:r>
+            <a:r>
+              <a:rPr lang="en-US" noProof="0" dirty="0" err="1">
+                <a:solidFill>
+                  <a:schemeClr val="tx2">
+                    <a:lumMod val="50000"/>
+                    <a:lumOff val="50000"/>
+                  </a:schemeClr>
+                </a:solidFill>
+              </a:rPr>
+              <a:t>name_col</a:t>
+            </a:r>
+            <a:r>
+              <a:rPr lang="en-US" noProof="0" dirty="0"/>
+              <a:t>:</a:t>
+            </a:r>
+            <a:r>
+              <a:rPr lang="en-US" noProof="0" dirty="0">
+                <a:solidFill>
+                  <a:schemeClr val="tx2">
+                    <a:lumMod val="50000"/>
+                    <a:lumOff val="50000"/>
+                  </a:schemeClr>
+                </a:solidFill>
+              </a:rPr>
+              <a:t> </a:t>
+            </a:r>
+            <a:r>
+              <a:rPr lang="en-US" noProof="0" dirty="0">
+                <a:solidFill>
+                  <a:schemeClr val="accent3">
+                    <a:lumMod val="60000"/>
+                    <a:lumOff val="40000"/>
+                  </a:schemeClr>
+                </a:solidFill>
+              </a:rPr>
+              <a:t>str</a:t>
+            </a:r>
+            <a:r>
+              <a:rPr lang="en-US" noProof="0" dirty="0">
+                <a:solidFill>
+                  <a:schemeClr val="tx2">
+                    <a:lumMod val="50000"/>
+                    <a:lumOff val="50000"/>
+                  </a:schemeClr>
+                </a:solidFill>
+              </a:rPr>
+              <a:t> </a:t>
+            </a:r>
+            <a:r>
+              <a:rPr lang="en-US" noProof="0" dirty="0"/>
+              <a:t>=</a:t>
+            </a:r>
+            <a:r>
+              <a:rPr lang="en-US" noProof="0" dirty="0">
+                <a:solidFill>
+                  <a:schemeClr val="tx2">
+                    <a:lumMod val="50000"/>
+                    <a:lumOff val="50000"/>
+                  </a:schemeClr>
+                </a:solidFill>
+              </a:rPr>
+              <a:t> </a:t>
+            </a:r>
+            <a:r>
+              <a:rPr lang="en-US" noProof="0" dirty="0">
+                <a:solidFill>
+                  <a:schemeClr val="accent2"/>
+                </a:solidFill>
+              </a:rPr>
+              <a:t>"name"</a:t>
+            </a:r>
+            <a:r>
+              <a:rPr lang="en-US" noProof="0" dirty="0"/>
+              <a:t>,</a:t>
+            </a:r>
+          </a:p>
+          <a:p>
+            <a:r>
+              <a:rPr lang="en-US" noProof="0" dirty="0">
+                <a:solidFill>
+                  <a:schemeClr val="tx2">
+                    <a:lumMod val="50000"/>
+                    <a:lumOff val="50000"/>
+                  </a:schemeClr>
+                </a:solidFill>
+              </a:rPr>
+              <a:t>    </a:t>
+            </a:r>
+            <a:r>
+              <a:rPr lang="en-US" noProof="0" dirty="0" err="1">
+                <a:solidFill>
+                  <a:schemeClr val="tx2">
+                    <a:lumMod val="50000"/>
+                    <a:lumOff val="50000"/>
+                  </a:schemeClr>
+                </a:solidFill>
+              </a:rPr>
+              <a:t>year_col</a:t>
+            </a:r>
+            <a:r>
+              <a:rPr lang="en-US" noProof="0" dirty="0"/>
+              <a:t>:</a:t>
+            </a:r>
+            <a:r>
+              <a:rPr lang="en-US" noProof="0" dirty="0">
+                <a:solidFill>
+                  <a:schemeClr val="tx2">
+                    <a:lumMod val="50000"/>
+                    <a:lumOff val="50000"/>
+                  </a:schemeClr>
+                </a:solidFill>
+              </a:rPr>
+              <a:t> </a:t>
+            </a:r>
+            <a:r>
+              <a:rPr lang="en-US" noProof="0" dirty="0">
+                <a:solidFill>
+                  <a:schemeClr val="accent3">
+                    <a:lumMod val="60000"/>
+                    <a:lumOff val="40000"/>
+                  </a:schemeClr>
+                </a:solidFill>
+              </a:rPr>
+              <a:t>str</a:t>
+            </a:r>
+            <a:r>
+              <a:rPr lang="en-US" noProof="0" dirty="0">
+                <a:solidFill>
+                  <a:schemeClr val="tx2">
+                    <a:lumMod val="50000"/>
+                    <a:lumOff val="50000"/>
+                  </a:schemeClr>
+                </a:solidFill>
+              </a:rPr>
+              <a:t> </a:t>
+            </a:r>
+            <a:r>
+              <a:rPr lang="en-US" noProof="0" dirty="0"/>
+              <a:t>=</a:t>
+            </a:r>
+            <a:r>
+              <a:rPr lang="en-US" noProof="0" dirty="0">
+                <a:solidFill>
+                  <a:schemeClr val="tx2">
+                    <a:lumMod val="50000"/>
+                    <a:lumOff val="50000"/>
+                  </a:schemeClr>
+                </a:solidFill>
+              </a:rPr>
+              <a:t> </a:t>
+            </a:r>
+            <a:r>
+              <a:rPr lang="en-US" noProof="0" dirty="0">
+                <a:solidFill>
+                  <a:schemeClr val="accent2"/>
+                </a:solidFill>
+              </a:rPr>
+              <a:t>"year"</a:t>
+            </a:r>
+            <a:r>
+              <a:rPr lang="en-US" noProof="0" dirty="0"/>
+              <a:t>,</a:t>
+            </a:r>
+          </a:p>
+          <a:p>
+            <a:r>
+              <a:rPr lang="en-US" noProof="0" dirty="0">
+                <a:solidFill>
+                  <a:schemeClr val="tx2">
+                    <a:lumMod val="50000"/>
+                    <a:lumOff val="50000"/>
+                  </a:schemeClr>
+                </a:solidFill>
+              </a:rPr>
+              <a:t>    </a:t>
+            </a:r>
+            <a:r>
+              <a:rPr lang="en-US" noProof="0" dirty="0" err="1">
+                <a:solidFill>
+                  <a:schemeClr val="tx2">
+                    <a:lumMod val="50000"/>
+                    <a:lumOff val="50000"/>
+                  </a:schemeClr>
+                </a:solidFill>
+              </a:rPr>
+              <a:t>price_col</a:t>
+            </a:r>
+            <a:r>
+              <a:rPr lang="en-US" noProof="0" dirty="0"/>
+              <a:t>:</a:t>
+            </a:r>
+            <a:r>
+              <a:rPr lang="en-US" noProof="0" dirty="0">
+                <a:solidFill>
+                  <a:schemeClr val="tx2">
+                    <a:lumMod val="50000"/>
+                    <a:lumOff val="50000"/>
+                  </a:schemeClr>
+                </a:solidFill>
+              </a:rPr>
+              <a:t> </a:t>
+            </a:r>
+            <a:r>
+              <a:rPr lang="en-US" noProof="0" dirty="0">
+                <a:solidFill>
+                  <a:schemeClr val="accent3">
+                    <a:lumMod val="60000"/>
+                    <a:lumOff val="40000"/>
+                  </a:schemeClr>
+                </a:solidFill>
+              </a:rPr>
+              <a:t>str</a:t>
+            </a:r>
+            <a:r>
+              <a:rPr lang="en-US" noProof="0" dirty="0">
+                <a:solidFill>
+                  <a:schemeClr val="tx2">
+                    <a:lumMod val="50000"/>
+                    <a:lumOff val="50000"/>
+                  </a:schemeClr>
+                </a:solidFill>
+              </a:rPr>
+              <a:t> </a:t>
+            </a:r>
+            <a:r>
+              <a:rPr lang="en-US" noProof="0" dirty="0"/>
+              <a:t>=</a:t>
+            </a:r>
+            <a:r>
+              <a:rPr lang="en-US" noProof="0" dirty="0">
+                <a:solidFill>
+                  <a:schemeClr val="tx2">
+                    <a:lumMod val="50000"/>
+                    <a:lumOff val="50000"/>
+                  </a:schemeClr>
+                </a:solidFill>
+              </a:rPr>
+              <a:t> </a:t>
+            </a:r>
+            <a:r>
+              <a:rPr lang="en-US" noProof="0" dirty="0">
+                <a:solidFill>
+                  <a:schemeClr val="accent2"/>
+                </a:solidFill>
+              </a:rPr>
+              <a:t>"price"</a:t>
+            </a:r>
+            <a:r>
+              <a:rPr lang="en-US" noProof="0" dirty="0"/>
+              <a:t>,</a:t>
+            </a:r>
+          </a:p>
+          <a:p>
+            <a:r>
+              <a:rPr lang="en-US" noProof="0" dirty="0">
+                <a:solidFill>
+                  <a:schemeClr val="tx2">
+                    <a:lumMod val="50000"/>
+                    <a:lumOff val="50000"/>
+                  </a:schemeClr>
+                </a:solidFill>
+              </a:rPr>
+              <a:t>    </a:t>
+            </a:r>
+            <a:r>
+              <a:rPr lang="en-US" noProof="0" dirty="0" err="1">
+                <a:solidFill>
+                  <a:schemeClr val="tx2">
+                    <a:lumMod val="50000"/>
+                    <a:lumOff val="50000"/>
+                  </a:schemeClr>
+                </a:solidFill>
+              </a:rPr>
+              <a:t>location_col</a:t>
+            </a:r>
+            <a:r>
+              <a:rPr lang="en-US" noProof="0" dirty="0"/>
+              <a:t>:</a:t>
+            </a:r>
+            <a:r>
+              <a:rPr lang="en-US" noProof="0" dirty="0">
+                <a:solidFill>
+                  <a:schemeClr val="tx2">
+                    <a:lumMod val="50000"/>
+                    <a:lumOff val="50000"/>
+                  </a:schemeClr>
+                </a:solidFill>
+              </a:rPr>
+              <a:t> </a:t>
+            </a:r>
+            <a:r>
+              <a:rPr lang="en-US" noProof="0" dirty="0">
+                <a:solidFill>
+                  <a:schemeClr val="accent3">
+                    <a:lumMod val="60000"/>
+                    <a:lumOff val="40000"/>
+                  </a:schemeClr>
+                </a:solidFill>
+              </a:rPr>
+              <a:t>str</a:t>
+            </a:r>
+            <a:r>
+              <a:rPr lang="en-US" noProof="0" dirty="0">
+                <a:solidFill>
+                  <a:schemeClr val="tx2">
+                    <a:lumMod val="50000"/>
+                    <a:lumOff val="50000"/>
+                  </a:schemeClr>
+                </a:solidFill>
+              </a:rPr>
+              <a:t> </a:t>
+            </a:r>
+            <a:r>
+              <a:rPr lang="en-US" noProof="0" dirty="0"/>
+              <a:t>|</a:t>
+            </a:r>
+            <a:r>
+              <a:rPr lang="en-US" noProof="0" dirty="0">
+                <a:solidFill>
+                  <a:schemeClr val="tx2">
+                    <a:lumMod val="50000"/>
+                    <a:lumOff val="50000"/>
+                  </a:schemeClr>
+                </a:solidFill>
+              </a:rPr>
+              <a:t> None </a:t>
+            </a:r>
+            <a:r>
+              <a:rPr lang="en-US" noProof="0" dirty="0"/>
+              <a:t>=</a:t>
+            </a:r>
+            <a:r>
+              <a:rPr lang="en-US" noProof="0" dirty="0">
+                <a:solidFill>
+                  <a:schemeClr val="tx2">
+                    <a:lumMod val="50000"/>
+                    <a:lumOff val="50000"/>
+                  </a:schemeClr>
+                </a:solidFill>
+              </a:rPr>
+              <a:t> </a:t>
+            </a:r>
+            <a:r>
+              <a:rPr lang="en-US" noProof="0" dirty="0">
+                <a:solidFill>
+                  <a:schemeClr val="accent2"/>
+                </a:solidFill>
+              </a:rPr>
+              <a:t>"location"</a:t>
+            </a:r>
+            <a:r>
+              <a:rPr lang="en-US" noProof="0" dirty="0"/>
+              <a:t>,</a:t>
+            </a:r>
+          </a:p>
+          <a:p>
+            <a:r>
+              <a:rPr lang="en-US" noProof="0" dirty="0">
+                <a:solidFill>
+                  <a:schemeClr val="tx2">
+                    <a:lumMod val="50000"/>
+                    <a:lumOff val="50000"/>
+                  </a:schemeClr>
+                </a:solidFill>
+              </a:rPr>
+              <a:t>    </a:t>
+            </a:r>
+            <a:r>
+              <a:rPr lang="en-US" noProof="0" dirty="0" err="1">
+                <a:solidFill>
+                  <a:schemeClr val="tx2">
+                    <a:lumMod val="50000"/>
+                    <a:lumOff val="50000"/>
+                  </a:schemeClr>
+                </a:solidFill>
+              </a:rPr>
+              <a:t>product_col</a:t>
+            </a:r>
+            <a:r>
+              <a:rPr lang="en-US" noProof="0" dirty="0"/>
+              <a:t>:</a:t>
+            </a:r>
+            <a:r>
+              <a:rPr lang="en-US" noProof="0" dirty="0">
+                <a:solidFill>
+                  <a:schemeClr val="tx2">
+                    <a:lumMod val="50000"/>
+                    <a:lumOff val="50000"/>
+                  </a:schemeClr>
+                </a:solidFill>
+              </a:rPr>
+              <a:t> </a:t>
+            </a:r>
+            <a:r>
+              <a:rPr lang="en-US" noProof="0" dirty="0">
+                <a:solidFill>
+                  <a:schemeClr val="accent3">
+                    <a:lumMod val="60000"/>
+                    <a:lumOff val="40000"/>
+                  </a:schemeClr>
+                </a:solidFill>
+              </a:rPr>
+              <a:t>str</a:t>
+            </a:r>
+            <a:r>
+              <a:rPr lang="en-US" noProof="0" dirty="0">
+                <a:solidFill>
+                  <a:schemeClr val="tx2">
+                    <a:lumMod val="50000"/>
+                    <a:lumOff val="50000"/>
+                  </a:schemeClr>
+                </a:solidFill>
+              </a:rPr>
+              <a:t> </a:t>
+            </a:r>
+            <a:r>
+              <a:rPr lang="en-US" noProof="0" dirty="0"/>
+              <a:t>|</a:t>
+            </a:r>
+            <a:r>
+              <a:rPr lang="en-US" noProof="0" dirty="0">
+                <a:solidFill>
+                  <a:schemeClr val="tx2">
+                    <a:lumMod val="50000"/>
+                    <a:lumOff val="50000"/>
+                  </a:schemeClr>
+                </a:solidFill>
+              </a:rPr>
+              <a:t> None </a:t>
+            </a:r>
+            <a:r>
+              <a:rPr lang="en-US" noProof="0" dirty="0"/>
+              <a:t>=</a:t>
+            </a:r>
+            <a:r>
+              <a:rPr lang="en-US" noProof="0" dirty="0">
+                <a:solidFill>
+                  <a:schemeClr val="tx2">
+                    <a:lumMod val="50000"/>
+                    <a:lumOff val="50000"/>
+                  </a:schemeClr>
+                </a:solidFill>
+              </a:rPr>
+              <a:t> None</a:t>
+            </a:r>
+            <a:r>
+              <a:rPr lang="en-US" noProof="0" dirty="0"/>
+              <a:t>,</a:t>
+            </a:r>
+          </a:p>
+          <a:p>
+            <a:r>
+              <a:rPr lang="en-US" noProof="0" dirty="0">
+                <a:solidFill>
+                  <a:schemeClr val="tx2">
+                    <a:lumMod val="50000"/>
+                    <a:lumOff val="50000"/>
+                  </a:schemeClr>
+                </a:solidFill>
+              </a:rPr>
+              <a:t>    </a:t>
+            </a:r>
+            <a:r>
+              <a:rPr lang="en-US" noProof="0" dirty="0" err="1">
+                <a:solidFill>
+                  <a:schemeClr val="tx2">
+                    <a:lumMod val="50000"/>
+                    <a:lumOff val="50000"/>
+                  </a:schemeClr>
+                </a:solidFill>
+              </a:rPr>
+              <a:t>unit_col</a:t>
+            </a:r>
+            <a:r>
+              <a:rPr lang="en-US" noProof="0" dirty="0"/>
+              <a:t>:</a:t>
+            </a:r>
+            <a:r>
+              <a:rPr lang="en-US" noProof="0" dirty="0">
+                <a:solidFill>
+                  <a:schemeClr val="tx2">
+                    <a:lumMod val="50000"/>
+                    <a:lumOff val="50000"/>
+                  </a:schemeClr>
+                </a:solidFill>
+              </a:rPr>
+              <a:t> str </a:t>
+            </a:r>
+            <a:r>
+              <a:rPr lang="en-US" noProof="0" dirty="0"/>
+              <a:t>|</a:t>
+            </a:r>
+            <a:r>
+              <a:rPr lang="en-US" noProof="0" dirty="0">
+                <a:solidFill>
+                  <a:schemeClr val="tx2">
+                    <a:lumMod val="50000"/>
+                    <a:lumOff val="50000"/>
+                  </a:schemeClr>
+                </a:solidFill>
+              </a:rPr>
+              <a:t> </a:t>
+            </a:r>
+            <a:r>
+              <a:rPr lang="en-US" noProof="0" dirty="0">
+                <a:solidFill>
+                  <a:schemeClr val="accent3">
+                    <a:lumMod val="60000"/>
+                    <a:lumOff val="40000"/>
+                  </a:schemeClr>
+                </a:solidFill>
+              </a:rPr>
+              <a:t>None</a:t>
+            </a:r>
+            <a:r>
+              <a:rPr lang="en-US" noProof="0" dirty="0">
+                <a:solidFill>
+                  <a:schemeClr val="tx2">
+                    <a:lumMod val="50000"/>
+                    <a:lumOff val="50000"/>
+                  </a:schemeClr>
+                </a:solidFill>
+              </a:rPr>
+              <a:t> </a:t>
+            </a:r>
+            <a:r>
+              <a:rPr lang="en-US" noProof="0" dirty="0"/>
+              <a:t>=</a:t>
+            </a:r>
+            <a:r>
+              <a:rPr lang="en-US" noProof="0" dirty="0">
+                <a:solidFill>
+                  <a:schemeClr val="tx2">
+                    <a:lumMod val="50000"/>
+                    <a:lumOff val="50000"/>
+                  </a:schemeClr>
+                </a:solidFill>
+              </a:rPr>
+              <a:t> None</a:t>
+            </a:r>
+            <a:r>
+              <a:rPr lang="en-US" noProof="0" dirty="0"/>
+              <a:t>,</a:t>
+            </a:r>
+          </a:p>
+          <a:p>
+            <a:r>
+              <a:rPr lang="en-US" noProof="0" dirty="0">
+                <a:solidFill>
+                  <a:schemeClr val="tx2">
+                    <a:lumMod val="50000"/>
+                    <a:lumOff val="50000"/>
+                  </a:schemeClr>
+                </a:solidFill>
+              </a:rPr>
+              <a:t>    </a:t>
+            </a:r>
+            <a:r>
+              <a:rPr lang="en-US" noProof="0" dirty="0" err="1">
+                <a:solidFill>
+                  <a:schemeClr val="tx2">
+                    <a:lumMod val="50000"/>
+                    <a:lumOff val="50000"/>
+                  </a:schemeClr>
+                </a:solidFill>
+              </a:rPr>
+              <a:t>price_attribute</a:t>
+            </a:r>
+            <a:r>
+              <a:rPr lang="en-US" noProof="0" dirty="0"/>
+              <a:t>:</a:t>
+            </a:r>
+            <a:r>
+              <a:rPr lang="en-US" noProof="0" dirty="0">
+                <a:solidFill>
+                  <a:schemeClr val="tx2">
+                    <a:lumMod val="50000"/>
+                    <a:lumOff val="50000"/>
+                  </a:schemeClr>
+                </a:solidFill>
+              </a:rPr>
+              <a:t> </a:t>
+            </a:r>
+            <a:r>
+              <a:rPr lang="en-US" noProof="0" dirty="0">
+                <a:solidFill>
+                  <a:schemeClr val="accent3">
+                    <a:lumMod val="60000"/>
+                    <a:lumOff val="40000"/>
+                  </a:schemeClr>
+                </a:solidFill>
+              </a:rPr>
+              <a:t>str</a:t>
+            </a:r>
+            <a:r>
+              <a:rPr lang="en-US" noProof="0" dirty="0">
+                <a:solidFill>
+                  <a:schemeClr val="tx2">
+                    <a:lumMod val="50000"/>
+                    <a:lumOff val="50000"/>
+                  </a:schemeClr>
+                </a:solidFill>
+              </a:rPr>
+              <a:t> </a:t>
+            </a:r>
+            <a:r>
+              <a:rPr lang="en-US" noProof="0" dirty="0"/>
+              <a:t>=</a:t>
+            </a:r>
+            <a:r>
+              <a:rPr lang="en-US" noProof="0" dirty="0">
+                <a:solidFill>
+                  <a:schemeClr val="tx2">
+                    <a:lumMod val="50000"/>
+                    <a:lumOff val="50000"/>
+                  </a:schemeClr>
+                </a:solidFill>
+              </a:rPr>
+              <a:t> </a:t>
+            </a:r>
+            <a:r>
+              <a:rPr lang="en-US" noProof="0" dirty="0">
+                <a:solidFill>
+                  <a:schemeClr val="accent2"/>
+                </a:solidFill>
+              </a:rPr>
+              <a:t>"</a:t>
+            </a:r>
+            <a:r>
+              <a:rPr lang="en-US" noProof="0" dirty="0" err="1">
+                <a:solidFill>
+                  <a:schemeClr val="accent2"/>
+                </a:solidFill>
+              </a:rPr>
+              <a:t>market_price</a:t>
+            </a:r>
+            <a:r>
+              <a:rPr lang="en-US" noProof="0" dirty="0">
+                <a:solidFill>
+                  <a:schemeClr val="accent2"/>
+                </a:solidFill>
+              </a:rPr>
+              <a:t>"</a:t>
+            </a:r>
+            <a:r>
+              <a:rPr lang="en-US" noProof="0" dirty="0"/>
+              <a:t>,</a:t>
+            </a:r>
+          </a:p>
+          <a:p>
+            <a:r>
+              <a:rPr lang="en-US" noProof="0" dirty="0">
+                <a:solidFill>
+                  <a:schemeClr val="tx2">
+                    <a:lumMod val="50000"/>
+                    <a:lumOff val="50000"/>
+                  </a:schemeClr>
+                </a:solidFill>
+              </a:rPr>
+              <a:t>    overwrite</a:t>
+            </a:r>
+            <a:r>
+              <a:rPr lang="en-US" noProof="0" dirty="0"/>
+              <a:t>:</a:t>
+            </a:r>
+            <a:r>
+              <a:rPr lang="en-US" noProof="0" dirty="0">
+                <a:solidFill>
+                  <a:schemeClr val="tx2">
+                    <a:lumMod val="50000"/>
+                    <a:lumOff val="50000"/>
+                  </a:schemeClr>
+                </a:solidFill>
+              </a:rPr>
+              <a:t> </a:t>
+            </a:r>
+            <a:r>
+              <a:rPr lang="en-US" noProof="0" dirty="0">
+                <a:solidFill>
+                  <a:schemeClr val="accent3">
+                    <a:lumMod val="60000"/>
+                    <a:lumOff val="40000"/>
+                  </a:schemeClr>
+                </a:solidFill>
+              </a:rPr>
+              <a:t>bool</a:t>
+            </a:r>
+            <a:r>
+              <a:rPr lang="en-US" noProof="0" dirty="0">
+                <a:solidFill>
+                  <a:schemeClr val="tx2">
+                    <a:lumMod val="50000"/>
+                    <a:lumOff val="50000"/>
+                  </a:schemeClr>
+                </a:solidFill>
+              </a:rPr>
+              <a:t> </a:t>
+            </a:r>
+            <a:r>
+              <a:rPr lang="en-US" noProof="0" dirty="0"/>
+              <a:t>=</a:t>
+            </a:r>
+            <a:r>
+              <a:rPr lang="en-US" noProof="0" dirty="0">
+                <a:solidFill>
+                  <a:schemeClr val="tx2">
+                    <a:lumMod val="50000"/>
+                    <a:lumOff val="50000"/>
+                  </a:schemeClr>
+                </a:solidFill>
+              </a:rPr>
+              <a:t> True</a:t>
+            </a:r>
+            <a:r>
+              <a:rPr lang="en-US" noProof="0" dirty="0"/>
+              <a:t>,</a:t>
+            </a:r>
+          </a:p>
+          <a:p>
+            <a:r>
+              <a:rPr lang="en-US" noProof="0" dirty="0">
+                <a:solidFill>
+                  <a:schemeClr val="tx2">
+                    <a:lumMod val="50000"/>
+                    <a:lumOff val="50000"/>
+                  </a:schemeClr>
+                </a:solidFill>
+              </a:rPr>
+              <a:t>    strict</a:t>
+            </a:r>
+            <a:r>
+              <a:rPr lang="en-US" noProof="0" dirty="0"/>
+              <a:t>:</a:t>
+            </a:r>
+            <a:r>
+              <a:rPr lang="en-US" noProof="0" dirty="0">
+                <a:solidFill>
+                  <a:schemeClr val="tx2">
+                    <a:lumMod val="50000"/>
+                    <a:lumOff val="50000"/>
+                  </a:schemeClr>
+                </a:solidFill>
+              </a:rPr>
+              <a:t> </a:t>
+            </a:r>
+            <a:r>
+              <a:rPr lang="en-US" noProof="0" dirty="0">
+                <a:solidFill>
+                  <a:schemeClr val="accent3">
+                    <a:lumMod val="60000"/>
+                    <a:lumOff val="40000"/>
+                  </a:schemeClr>
+                </a:solidFill>
+              </a:rPr>
+              <a:t>bool</a:t>
+            </a:r>
+            <a:r>
+              <a:rPr lang="en-US" noProof="0" dirty="0">
+                <a:solidFill>
+                  <a:schemeClr val="tx2">
+                    <a:lumMod val="50000"/>
+                    <a:lumOff val="50000"/>
+                  </a:schemeClr>
+                </a:solidFill>
+              </a:rPr>
+              <a:t> </a:t>
+            </a:r>
+            <a:r>
+              <a:rPr lang="en-US" noProof="0" dirty="0"/>
+              <a:t>=</a:t>
+            </a:r>
+            <a:r>
+              <a:rPr lang="en-US" noProof="0" dirty="0">
+                <a:solidFill>
+                  <a:schemeClr val="tx2">
+                    <a:lumMod val="50000"/>
+                    <a:lumOff val="50000"/>
+                  </a:schemeClr>
+                </a:solidFill>
+              </a:rPr>
+              <a:t> True</a:t>
+            </a:r>
+            <a:r>
+              <a:rPr lang="en-US" noProof="0" dirty="0"/>
+              <a:t>,</a:t>
+            </a:r>
+          </a:p>
+          <a:p>
+            <a:r>
+              <a:rPr lang="en-US" noProof="0" dirty="0">
+                <a:solidFill>
+                  <a:srgbClr val="FFFF00"/>
+                </a:solidFill>
+              </a:rPr>
+              <a:t>)</a:t>
+            </a:r>
+          </a:p>
+        </p:txBody>
+      </p:sp>
+      <p:sp>
+        <p:nvSpPr>
+          <p:cNvPr id="56" name="TextBox 55">
+            <a:extLst>
+              <a:ext uri="{FF2B5EF4-FFF2-40B4-BE49-F238E27FC236}">
+                <a16:creationId xmlns:a16="http://schemas.microsoft.com/office/drawing/2014/main" id="{C408D5EF-7D93-DE21-BE38-9AE9DB2C2984}"/>
+              </a:ext>
+            </a:extLst>
+          </p:cNvPr>
+          <p:cNvSpPr txBox="1"/>
+          <p:nvPr/>
+        </p:nvSpPr>
+        <p:spPr>
+          <a:xfrm>
+            <a:off x="6062772" y="1414130"/>
+            <a:ext cx="1596392" cy="369332"/>
+          </a:xfrm>
+          <a:prstGeom prst="rect">
+            <a:avLst/>
+          </a:prstGeom>
+          <a:noFill/>
+        </p:spPr>
+        <p:txBody>
+          <a:bodyPr wrap="square" rtlCol="0">
+            <a:spAutoFit/>
+          </a:bodyPr>
+          <a:lstStyle/>
+          <a:p>
+            <a:r>
+              <a:rPr lang="en-US" noProof="0">
+                <a:solidFill>
+                  <a:schemeClr val="tx2">
+                    <a:lumMod val="50000"/>
+                    <a:lumOff val="50000"/>
+                  </a:schemeClr>
+                </a:solidFill>
+              </a:rPr>
+              <a:t>price_data</a:t>
+            </a:r>
+            <a:r>
+              <a:rPr lang="en-US" noProof="0" dirty="0">
+                <a:solidFill>
+                  <a:schemeClr val="tx2">
+                    <a:lumMod val="50000"/>
+                    <a:lumOff val="50000"/>
+                  </a:schemeClr>
+                </a:solidFill>
+              </a:rPr>
+              <a:t>:</a:t>
             </a:r>
           </a:p>
         </p:txBody>
@@ -15308,7 +17883,7 @@
           <a:bodyPr/>
           <a:lstStyle/>
           <a:p>
-            <a:endParaRPr lang="en-US"/>
+            <a:endParaRPr lang="en-US" noProof="0" dirty="0"/>
           </a:p>
         </p:txBody>
       </p:sp>
@@ -15350,7 +17925,7 @@
           <a:bodyPr/>
           <a:lstStyle/>
           <a:p>
-            <a:endParaRPr lang="en-US"/>
+            <a:endParaRPr lang="en-US" noProof="0" dirty="0"/>
           </a:p>
         </p:txBody>
       </p:sp>
@@ -15405,7 +17980,7 @@
               </a:defRPr>
             </a:pPr>
             <a:r>
-              <a:rPr sz="900" b="1">
+              <a:rPr lang="en-US" sz="1200" b="1" noProof="0" dirty="0">
                 <a:solidFill>
                   <a:srgbClr val="1E4D51"/>
                 </a:solidFill>
@@ -15469,7 +18044,7 @@
               </a:defRPr>
             </a:pPr>
             <a:r>
-              <a:rPr sz="2550" b="1">
+              <a:rPr lang="en-US" sz="2550" b="1" noProof="0" dirty="0">
                 <a:solidFill>
                   <a:srgbClr val="182225"/>
                 </a:solidFill>
@@ -15520,7 +18095,7 @@
           <a:bodyPr/>
           <a:lstStyle/>
           <a:p>
-            <a:endParaRPr lang="en-US"/>
+            <a:endParaRPr lang="en-US" noProof="0" dirty="0"/>
           </a:p>
         </p:txBody>
       </p:sp>
@@ -15575,7 +18150,7 @@
               </a:defRPr>
             </a:pPr>
             <a:r>
-              <a:rPr sz="750" b="0">
+              <a:rPr lang="en-US" sz="750" b="0" noProof="0" dirty="0">
                 <a:solidFill>
                   <a:srgbClr val="5E7380"/>
                 </a:solidFill>
@@ -15639,7 +18214,7 @@
               </a:defRPr>
             </a:pPr>
             <a:r>
-              <a:rPr sz="825" b="0">
+              <a:rPr lang="en-US" sz="825" b="0" noProof="0" dirty="0">
                 <a:solidFill>
                   <a:srgbClr val="5E7380"/>
                 </a:solidFill>
@@ -15688,7 +18263,7 @@
           <a:bodyPr/>
           <a:lstStyle/>
           <a:p>
-            <a:endParaRPr lang="en-US"/>
+            <a:endParaRPr lang="en-US" noProof="0" dirty="0"/>
           </a:p>
         </p:txBody>
       </p:sp>
@@ -15730,7 +18305,7 @@
           <a:bodyPr/>
           <a:lstStyle/>
           <a:p>
-            <a:endParaRPr lang="en-US"/>
+            <a:endParaRPr lang="en-US" noProof="0" dirty="0"/>
           </a:p>
         </p:txBody>
       </p:sp>
@@ -15785,7 +18360,7 @@
               </a:defRPr>
             </a:pPr>
             <a:r>
-              <a:rPr sz="1125" b="1">
+              <a:rPr lang="en-US" sz="1125" b="1" noProof="0" dirty="0">
                 <a:solidFill>
                   <a:srgbClr val="182225"/>
                 </a:solidFill>
@@ -15838,7 +18413,7 @@
           <a:bodyPr lIns="0" tIns="0" rIns="0" bIns="0" anchor="t"/>
           <a:lstStyle/>
           <a:p>
-            <a:pPr algn="l">
+            <a:pPr>
               <a:defRPr sz="900" b="0">
                 <a:solidFill>
                   <a:srgbClr val="5E7380"/>
@@ -15849,7 +18424,7 @@
               </a:defRPr>
             </a:pPr>
             <a:r>
-              <a:rPr sz="900" b="0">
+              <a:rPr lang="en-US" sz="900" dirty="0">
                 <a:solidFill>
                   <a:srgbClr val="5E7380"/>
                 </a:solidFill>
@@ -15857,8 +18432,16 @@
                 <a:ea typeface="Aptos"/>
                 <a:cs typeface="Aptos"/>
               </a:rPr>
-              <a:t>external background consumption only</a:t>
-            </a:r>
+              <a:t>detect cost-relevant intermediate flows</a:t>
+            </a:r>
+            <a:endParaRPr lang="en-US" sz="900" b="0" noProof="0" dirty="0">
+              <a:solidFill>
+                <a:srgbClr val="5E7380"/>
+              </a:solidFill>
+              <a:latin typeface="Aptos"/>
+              <a:ea typeface="Aptos"/>
+              <a:cs typeface="Aptos"/>
+            </a:endParaRPr>
           </a:p>
         </p:txBody>
       </p:sp>
@@ -15913,7 +18496,7 @@
               </a:defRPr>
             </a:pPr>
             <a:r>
-              <a:rPr sz="1950" b="1">
+              <a:rPr lang="en-US" sz="1950" b="1" noProof="0" dirty="0">
                 <a:solidFill>
                   <a:srgbClr val="2D6F73"/>
                 </a:solidFill>
@@ -15962,7 +18545,7 @@
           <a:bodyPr/>
           <a:lstStyle/>
           <a:p>
-            <a:endParaRPr lang="en-US"/>
+            <a:endParaRPr lang="en-US" noProof="0" dirty="0"/>
           </a:p>
         </p:txBody>
       </p:sp>
@@ -16004,7 +18587,7 @@
           <a:bodyPr/>
           <a:lstStyle/>
           <a:p>
-            <a:endParaRPr lang="en-US"/>
+            <a:endParaRPr lang="en-US" noProof="0" dirty="0"/>
           </a:p>
         </p:txBody>
       </p:sp>
@@ -16059,7 +18642,7 @@
               </a:defRPr>
             </a:pPr>
             <a:r>
-              <a:rPr sz="1125" b="1">
+              <a:rPr lang="en-US" sz="1125" b="1" noProof="0" dirty="0">
                 <a:solidFill>
                   <a:srgbClr val="182225"/>
                 </a:solidFill>
@@ -16123,7 +18706,7 @@
               </a:defRPr>
             </a:pPr>
             <a:r>
-              <a:rPr sz="900" b="0">
+              <a:rPr lang="en-US" sz="900" b="0" noProof="0" dirty="0">
                 <a:solidFill>
                   <a:srgbClr val="5E7380"/>
                 </a:solidFill>
@@ -16131,7 +18714,28 @@
                 <a:ea typeface="Aptos"/>
                 <a:cs typeface="Aptos"/>
               </a:rPr>
-              <a:t>operation=True -&gt; op; otherwise -&gt; cap</a:t>
+              <a:t>operation=True -&gt; op; </a:t>
+            </a:r>
+            <a:br>
+              <a:rPr lang="en-US" sz="900" b="0" noProof="0" dirty="0">
+                <a:solidFill>
+                  <a:srgbClr val="5E7380"/>
+                </a:solidFill>
+                <a:latin typeface="Aptos"/>
+                <a:ea typeface="Aptos"/>
+                <a:cs typeface="Aptos"/>
+              </a:rPr>
+            </a:br>
+            <a:r>
+              <a:rPr lang="en-US" sz="900" b="0" noProof="0" dirty="0">
+                <a:solidFill>
+                  <a:srgbClr val="5E7380"/>
+                </a:solidFill>
+                <a:latin typeface="Aptos"/>
+                <a:ea typeface="Aptos"/>
+                <a:cs typeface="Aptos"/>
+              </a:rPr>
+              <a:t>otherwise -&gt; cap</a:t>
             </a:r>
           </a:p>
         </p:txBody>
@@ -16187,7 +18791,7 @@
               </a:defRPr>
             </a:pPr>
             <a:r>
-              <a:rPr sz="1950" b="1">
+              <a:rPr lang="en-US" sz="1950" b="1" noProof="0" dirty="0">
                 <a:solidFill>
                   <a:srgbClr val="2D6F73"/>
                 </a:solidFill>
@@ -16236,7 +18840,7 @@
           <a:bodyPr/>
           <a:lstStyle/>
           <a:p>
-            <a:endParaRPr lang="en-US"/>
+            <a:endParaRPr lang="en-US" noProof="0" dirty="0"/>
           </a:p>
         </p:txBody>
       </p:sp>
@@ -16278,7 +18882,7 @@
           <a:bodyPr/>
           <a:lstStyle/>
           <a:p>
-            <a:endParaRPr lang="en-US"/>
+            <a:endParaRPr lang="en-US" noProof="0" dirty="0"/>
           </a:p>
         </p:txBody>
       </p:sp>
@@ -16333,7 +18937,7 @@
               </a:defRPr>
             </a:pPr>
             <a:r>
-              <a:rPr sz="1125" b="1">
+              <a:rPr lang="en-US" sz="1125" b="1" noProof="0" dirty="0">
                 <a:solidFill>
                   <a:srgbClr val="182225"/>
                 </a:solidFill>
@@ -16397,7 +19001,7 @@
               </a:defRPr>
             </a:pPr>
             <a:r>
-              <a:rPr sz="900" b="0">
+              <a:rPr lang="en-US" sz="900" b="0" noProof="0" dirty="0" err="1">
                 <a:solidFill>
                   <a:srgbClr val="5E7380"/>
                 </a:solidFill>
@@ -16405,7 +19009,18 @@
                 <a:ea typeface="Aptos"/>
                 <a:cs typeface="Aptos"/>
               </a:rPr>
-              <a:t>market_price from each background DB</a:t>
+              <a:t>market_price</a:t>
+            </a:r>
+            <a:r>
+              <a:rPr lang="en-US" sz="900" b="0" noProof="0" dirty="0">
+                <a:solidFill>
+                  <a:srgbClr val="5E7380"/>
+                </a:solidFill>
+                <a:latin typeface="Aptos"/>
+                <a:ea typeface="Aptos"/>
+                <a:cs typeface="Aptos"/>
+              </a:rPr>
+              <a:t> from each background DB</a:t>
             </a:r>
           </a:p>
         </p:txBody>
@@ -16461,7 +19076,7 @@
               </a:defRPr>
             </a:pPr>
             <a:r>
-              <a:rPr sz="1950" b="1">
+              <a:rPr lang="en-US" sz="1950" b="1" noProof="0" dirty="0">
                 <a:solidFill>
                   <a:srgbClr val="2D6F73"/>
                 </a:solidFill>
@@ -16510,7 +19125,7 @@
           <a:bodyPr/>
           <a:lstStyle/>
           <a:p>
-            <a:endParaRPr lang="en-US"/>
+            <a:endParaRPr lang="en-US" noProof="0" dirty="0"/>
           </a:p>
         </p:txBody>
       </p:sp>
@@ -16552,7 +19167,7 @@
           <a:bodyPr/>
           <a:lstStyle/>
           <a:p>
-            <a:endParaRPr lang="en-US"/>
+            <a:endParaRPr lang="en-US" noProof="0" dirty="0"/>
           </a:p>
         </p:txBody>
       </p:sp>
@@ -16607,7 +19222,7 @@
               </a:defRPr>
             </a:pPr>
             <a:r>
-              <a:rPr sz="1125" b="1">
+              <a:rPr lang="en-US" sz="1125" b="1" noProof="0" dirty="0">
                 <a:solidFill>
                   <a:srgbClr val="182225"/>
                 </a:solidFill>
@@ -16671,7 +19286,7 @@
               </a:defRPr>
             </a:pPr>
             <a:r>
-              <a:rPr sz="900" b="0">
+              <a:rPr lang="en-US" sz="900" b="0" noProof="0" dirty="0">
                 <a:solidFill>
                   <a:srgbClr val="5E7380"/>
                 </a:solidFill>
@@ -16720,7 +19335,7 @@
           <a:bodyPr/>
           <a:lstStyle/>
           <a:p>
-            <a:endParaRPr lang="en-US"/>
+            <a:endParaRPr lang="en-US" noProof="0" dirty="0"/>
           </a:p>
         </p:txBody>
       </p:sp>
@@ -16740,8 +19355,8 @@
         </p:nvSpPr>
         <p:spPr>
           <a:xfrm>
-            <a:off x="1162050" y="4343400"/>
-            <a:ext cx="3714750" cy="247650"/>
+            <a:off x="1162049" y="4343400"/>
+            <a:ext cx="4079801" cy="266700"/>
           </a:xfrm>
           <a:prstGeom prst="rect">
             <a:avLst/>
@@ -16775,7 +19390,7 @@
               </a:defRPr>
             </a:pPr>
             <a:r>
-              <a:rPr sz="1425" b="0">
+              <a:rPr lang="en-US" sz="1425" b="0" noProof="0" dirty="0">
                 <a:solidFill>
                   <a:srgbClr val="1E4D51"/>
                 </a:solidFill>
@@ -16839,7 +19454,7 @@
               </a:defRPr>
             </a:pPr>
             <a:r>
-              <a:rPr sz="1125" b="0">
+              <a:rPr lang="en-US" sz="1125" b="0" noProof="0" dirty="0">
                 <a:solidFill>
                   <a:srgbClr val="5E7380"/>
                 </a:solidFill>
@@ -16888,7 +19503,7 @@
           <a:bodyPr/>
           <a:lstStyle/>
           <a:p>
-            <a:endParaRPr lang="en-US"/>
+            <a:endParaRPr lang="en-US" noProof="0" dirty="0"/>
           </a:p>
         </p:txBody>
       </p:sp>
@@ -16909,7 +19524,7 @@
         <p:spPr>
           <a:xfrm>
             <a:off x="6953250" y="4343400"/>
-            <a:ext cx="3714750" cy="247650"/>
+            <a:ext cx="3905250" cy="266700"/>
           </a:xfrm>
           <a:prstGeom prst="rect">
             <a:avLst/>
@@ -16943,7 +19558,7 @@
               </a:defRPr>
             </a:pPr>
             <a:r>
-              <a:rPr sz="1425" b="0">
+              <a:rPr lang="en-US" sz="1425" b="0" noProof="0" dirty="0">
                 <a:solidFill>
                   <a:srgbClr val="A65F3B"/>
                 </a:solidFill>
@@ -17007,7 +19622,7 @@
               </a:defRPr>
             </a:pPr>
             <a:r>
-              <a:rPr sz="1125" b="0">
+              <a:rPr lang="en-US" sz="1125" b="0" noProof="0" dirty="0">
                 <a:solidFill>
                   <a:srgbClr val="5E7380"/>
                 </a:solidFill>
@@ -17071,15 +19686,37 @@
               </a:defRPr>
             </a:pPr>
             <a:r>
-              <a:rPr sz="1350" b="0">
-                <a:solidFill>
-                  <a:srgbClr val="182225"/>
-                </a:solidFill>
-                <a:latin typeface="Aptos"/>
-                <a:ea typeface="Aptos"/>
-                <a:cs typeface="Aptos"/>
-              </a:rPr>
-              <a:t>Missing market_price is warned because otherwise the input becomes cost-free.</a:t>
+              <a:rPr lang="en-US" sz="1350" b="0" noProof="0" dirty="0">
+                <a:solidFill>
+                  <a:srgbClr val="182225"/>
+                </a:solidFill>
+                <a:latin typeface="Aptos"/>
+                <a:ea typeface="Aptos"/>
+                <a:cs typeface="Aptos"/>
+              </a:rPr>
+              <a:t>Missing </a:t>
+            </a:r>
+            <a:r>
+              <a:rPr lang="en-US" sz="1350" b="0" noProof="0" dirty="0" err="1">
+                <a:solidFill>
+                  <a:srgbClr val="182225"/>
+                </a:solidFill>
+                <a:latin typeface="Aptos"/>
+                <a:ea typeface="Aptos"/>
+                <a:cs typeface="Aptos"/>
+              </a:rPr>
+              <a:t>market_price</a:t>
+            </a:r>
+            <a:r>
+              <a:rPr lang="en-US" sz="1350" b="0" noProof="0" dirty="0">
+                <a:solidFill>
+                  <a:srgbClr val="182225"/>
+                </a:solidFill>
+                <a:latin typeface="Aptos"/>
+                <a:ea typeface="Aptos"/>
+                <a:cs typeface="Aptos"/>
+              </a:rPr>
+              <a:t> is warned because otherwise the input becomes cost-free.</a:t>
             </a:r>
           </a:p>
         </p:txBody>
@@ -17152,7 +19789,7 @@
           <a:bodyPr/>
           <a:lstStyle/>
           <a:p>
-            <a:endParaRPr lang="en-US"/>
+            <a:endParaRPr lang="en-US" noProof="0" dirty="0"/>
           </a:p>
         </p:txBody>
       </p:sp>
@@ -17194,7 +19831,7 @@
           <a:bodyPr/>
           <a:lstStyle/>
           <a:p>
-            <a:endParaRPr lang="en-US"/>
+            <a:endParaRPr lang="en-US" noProof="0" dirty="0"/>
           </a:p>
         </p:txBody>
       </p:sp>
@@ -17249,7 +19886,7 @@
               </a:defRPr>
             </a:pPr>
             <a:r>
-              <a:rPr sz="900" b="1">
+              <a:rPr lang="en-US" sz="1200" b="1" noProof="0" dirty="0">
                 <a:solidFill>
                   <a:srgbClr val="1E4D51"/>
                 </a:solidFill>
@@ -17313,7 +19950,7 @@
               </a:defRPr>
             </a:pPr>
             <a:r>
-              <a:rPr sz="2550" b="1">
+              <a:rPr lang="en-US" sz="2550" b="1" noProof="0" dirty="0">
                 <a:solidFill>
                   <a:srgbClr val="182225"/>
                 </a:solidFill>
@@ -17321,7 +19958,7 @@
                 <a:ea typeface="Aptos Display"/>
                 <a:cs typeface="Aptos Display"/>
               </a:rPr>
-              <a:t>The converter now carries economic data through validation and persistence.</a:t>
+              <a:t>The converter now carries economic data through validation and serialization.</a:t>
             </a:r>
           </a:p>
         </p:txBody>
@@ -17364,7 +20001,7 @@
           <a:bodyPr/>
           <a:lstStyle/>
           <a:p>
-            <a:endParaRPr lang="en-US"/>
+            <a:endParaRPr lang="en-US" noProof="0" dirty="0"/>
           </a:p>
         </p:txBody>
       </p:sp>
@@ -17419,7 +20056,7 @@
               </a:defRPr>
             </a:pPr>
             <a:r>
-              <a:rPr sz="750" b="0">
+              <a:rPr lang="en-US" sz="750" b="0" noProof="0" dirty="0">
                 <a:solidFill>
                   <a:srgbClr val="5E7380"/>
                 </a:solidFill>
@@ -17483,7 +20120,7 @@
               </a:defRPr>
             </a:pPr>
             <a:r>
-              <a:rPr sz="825" b="0">
+              <a:rPr lang="en-US" sz="825" b="0" noProof="0" dirty="0">
                 <a:solidFill>
                   <a:srgbClr val="5E7380"/>
                 </a:solidFill>
@@ -17532,7 +20169,7 @@
           <a:bodyPr/>
           <a:lstStyle/>
           <a:p>
-            <a:endParaRPr lang="en-US"/>
+            <a:endParaRPr lang="en-US" noProof="0" dirty="0"/>
           </a:p>
         </p:txBody>
       </p:sp>
@@ -17587,7 +20224,7 @@
               </a:defRPr>
             </a:pPr>
             <a:r>
-              <a:rPr sz="975" b="1">
+              <a:rPr lang="en-US" sz="975" b="1" noProof="0" dirty="0" err="1">
                 <a:solidFill>
                   <a:srgbClr val="1E4D51"/>
                 </a:solidFill>
@@ -17595,7 +20232,18 @@
                 <a:ea typeface="Aptos"/>
                 <a:cs typeface="Aptos"/>
               </a:rPr>
-              <a:t>OptimizationModelInputs field</a:t>
+              <a:t>OptimizationModelInputs</a:t>
+            </a:r>
+            <a:r>
+              <a:rPr lang="en-US" sz="975" b="1" noProof="0" dirty="0">
+                <a:solidFill>
+                  <a:srgbClr val="1E4D51"/>
+                </a:solidFill>
+                <a:latin typeface="Aptos"/>
+                <a:ea typeface="Aptos"/>
+                <a:cs typeface="Aptos"/>
+              </a:rPr>
+              <a:t> field</a:t>
             </a:r>
           </a:p>
         </p:txBody>
@@ -17636,7 +20284,7 @@
           <a:bodyPr/>
           <a:lstStyle/>
           <a:p>
-            <a:endParaRPr lang="en-US"/>
+            <a:endParaRPr lang="en-US" noProof="0" dirty="0"/>
           </a:p>
         </p:txBody>
       </p:sp>
@@ -17691,7 +20339,7 @@
               </a:defRPr>
             </a:pPr>
             <a:r>
-              <a:rPr sz="975" b="1">
+              <a:rPr lang="en-US" sz="975" b="1" noProof="0" dirty="0">
                 <a:solidFill>
                   <a:srgbClr val="1E4D51"/>
                 </a:solidFill>
@@ -17740,7 +20388,7 @@
           <a:bodyPr/>
           <a:lstStyle/>
           <a:p>
-            <a:endParaRPr lang="en-US"/>
+            <a:endParaRPr lang="en-US" noProof="0" dirty="0"/>
           </a:p>
         </p:txBody>
       </p:sp>
@@ -17795,7 +20443,7 @@
               </a:defRPr>
             </a:pPr>
             <a:r>
-              <a:rPr sz="1050" b="1">
+              <a:rPr lang="en-US" sz="1050" b="1" noProof="0" dirty="0">
                 <a:solidFill>
                   <a:srgbClr val="182225"/>
                 </a:solidFill>
@@ -17844,7 +20492,7 @@
           <a:bodyPr/>
           <a:lstStyle/>
           <a:p>
-            <a:endParaRPr lang="en-US"/>
+            <a:endParaRPr lang="en-US" noProof="0" dirty="0"/>
           </a:p>
         </p:txBody>
       </p:sp>
@@ -17899,7 +20547,7 @@
               </a:defRPr>
             </a:pPr>
             <a:r>
-              <a:rPr sz="1050" b="0">
+              <a:rPr lang="en-US" sz="1050" b="0" noProof="0" dirty="0">
                 <a:solidFill>
                   <a:srgbClr val="182225"/>
                 </a:solidFill>
@@ -17948,7 +20596,7 @@
           <a:bodyPr/>
           <a:lstStyle/>
           <a:p>
-            <a:endParaRPr lang="en-US"/>
+            <a:endParaRPr lang="en-US" noProof="0" dirty="0"/>
           </a:p>
         </p:txBody>
       </p:sp>
@@ -18003,7 +20651,7 @@
               </a:defRPr>
             </a:pPr>
             <a:r>
-              <a:rPr sz="1050" b="1">
+              <a:rPr lang="en-US" sz="1050" b="1" noProof="0" dirty="0">
                 <a:solidFill>
                   <a:srgbClr val="182225"/>
                 </a:solidFill>
@@ -18052,7 +20700,7 @@
           <a:bodyPr/>
           <a:lstStyle/>
           <a:p>
-            <a:endParaRPr lang="en-US"/>
+            <a:endParaRPr lang="en-US" noProof="0" dirty="0"/>
           </a:p>
         </p:txBody>
       </p:sp>
@@ -18107,7 +20755,7 @@
               </a:defRPr>
             </a:pPr>
             <a:r>
-              <a:rPr sz="1050" b="0">
+              <a:rPr lang="en-US" sz="1050" b="0" noProof="0" dirty="0">
                 <a:solidFill>
                   <a:srgbClr val="182225"/>
                 </a:solidFill>
@@ -18156,7 +20804,7 @@
           <a:bodyPr/>
           <a:lstStyle/>
           <a:p>
-            <a:endParaRPr lang="en-US"/>
+            <a:endParaRPr lang="en-US" noProof="0" dirty="0"/>
           </a:p>
         </p:txBody>
       </p:sp>
@@ -18211,7 +20859,7 @@
               </a:defRPr>
             </a:pPr>
             <a:r>
-              <a:rPr sz="1050" b="1">
+              <a:rPr lang="en-US" sz="1050" b="1" noProof="0" dirty="0" err="1">
                 <a:solidFill>
                   <a:srgbClr val="182225"/>
                 </a:solidFill>
@@ -18221,6 +20869,14 @@
               </a:rPr>
               <a:t>discount_rate</a:t>
             </a:r>
+            <a:endParaRPr lang="en-US" sz="1050" b="1" noProof="0" dirty="0">
+              <a:solidFill>
+                <a:srgbClr val="182225"/>
+              </a:solidFill>
+              <a:latin typeface="Aptos Mono"/>
+              <a:ea typeface="Aptos Mono"/>
+              <a:cs typeface="Aptos Mono"/>
+            </a:endParaRPr>
           </a:p>
         </p:txBody>
       </p:sp>
@@ -18260,7 +20916,7 @@
           <a:bodyPr/>
           <a:lstStyle/>
           <a:p>
-            <a:endParaRPr lang="en-US"/>
+            <a:endParaRPr lang="en-US" noProof="0" dirty="0"/>
           </a:p>
         </p:txBody>
       </p:sp>
@@ -18315,7 +20971,7 @@
               </a:defRPr>
             </a:pPr>
             <a:r>
-              <a:rPr sz="1050" b="0">
+              <a:rPr lang="en-US" sz="1050" b="0" noProof="0" dirty="0">
                 <a:solidFill>
                   <a:srgbClr val="182225"/>
                 </a:solidFill>
@@ -18364,7 +21020,7 @@
           <a:bodyPr/>
           <a:lstStyle/>
           <a:p>
-            <a:endParaRPr lang="en-US"/>
+            <a:endParaRPr lang="en-US" noProof="0" dirty="0"/>
           </a:p>
         </p:txBody>
       </p:sp>
@@ -18419,7 +21075,7 @@
               </a:defRPr>
             </a:pPr>
             <a:r>
-              <a:rPr sz="1050" b="1">
+              <a:rPr lang="en-US" sz="1050" b="1" noProof="0" dirty="0" err="1">
                 <a:solidFill>
                   <a:srgbClr val="182225"/>
                 </a:solidFill>
@@ -18429,6 +21085,14 @@
               </a:rPr>
               <a:t>discount_reference_year</a:t>
             </a:r>
+            <a:endParaRPr lang="en-US" sz="1050" b="1" noProof="0" dirty="0">
+              <a:solidFill>
+                <a:srgbClr val="182225"/>
+              </a:solidFill>
+              <a:latin typeface="Aptos Mono"/>
+              <a:ea typeface="Aptos Mono"/>
+              <a:cs typeface="Aptos Mono"/>
+            </a:endParaRPr>
           </a:p>
         </p:txBody>
       </p:sp>
@@ -18468,7 +21132,7 @@
           <a:bodyPr/>
           <a:lstStyle/>
           <a:p>
-            <a:endParaRPr lang="en-US"/>
+            <a:endParaRPr lang="en-US" noProof="0" dirty="0"/>
           </a:p>
         </p:txBody>
       </p:sp>
@@ -18523,7 +21187,7 @@
               </a:defRPr>
             </a:pPr>
             <a:r>
-              <a:rPr sz="1050" b="0">
+              <a:rPr lang="en-US" sz="1050" b="0" noProof="0" dirty="0">
                 <a:solidFill>
                   <a:srgbClr val="182225"/>
                 </a:solidFill>
@@ -18572,7 +21236,7 @@
           <a:bodyPr/>
           <a:lstStyle/>
           <a:p>
-            <a:endParaRPr lang="en-US"/>
+            <a:endParaRPr lang="en-US" noProof="0" dirty="0"/>
           </a:p>
         </p:txBody>
       </p:sp>
@@ -18627,7 +21291,7 @@
               </a:defRPr>
             </a:pPr>
             <a:r>
-              <a:rPr sz="1575" b="1">
+              <a:rPr lang="en-US" sz="1575" b="1" noProof="0" dirty="0">
                 <a:solidFill>
                   <a:srgbClr val="1E4D51"/>
                 </a:solidFill>
@@ -18678,7 +21342,7 @@
           <a:bodyPr/>
           <a:lstStyle/>
           <a:p>
-            <a:endParaRPr lang="en-US"/>
+            <a:endParaRPr lang="en-US" noProof="0" dirty="0"/>
           </a:p>
         </p:txBody>
       </p:sp>
@@ -18698,7 +21362,7 @@
         </p:nvSpPr>
         <p:spPr>
           <a:xfrm>
-            <a:off x="8724900" y="2895600"/>
+            <a:off x="8724900" y="2831802"/>
             <a:ext cx="1905000" cy="342900"/>
           </a:xfrm>
           <a:prstGeom prst="rect">
@@ -18733,7 +21397,7 @@
               </a:defRPr>
             </a:pPr>
             <a:r>
-              <a:rPr sz="975" b="0">
+              <a:rPr lang="en-US" sz="975" b="0" noProof="0" dirty="0">
                 <a:solidFill>
                   <a:srgbClr val="182225"/>
                 </a:solidFill>
@@ -18784,7 +21448,7 @@
           <a:bodyPr/>
           <a:lstStyle/>
           <a:p>
-            <a:endParaRPr lang="en-US"/>
+            <a:endParaRPr lang="en-US" noProof="0" dirty="0"/>
           </a:p>
         </p:txBody>
       </p:sp>
@@ -18804,8 +21468,8 @@
         </p:nvSpPr>
         <p:spPr>
           <a:xfrm>
-            <a:off x="8724900" y="3276600"/>
-            <a:ext cx="1905000" cy="342900"/>
+            <a:off x="8724899" y="3319132"/>
+            <a:ext cx="1924047" cy="247650"/>
           </a:xfrm>
           <a:prstGeom prst="rect">
             <a:avLst/>
@@ -18839,15 +21503,37 @@
               </a:defRPr>
             </a:pPr>
             <a:r>
-              <a:rPr sz="975" b="0">
-                <a:solidFill>
-                  <a:srgbClr val="182225"/>
-                </a:solidFill>
-                <a:latin typeface="Aptos"/>
-                <a:ea typeface="Aptos"/>
-                <a:cs typeface="Aptos"/>
-              </a:rPr>
-              <a:t>negative discount_rate rejected</a:t>
+              <a:rPr lang="en-US" sz="975" b="0" noProof="0" dirty="0">
+                <a:solidFill>
+                  <a:srgbClr val="182225"/>
+                </a:solidFill>
+                <a:latin typeface="Aptos"/>
+                <a:ea typeface="Aptos"/>
+                <a:cs typeface="Aptos"/>
+              </a:rPr>
+              <a:t>negative </a:t>
+            </a:r>
+            <a:r>
+              <a:rPr lang="en-US" sz="975" b="0" noProof="0" dirty="0" err="1">
+                <a:solidFill>
+                  <a:srgbClr val="182225"/>
+                </a:solidFill>
+                <a:latin typeface="Aptos"/>
+                <a:ea typeface="Aptos"/>
+                <a:cs typeface="Aptos"/>
+              </a:rPr>
+              <a:t>discount_rate</a:t>
+            </a:r>
+            <a:r>
+              <a:rPr lang="en-US" sz="975" b="0" noProof="0" dirty="0">
+                <a:solidFill>
+                  <a:srgbClr val="182225"/>
+                </a:solidFill>
+                <a:latin typeface="Aptos"/>
+                <a:ea typeface="Aptos"/>
+                <a:cs typeface="Aptos"/>
+              </a:rPr>
+              <a:t> rejected</a:t>
             </a:r>
           </a:p>
         </p:txBody>
@@ -18890,7 +21576,7 @@
           <a:bodyPr/>
           <a:lstStyle/>
           <a:p>
-            <a:endParaRPr lang="en-US"/>
+            <a:endParaRPr lang="en-US" noProof="0" dirty="0"/>
           </a:p>
         </p:txBody>
       </p:sp>
@@ -18945,15 +21631,26 @@
               </a:defRPr>
             </a:pPr>
             <a:r>
-              <a:rPr sz="975" b="0">
-                <a:solidFill>
-                  <a:srgbClr val="182225"/>
-                </a:solidFill>
-                <a:latin typeface="Aptos"/>
-                <a:ea typeface="Aptos"/>
-                <a:cs typeface="Aptos"/>
-              </a:rPr>
-              <a:t>parse_from_lca_processor copies cap/op dictionaries</a:t>
+              <a:rPr lang="en-US" sz="975" b="0" noProof="0" dirty="0" err="1">
+                <a:solidFill>
+                  <a:srgbClr val="182225"/>
+                </a:solidFill>
+                <a:latin typeface="Aptos"/>
+                <a:ea typeface="Aptos"/>
+                <a:cs typeface="Aptos"/>
+              </a:rPr>
+              <a:t>parse_from_lca_processor</a:t>
+            </a:r>
+            <a:r>
+              <a:rPr lang="en-US" sz="975" b="0" noProof="0" dirty="0">
+                <a:solidFill>
+                  <a:srgbClr val="182225"/>
+                </a:solidFill>
+                <a:latin typeface="Aptos"/>
+                <a:ea typeface="Aptos"/>
+                <a:cs typeface="Aptos"/>
+              </a:rPr>
+              <a:t> copies cap/op dictionaries</a:t>
             </a:r>
           </a:p>
         </p:txBody>
@@ -18996,7 +21693,7 @@
           <a:bodyPr/>
           <a:lstStyle/>
           <a:p>
-            <a:endParaRPr lang="en-US"/>
+            <a:endParaRPr lang="en-US" noProof="0" dirty="0"/>
           </a:p>
         </p:txBody>
       </p:sp>
@@ -19051,7 +21748,7 @@
               </a:defRPr>
             </a:pPr>
             <a:r>
-              <a:rPr sz="975" b="0">
+              <a:rPr lang="en-US" sz="975" b="0" noProof="0" dirty="0">
                 <a:solidFill>
                   <a:srgbClr val="182225"/>
                 </a:solidFill>
@@ -19115,7 +21812,7 @@
               </a:defRPr>
             </a:pPr>
             <a:r>
-              <a:rPr sz="1350" b="0">
+              <a:rPr lang="en-US" sz="1350" b="0" noProof="0" dirty="0">
                 <a:solidFill>
                   <a:srgbClr val="182225"/>
                 </a:solidFill>
@@ -19196,7 +21893,7 @@
           <a:bodyPr/>
           <a:lstStyle/>
           <a:p>
-            <a:endParaRPr lang="en-US"/>
+            <a:endParaRPr lang="en-US" noProof="0" dirty="0"/>
           </a:p>
         </p:txBody>
       </p:sp>
@@ -19238,7 +21935,7 @@
           <a:bodyPr/>
           <a:lstStyle/>
           <a:p>
-            <a:endParaRPr lang="en-US"/>
+            <a:endParaRPr lang="en-US" noProof="0" dirty="0"/>
           </a:p>
         </p:txBody>
       </p:sp>
@@ -19293,7 +21990,7 @@
               </a:defRPr>
             </a:pPr>
             <a:r>
-              <a:rPr sz="900" b="1">
+              <a:rPr lang="en-US" sz="1200" b="1" noProof="0" dirty="0">
                 <a:solidFill>
                   <a:srgbClr val="1E4D51"/>
                 </a:solidFill>
@@ -19357,7 +22054,7 @@
               </a:defRPr>
             </a:pPr>
             <a:r>
-              <a:rPr sz="2550" b="1">
+              <a:rPr lang="en-US" sz="2550" b="1" noProof="0" dirty="0">
                 <a:solidFill>
                   <a:srgbClr val="182225"/>
                 </a:solidFill>
@@ -19365,7 +22062,40 @@
                 <a:ea typeface="Aptos Display"/>
                 <a:cs typeface="Aptos Display"/>
               </a:rPr>
-              <a:t>The model exposes direct-purchase cost expressions and an objective switch.</a:t>
+              <a:t>The </a:t>
+            </a:r>
+            <a:r>
+              <a:rPr lang="en-US" sz="2550" b="1" dirty="0" err="1">
+                <a:solidFill>
+                  <a:srgbClr val="182225"/>
+                </a:solidFill>
+                <a:latin typeface="Aptos Display"/>
+                <a:ea typeface="Aptos Display"/>
+                <a:cs typeface="Aptos Display"/>
+              </a:rPr>
+              <a:t>pyomo</a:t>
+            </a:r>
+            <a:r>
+              <a:rPr lang="en-US" sz="2550" b="1" dirty="0">
+                <a:solidFill>
+                  <a:srgbClr val="182225"/>
+                </a:solidFill>
+                <a:latin typeface="Aptos Display"/>
+                <a:ea typeface="Aptos Display"/>
+                <a:cs typeface="Aptos Display"/>
+              </a:rPr>
+              <a:t> </a:t>
+            </a:r>
+            <a:r>
+              <a:rPr lang="en-US" sz="2550" b="1" noProof="0" dirty="0">
+                <a:solidFill>
+                  <a:srgbClr val="182225"/>
+                </a:solidFill>
+                <a:latin typeface="Aptos Display"/>
+                <a:ea typeface="Aptos Display"/>
+                <a:cs typeface="Aptos Display"/>
+              </a:rPr>
+              <a:t>model now contains direct-purchase cost expressions and an objective switch.</a:t>
             </a:r>
           </a:p>
         </p:txBody>
@@ -19408,7 +22138,7 @@
           <a:bodyPr/>
           <a:lstStyle/>
           <a:p>
-            <a:endParaRPr lang="en-US"/>
+            <a:endParaRPr lang="en-US" noProof="0" dirty="0"/>
           </a:p>
         </p:txBody>
       </p:sp>
@@ -19463,7 +22193,7 @@
               </a:defRPr>
             </a:pPr>
             <a:r>
-              <a:rPr sz="750" b="0">
+              <a:rPr lang="en-US" sz="750" b="0" noProof="0" dirty="0">
                 <a:solidFill>
                   <a:srgbClr val="5E7380"/>
                 </a:solidFill>
@@ -19527,7 +22257,7 @@
               </a:defRPr>
             </a:pPr>
             <a:r>
-              <a:rPr sz="825" b="0">
+              <a:rPr lang="en-US" sz="825" b="0" noProof="0" dirty="0">
                 <a:solidFill>
                   <a:srgbClr val="5E7380"/>
                 </a:solidFill>
@@ -19576,7 +22306,7 @@
           <a:bodyPr/>
           <a:lstStyle/>
           <a:p>
-            <a:endParaRPr lang="en-US"/>
+            <a:endParaRPr lang="en-US" noProof="0" dirty="0"/>
           </a:p>
         </p:txBody>
       </p:sp>
@@ -19631,7 +22361,7 @@
               </a:defRPr>
             </a:pPr>
             <a:r>
-              <a:rPr sz="1125" b="1">
+              <a:rPr lang="en-US" sz="1125" b="1" noProof="0" dirty="0" err="1">
                 <a:solidFill>
                   <a:srgbClr val="1E4D51"/>
                 </a:solidFill>
@@ -19639,7 +22369,40 @@
                 <a:ea typeface="Aptos Mono"/>
                 <a:cs typeface="Aptos Mono"/>
               </a:rPr>
-              <a:t>background_purchase_cap[i,t]</a:t>
+              <a:t>background_purchase_cap</a:t>
+            </a:r>
+            <a:r>
+              <a:rPr lang="en-US" sz="1125" b="1" noProof="0" dirty="0">
+                <a:solidFill>
+                  <a:srgbClr val="1E4D51"/>
+                </a:solidFill>
+                <a:latin typeface="Aptos Mono"/>
+                <a:ea typeface="Aptos Mono"/>
+                <a:cs typeface="Aptos Mono"/>
+              </a:rPr>
+              <a:t>[</a:t>
+            </a:r>
+            <a:r>
+              <a:rPr lang="en-US" sz="1125" b="1" noProof="0" dirty="0" err="1">
+                <a:solidFill>
+                  <a:srgbClr val="1E4D51"/>
+                </a:solidFill>
+                <a:latin typeface="Aptos Mono"/>
+                <a:ea typeface="Aptos Mono"/>
+                <a:cs typeface="Aptos Mono"/>
+              </a:rPr>
+              <a:t>i,t</a:t>
+            </a:r>
+            <a:r>
+              <a:rPr lang="en-US" sz="1125" b="1" noProof="0" dirty="0">
+                <a:solidFill>
+                  <a:srgbClr val="1E4D51"/>
+                </a:solidFill>
+                <a:latin typeface="Aptos Mono"/>
+                <a:ea typeface="Aptos Mono"/>
+                <a:cs typeface="Aptos Mono"/>
+              </a:rPr>
+              <a:t>]</a:t>
             </a:r>
           </a:p>
         </p:txBody>
@@ -19695,7 +22458,7 @@
               </a:defRPr>
             </a:pPr>
             <a:r>
-              <a:rPr sz="1125" b="0">
+              <a:rPr lang="en-US" sz="1125" b="0" noProof="0" dirty="0">
                 <a:solidFill>
                   <a:srgbClr val="182225"/>
                 </a:solidFill>
@@ -19744,7 +22507,7 @@
           <a:bodyPr/>
           <a:lstStyle/>
           <a:p>
-            <a:endParaRPr lang="en-US"/>
+            <a:endParaRPr lang="en-US" noProof="0" dirty="0"/>
           </a:p>
         </p:txBody>
       </p:sp>
@@ -19799,7 +22562,7 @@
               </a:defRPr>
             </a:pPr>
             <a:r>
-              <a:rPr sz="1125" b="1">
+              <a:rPr lang="en-US" sz="1125" b="1" noProof="0" dirty="0" err="1">
                 <a:solidFill>
                   <a:srgbClr val="1E4D51"/>
                 </a:solidFill>
@@ -19807,7 +22570,40 @@
                 <a:ea typeface="Aptos Mono"/>
                 <a:cs typeface="Aptos Mono"/>
               </a:rPr>
-              <a:t>background_purchase_op[i,t]</a:t>
+              <a:t>background_purchase_op</a:t>
+            </a:r>
+            <a:r>
+              <a:rPr lang="en-US" sz="1125" b="1" noProof="0" dirty="0">
+                <a:solidFill>
+                  <a:srgbClr val="1E4D51"/>
+                </a:solidFill>
+                <a:latin typeface="Aptos Mono"/>
+                <a:ea typeface="Aptos Mono"/>
+                <a:cs typeface="Aptos Mono"/>
+              </a:rPr>
+              <a:t>[</a:t>
+            </a:r>
+            <a:r>
+              <a:rPr lang="en-US" sz="1125" b="1" noProof="0" dirty="0" err="1">
+                <a:solidFill>
+                  <a:srgbClr val="1E4D51"/>
+                </a:solidFill>
+                <a:latin typeface="Aptos Mono"/>
+                <a:ea typeface="Aptos Mono"/>
+                <a:cs typeface="Aptos Mono"/>
+              </a:rPr>
+              <a:t>i,t</a:t>
+            </a:r>
+            <a:r>
+              <a:rPr lang="en-US" sz="1125" b="1" noProof="0" dirty="0">
+                <a:solidFill>
+                  <a:srgbClr val="1E4D51"/>
+                </a:solidFill>
+                <a:latin typeface="Aptos Mono"/>
+                <a:ea typeface="Aptos Mono"/>
+                <a:cs typeface="Aptos Mono"/>
+              </a:rPr>
+              <a:t>]</a:t>
             </a:r>
           </a:p>
         </p:txBody>
@@ -19863,7 +22659,7 @@
               </a:defRPr>
             </a:pPr>
             <a:r>
-              <a:rPr sz="1125" b="0">
+              <a:rPr lang="en-US" sz="1125" b="0" noProof="0" dirty="0">
                 <a:solidFill>
                   <a:srgbClr val="182225"/>
                 </a:solidFill>
@@ -19912,7 +22708,7 @@
           <a:bodyPr/>
           <a:lstStyle/>
           <a:p>
-            <a:endParaRPr lang="en-US"/>
+            <a:endParaRPr lang="en-US" noProof="0" dirty="0"/>
           </a:p>
         </p:txBody>
       </p:sp>
@@ -19967,7 +22763,7 @@
               </a:defRPr>
             </a:pPr>
             <a:r>
-              <a:rPr sz="1125" b="1">
+              <a:rPr lang="en-US" sz="1125" b="1" noProof="0" dirty="0" err="1">
                 <a:solidFill>
                   <a:srgbClr val="A65F3B"/>
                 </a:solidFill>
@@ -19975,7 +22771,18 @@
                 <a:ea typeface="Aptos Mono"/>
                 <a:cs typeface="Aptos Mono"/>
               </a:rPr>
-              <a:t>cost_cap[t]</a:t>
+              <a:t>cost_cap</a:t>
+            </a:r>
+            <a:r>
+              <a:rPr lang="en-US" sz="1125" b="1" noProof="0" dirty="0">
+                <a:solidFill>
+                  <a:srgbClr val="A65F3B"/>
+                </a:solidFill>
+                <a:latin typeface="Aptos Mono"/>
+                <a:ea typeface="Aptos Mono"/>
+                <a:cs typeface="Aptos Mono"/>
+              </a:rPr>
+              <a:t>[t]</a:t>
             </a:r>
           </a:p>
         </p:txBody>
@@ -20031,15 +22838,114 @@
               </a:defRPr>
             </a:pPr>
             <a:r>
-              <a:rPr sz="1125" b="0">
-                <a:solidFill>
-                  <a:srgbClr val="182225"/>
-                </a:solidFill>
-                <a:latin typeface="Aptos"/>
-                <a:ea typeface="Aptos"/>
-                <a:cs typeface="Aptos"/>
-              </a:rPr>
-              <a:t>sum_i price_cap[i,t] * purchase_cap[i,t]</a:t>
+              <a:rPr lang="en-US" sz="1125" b="0" noProof="0" dirty="0" err="1">
+                <a:solidFill>
+                  <a:srgbClr val="182225"/>
+                </a:solidFill>
+                <a:latin typeface="Aptos"/>
+                <a:ea typeface="Aptos"/>
+                <a:cs typeface="Aptos"/>
+              </a:rPr>
+              <a:t>sum_i</a:t>
+            </a:r>
+            <a:r>
+              <a:rPr lang="en-US" sz="1125" b="0" noProof="0" dirty="0">
+                <a:solidFill>
+                  <a:srgbClr val="182225"/>
+                </a:solidFill>
+                <a:latin typeface="Aptos"/>
+                <a:ea typeface="Aptos"/>
+                <a:cs typeface="Aptos"/>
+              </a:rPr>
+              <a:t> </a:t>
+            </a:r>
+            <a:r>
+              <a:rPr lang="en-US" sz="1125" b="0" noProof="0" dirty="0" err="1">
+                <a:solidFill>
+                  <a:srgbClr val="182225"/>
+                </a:solidFill>
+                <a:latin typeface="Aptos"/>
+                <a:ea typeface="Aptos"/>
+                <a:cs typeface="Aptos"/>
+              </a:rPr>
+              <a:t>price_cap</a:t>
+            </a:r>
+            <a:r>
+              <a:rPr lang="en-US" sz="1125" b="0" noProof="0" dirty="0">
+                <a:solidFill>
+                  <a:srgbClr val="182225"/>
+                </a:solidFill>
+                <a:latin typeface="Aptos"/>
+                <a:ea typeface="Aptos"/>
+                <a:cs typeface="Aptos"/>
+              </a:rPr>
+              <a:t>[</a:t>
+            </a:r>
+            <a:r>
+              <a:rPr lang="en-US" sz="1125" b="0" noProof="0" dirty="0" err="1">
+                <a:solidFill>
+                  <a:srgbClr val="182225"/>
+                </a:solidFill>
+                <a:latin typeface="Aptos"/>
+                <a:ea typeface="Aptos"/>
+                <a:cs typeface="Aptos"/>
+              </a:rPr>
+              <a:t>i,t</a:t>
+            </a:r>
+            <a:r>
+              <a:rPr lang="en-US" sz="1125" b="0" noProof="0" dirty="0">
+                <a:solidFill>
+                  <a:srgbClr val="182225"/>
+                </a:solidFill>
+                <a:latin typeface="Aptos"/>
+                <a:ea typeface="Aptos"/>
+                <a:cs typeface="Aptos"/>
+              </a:rPr>
+              <a:t>] * </a:t>
+            </a:r>
+            <a:r>
+              <a:rPr lang="en-US" sz="1125" b="0" noProof="0" dirty="0" err="1">
+                <a:solidFill>
+                  <a:srgbClr val="182225"/>
+                </a:solidFill>
+                <a:latin typeface="Aptos"/>
+                <a:ea typeface="Aptos"/>
+                <a:cs typeface="Aptos"/>
+              </a:rPr>
+              <a:t>purchase_cap</a:t>
+            </a:r>
+            <a:r>
+              <a:rPr lang="en-US" sz="1125" b="0" noProof="0" dirty="0">
+                <a:solidFill>
+                  <a:srgbClr val="182225"/>
+                </a:solidFill>
+                <a:latin typeface="Aptos"/>
+                <a:ea typeface="Aptos"/>
+                <a:cs typeface="Aptos"/>
+              </a:rPr>
+              <a:t>[</a:t>
+            </a:r>
+            <a:r>
+              <a:rPr lang="en-US" sz="1125" b="0" noProof="0" dirty="0" err="1">
+                <a:solidFill>
+                  <a:srgbClr val="182225"/>
+                </a:solidFill>
+                <a:latin typeface="Aptos"/>
+                <a:ea typeface="Aptos"/>
+                <a:cs typeface="Aptos"/>
+              </a:rPr>
+              <a:t>i,t</a:t>
+            </a:r>
+            <a:r>
+              <a:rPr lang="en-US" sz="1125" b="0" noProof="0" dirty="0">
+                <a:solidFill>
+                  <a:srgbClr val="182225"/>
+                </a:solidFill>
+                <a:latin typeface="Aptos"/>
+                <a:ea typeface="Aptos"/>
+                <a:cs typeface="Aptos"/>
+              </a:rPr>
+              <a:t>]</a:t>
             </a:r>
           </a:p>
         </p:txBody>
@@ -20080,7 +22986,7 @@
           <a:bodyPr/>
           <a:lstStyle/>
           <a:p>
-            <a:endParaRPr lang="en-US"/>
+            <a:endParaRPr lang="en-US" noProof="0" dirty="0"/>
           </a:p>
         </p:txBody>
       </p:sp>
@@ -20135,7 +23041,7 @@
               </a:defRPr>
             </a:pPr>
             <a:r>
-              <a:rPr sz="1125" b="1">
+              <a:rPr lang="en-US" sz="1125" b="1" noProof="0" dirty="0" err="1">
                 <a:solidFill>
                   <a:srgbClr val="A65F3B"/>
                 </a:solidFill>
@@ -20143,7 +23049,18 @@
                 <a:ea typeface="Aptos Mono"/>
                 <a:cs typeface="Aptos Mono"/>
               </a:rPr>
-              <a:t>cost_op[t]</a:t>
+              <a:t>cost_op</a:t>
+            </a:r>
+            <a:r>
+              <a:rPr lang="en-US" sz="1125" b="1" noProof="0" dirty="0">
+                <a:solidFill>
+                  <a:srgbClr val="A65F3B"/>
+                </a:solidFill>
+                <a:latin typeface="Aptos Mono"/>
+                <a:ea typeface="Aptos Mono"/>
+                <a:cs typeface="Aptos Mono"/>
+              </a:rPr>
+              <a:t>[t]</a:t>
             </a:r>
           </a:p>
         </p:txBody>
@@ -20199,15 +23116,114 @@
               </a:defRPr>
             </a:pPr>
             <a:r>
-              <a:rPr sz="1125" b="0">
-                <a:solidFill>
-                  <a:srgbClr val="182225"/>
-                </a:solidFill>
-                <a:latin typeface="Aptos"/>
-                <a:ea typeface="Aptos"/>
-                <a:cs typeface="Aptos"/>
-              </a:rPr>
-              <a:t>sum_i price_op[i,t] * purchase_op[i,t]</a:t>
+              <a:rPr lang="en-US" sz="1125" b="0" noProof="0" dirty="0" err="1">
+                <a:solidFill>
+                  <a:srgbClr val="182225"/>
+                </a:solidFill>
+                <a:latin typeface="Aptos"/>
+                <a:ea typeface="Aptos"/>
+                <a:cs typeface="Aptos"/>
+              </a:rPr>
+              <a:t>sum_i</a:t>
+            </a:r>
+            <a:r>
+              <a:rPr lang="en-US" sz="1125" b="0" noProof="0" dirty="0">
+                <a:solidFill>
+                  <a:srgbClr val="182225"/>
+                </a:solidFill>
+                <a:latin typeface="Aptos"/>
+                <a:ea typeface="Aptos"/>
+                <a:cs typeface="Aptos"/>
+              </a:rPr>
+              <a:t> </a:t>
+            </a:r>
+            <a:r>
+              <a:rPr lang="en-US" sz="1125" b="0" noProof="0" dirty="0" err="1">
+                <a:solidFill>
+                  <a:srgbClr val="182225"/>
+                </a:solidFill>
+                <a:latin typeface="Aptos"/>
+                <a:ea typeface="Aptos"/>
+                <a:cs typeface="Aptos"/>
+              </a:rPr>
+              <a:t>price_op</a:t>
+            </a:r>
+            <a:r>
+              <a:rPr lang="en-US" sz="1125" b="0" noProof="0" dirty="0">
+                <a:solidFill>
+                  <a:srgbClr val="182225"/>
+                </a:solidFill>
+                <a:latin typeface="Aptos"/>
+                <a:ea typeface="Aptos"/>
+                <a:cs typeface="Aptos"/>
+              </a:rPr>
+              <a:t>[</a:t>
+            </a:r>
+            <a:r>
+              <a:rPr lang="en-US" sz="1125" b="0" noProof="0" dirty="0" err="1">
+                <a:solidFill>
+                  <a:srgbClr val="182225"/>
+                </a:solidFill>
+                <a:latin typeface="Aptos"/>
+                <a:ea typeface="Aptos"/>
+                <a:cs typeface="Aptos"/>
+              </a:rPr>
+              <a:t>i,t</a:t>
+            </a:r>
+            <a:r>
+              <a:rPr lang="en-US" sz="1125" b="0" noProof="0" dirty="0">
+                <a:solidFill>
+                  <a:srgbClr val="182225"/>
+                </a:solidFill>
+                <a:latin typeface="Aptos"/>
+                <a:ea typeface="Aptos"/>
+                <a:cs typeface="Aptos"/>
+              </a:rPr>
+              <a:t>] * </a:t>
+            </a:r>
+            <a:r>
+              <a:rPr lang="en-US" sz="1125" b="0" noProof="0" dirty="0" err="1">
+                <a:solidFill>
+                  <a:srgbClr val="182225"/>
+                </a:solidFill>
+                <a:latin typeface="Aptos"/>
+                <a:ea typeface="Aptos"/>
+                <a:cs typeface="Aptos"/>
+              </a:rPr>
+              <a:t>purchase_op</a:t>
+            </a:r>
+            <a:r>
+              <a:rPr lang="en-US" sz="1125" b="0" noProof="0" dirty="0">
+                <a:solidFill>
+                  <a:srgbClr val="182225"/>
+                </a:solidFill>
+                <a:latin typeface="Aptos"/>
+                <a:ea typeface="Aptos"/>
+                <a:cs typeface="Aptos"/>
+              </a:rPr>
+              <a:t>[</a:t>
+            </a:r>
+            <a:r>
+              <a:rPr lang="en-US" sz="1125" b="0" noProof="0" dirty="0" err="1">
+                <a:solidFill>
+                  <a:srgbClr val="182225"/>
+                </a:solidFill>
+                <a:latin typeface="Aptos"/>
+                <a:ea typeface="Aptos"/>
+                <a:cs typeface="Aptos"/>
+              </a:rPr>
+              <a:t>i,t</a:t>
+            </a:r>
+            <a:r>
+              <a:rPr lang="en-US" sz="1125" b="0" noProof="0" dirty="0">
+                <a:solidFill>
+                  <a:srgbClr val="182225"/>
+                </a:solidFill>
+                <a:latin typeface="Aptos"/>
+                <a:ea typeface="Aptos"/>
+                <a:cs typeface="Aptos"/>
+              </a:rPr>
+              <a:t>]</a:t>
             </a:r>
           </a:p>
         </p:txBody>
@@ -20248,7 +23264,7 @@
           <a:bodyPr/>
           <a:lstStyle/>
           <a:p>
-            <a:endParaRPr lang="en-US"/>
+            <a:endParaRPr lang="en-US" noProof="0" dirty="0"/>
           </a:p>
         </p:txBody>
       </p:sp>
@@ -20303,7 +23319,7 @@
               </a:defRPr>
             </a:pPr>
             <a:r>
-              <a:rPr sz="1125" b="1">
+              <a:rPr lang="en-US" sz="1125" b="1" noProof="0" dirty="0" err="1">
                 <a:solidFill>
                   <a:srgbClr val="A65F3B"/>
                 </a:solidFill>
@@ -20311,7 +23327,18 @@
                 <a:ea typeface="Aptos Mono"/>
                 <a:cs typeface="Aptos Mono"/>
               </a:rPr>
-              <a:t>discount_factor[t]</a:t>
+              <a:t>discount_factor</a:t>
+            </a:r>
+            <a:r>
+              <a:rPr lang="en-US" sz="1125" b="1" noProof="0" dirty="0">
+                <a:solidFill>
+                  <a:srgbClr val="A65F3B"/>
+                </a:solidFill>
+                <a:latin typeface="Aptos Mono"/>
+                <a:ea typeface="Aptos Mono"/>
+                <a:cs typeface="Aptos Mono"/>
+              </a:rPr>
+              <a:t>[t]</a:t>
             </a:r>
           </a:p>
         </p:txBody>
@@ -20367,15 +23394,59 @@
               </a:defRPr>
             </a:pPr>
             <a:r>
-              <a:rPr sz="1125" b="0">
-                <a:solidFill>
-                  <a:srgbClr val="182225"/>
-                </a:solidFill>
-                <a:latin typeface="Aptos"/>
-                <a:ea typeface="Aptos"/>
-                <a:cs typeface="Aptos"/>
-              </a:rPr>
-              <a:t>1 / (1 + discount_rate)^(t - reference_year)</a:t>
+              <a:rPr lang="en-US" sz="1125" b="0" noProof="0" dirty="0">
+                <a:solidFill>
+                  <a:srgbClr val="182225"/>
+                </a:solidFill>
+                <a:latin typeface="Aptos"/>
+                <a:ea typeface="Aptos"/>
+                <a:cs typeface="Aptos"/>
+              </a:rPr>
+              <a:t>1 / (1 + </a:t>
+            </a:r>
+            <a:r>
+              <a:rPr lang="en-US" sz="1125" b="0" noProof="0" dirty="0" err="1">
+                <a:solidFill>
+                  <a:srgbClr val="182225"/>
+                </a:solidFill>
+                <a:latin typeface="Aptos"/>
+                <a:ea typeface="Aptos"/>
+                <a:cs typeface="Aptos"/>
+              </a:rPr>
+              <a:t>discount_rate</a:t>
+            </a:r>
+            <a:r>
+              <a:rPr lang="en-US" sz="1125" b="0" noProof="0" dirty="0">
+                <a:solidFill>
+                  <a:srgbClr val="182225"/>
+                </a:solidFill>
+                <a:latin typeface="Aptos"/>
+                <a:ea typeface="Aptos"/>
+                <a:cs typeface="Aptos"/>
+              </a:rPr>
+              <a:t>)^(t - </a:t>
+            </a:r>
+            <a:r>
+              <a:rPr lang="en-US" sz="1125" b="0" noProof="0" dirty="0" err="1">
+                <a:solidFill>
+                  <a:srgbClr val="182225"/>
+                </a:solidFill>
+                <a:latin typeface="Aptos"/>
+                <a:ea typeface="Aptos"/>
+                <a:cs typeface="Aptos"/>
+              </a:rPr>
+              <a:t>reference_year</a:t>
+            </a:r>
+            <a:r>
+              <a:rPr lang="en-US" sz="1125" b="0" noProof="0" dirty="0">
+                <a:solidFill>
+                  <a:srgbClr val="182225"/>
+                </a:solidFill>
+                <a:latin typeface="Aptos"/>
+                <a:ea typeface="Aptos"/>
+                <a:cs typeface="Aptos"/>
+              </a:rPr>
+              <a:t>)</a:t>
             </a:r>
           </a:p>
         </p:txBody>
@@ -20416,7 +23487,7 @@
           <a:bodyPr/>
           <a:lstStyle/>
           <a:p>
-            <a:endParaRPr lang="en-US"/>
+            <a:endParaRPr lang="en-US" noProof="0" dirty="0"/>
           </a:p>
         </p:txBody>
       </p:sp>
@@ -20471,7 +23542,7 @@
               </a:defRPr>
             </a:pPr>
             <a:r>
-              <a:rPr sz="1125" b="1">
+              <a:rPr lang="en-US" sz="1125" b="1" noProof="0" dirty="0" err="1">
                 <a:solidFill>
                   <a:srgbClr val="A65F3B"/>
                 </a:solidFill>
@@ -20481,6 +23552,14 @@
               </a:rPr>
               <a:t>total_cost</a:t>
             </a:r>
+            <a:endParaRPr lang="en-US" sz="1125" b="1" noProof="0" dirty="0">
+              <a:solidFill>
+                <a:srgbClr val="A65F3B"/>
+              </a:solidFill>
+              <a:latin typeface="Aptos Mono"/>
+              <a:ea typeface="Aptos Mono"/>
+              <a:cs typeface="Aptos Mono"/>
+            </a:endParaRPr>
           </a:p>
         </p:txBody>
       </p:sp>
@@ -20535,15 +23614,92 @@
               </a:defRPr>
             </a:pPr>
             <a:r>
-              <a:rPr sz="1125" b="0">
-                <a:solidFill>
-                  <a:srgbClr val="182225"/>
-                </a:solidFill>
-                <a:latin typeface="Aptos"/>
-                <a:ea typeface="Aptos"/>
-                <a:cs typeface="Aptos"/>
-              </a:rPr>
-              <a:t>sum_t discount_factor[t] * (cost_cap[t] + cost_op[t])</a:t>
+              <a:rPr lang="en-US" sz="1125" b="0" noProof="0" dirty="0" err="1">
+                <a:solidFill>
+                  <a:srgbClr val="182225"/>
+                </a:solidFill>
+                <a:latin typeface="Aptos"/>
+                <a:ea typeface="Aptos"/>
+                <a:cs typeface="Aptos"/>
+              </a:rPr>
+              <a:t>sum_t</a:t>
+            </a:r>
+            <a:r>
+              <a:rPr lang="en-US" sz="1125" b="0" noProof="0" dirty="0">
+                <a:solidFill>
+                  <a:srgbClr val="182225"/>
+                </a:solidFill>
+                <a:latin typeface="Aptos"/>
+                <a:ea typeface="Aptos"/>
+                <a:cs typeface="Aptos"/>
+              </a:rPr>
+              <a:t> </a:t>
+            </a:r>
+            <a:r>
+              <a:rPr lang="en-US" sz="1125" b="0" noProof="0" dirty="0" err="1">
+                <a:solidFill>
+                  <a:srgbClr val="182225"/>
+                </a:solidFill>
+                <a:latin typeface="Aptos"/>
+                <a:ea typeface="Aptos"/>
+                <a:cs typeface="Aptos"/>
+              </a:rPr>
+              <a:t>discount_factor</a:t>
+            </a:r>
+            <a:r>
+              <a:rPr lang="en-US" sz="1125" b="0" noProof="0" dirty="0">
+                <a:solidFill>
+                  <a:srgbClr val="182225"/>
+                </a:solidFill>
+                <a:latin typeface="Aptos"/>
+                <a:ea typeface="Aptos"/>
+                <a:cs typeface="Aptos"/>
+              </a:rPr>
+              <a:t>[t] * (</a:t>
+            </a:r>
+            <a:r>
+              <a:rPr lang="en-US" sz="1125" b="0" noProof="0" dirty="0" err="1">
+                <a:solidFill>
+                  <a:srgbClr val="182225"/>
+                </a:solidFill>
+                <a:latin typeface="Aptos"/>
+                <a:ea typeface="Aptos"/>
+                <a:cs typeface="Aptos"/>
+              </a:rPr>
+              <a:t>cost_cap</a:t>
+            </a:r>
+            <a:r>
+              <a:rPr lang="en-US" sz="1125" b="0" noProof="0" dirty="0">
+                <a:solidFill>
+                  <a:srgbClr val="182225"/>
+                </a:solidFill>
+                <a:latin typeface="Aptos"/>
+                <a:ea typeface="Aptos"/>
+                <a:cs typeface="Aptos"/>
+              </a:rPr>
+              <a:t>[t] + </a:t>
+            </a:r>
+            <a:r>
+              <a:rPr lang="en-US" sz="1125" b="0" noProof="0" dirty="0" err="1">
+                <a:solidFill>
+                  <a:srgbClr val="182225"/>
+                </a:solidFill>
+                <a:latin typeface="Aptos"/>
+                <a:ea typeface="Aptos"/>
+                <a:cs typeface="Aptos"/>
+              </a:rPr>
+              <a:t>cost_op</a:t>
+            </a:r>
+            <a:r>
+              <a:rPr lang="en-US" sz="1125" b="0" noProof="0" dirty="0">
+                <a:solidFill>
+                  <a:srgbClr val="182225"/>
+                </a:solidFill>
+                <a:latin typeface="Aptos"/>
+                <a:ea typeface="Aptos"/>
+                <a:cs typeface="Aptos"/>
+              </a:rPr>
+              <a:t>[t])</a:t>
             </a:r>
           </a:p>
         </p:txBody>
@@ -20584,7 +23740,7 @@
           <a:bodyPr/>
           <a:lstStyle/>
           <a:p>
-            <a:endParaRPr lang="en-US"/>
+            <a:endParaRPr lang="en-US" noProof="0" dirty="0"/>
           </a:p>
         </p:txBody>
       </p:sp>
@@ -20639,7 +23795,7 @@
               </a:defRPr>
             </a:pPr>
             <a:r>
-              <a:rPr sz="1575" b="1">
+              <a:rPr lang="en-US" sz="1575" b="1" noProof="0" dirty="0">
                 <a:solidFill>
                   <a:srgbClr val="A65F3B"/>
                 </a:solidFill>
@@ -20703,7 +23859,7 @@
               </a:defRPr>
             </a:pPr>
             <a:r>
-              <a:rPr sz="1275" b="0">
+              <a:rPr lang="en-US" sz="1275" b="0" noProof="0" dirty="0">
                 <a:solidFill>
                   <a:srgbClr val="182225"/>
                 </a:solidFill>
@@ -20767,7 +23923,7 @@
               </a:defRPr>
             </a:pPr>
             <a:r>
-              <a:rPr sz="975" b="0">
+              <a:rPr lang="en-US" sz="975" b="0" noProof="0" dirty="0">
                 <a:solidFill>
                   <a:srgbClr val="5E7380"/>
                 </a:solidFill>
@@ -20775,7 +23931,29 @@
                 <a:ea typeface="Aptos"/>
                 <a:cs typeface="Aptos"/>
               </a:rPr>
-              <a:t>min total_impact[category]</a:t>
+              <a:t>min </a:t>
+            </a:r>
+            <a:r>
+              <a:rPr lang="en-US" sz="975" b="0" noProof="0" dirty="0" err="1">
+                <a:solidFill>
+                  <a:srgbClr val="5E7380"/>
+                </a:solidFill>
+                <a:latin typeface="Aptos"/>
+                <a:ea typeface="Aptos"/>
+                <a:cs typeface="Aptos"/>
+              </a:rPr>
+              <a:t>total_impact</a:t>
+            </a:r>
+            <a:r>
+              <a:rPr lang="en-US" sz="975" b="0" noProof="0" dirty="0">
+                <a:solidFill>
+                  <a:srgbClr val="5E7380"/>
+                </a:solidFill>
+                <a:latin typeface="Aptos"/>
+                <a:ea typeface="Aptos"/>
+                <a:cs typeface="Aptos"/>
+              </a:rPr>
+              <a:t>[category]</a:t>
             </a:r>
           </a:p>
         </p:txBody>
@@ -20831,7 +24009,7 @@
               </a:defRPr>
             </a:pPr>
             <a:r>
-              <a:rPr sz="1275" b="0">
+              <a:rPr lang="en-US" sz="1275" b="0" noProof="0" dirty="0">
                 <a:solidFill>
                   <a:srgbClr val="182225"/>
                 </a:solidFill>
@@ -20895,7 +24073,7 @@
               </a:defRPr>
             </a:pPr>
             <a:r>
-              <a:rPr sz="975" b="0">
+              <a:rPr lang="en-US" sz="975" b="0" noProof="0" dirty="0">
                 <a:solidFill>
                   <a:srgbClr val="5E7380"/>
                 </a:solidFill>
@@ -20903,8 +24081,27 @@
                 <a:ea typeface="Aptos"/>
                 <a:cs typeface="Aptos"/>
               </a:rPr>
-              <a:t>min total_cost</a:t>
-            </a:r>
+              <a:t>min </a:t>
+            </a:r>
+            <a:r>
+              <a:rPr lang="en-US" sz="975" b="0" noProof="0" dirty="0" err="1">
+                <a:solidFill>
+                  <a:srgbClr val="5E7380"/>
+                </a:solidFill>
+                <a:latin typeface="Aptos"/>
+                <a:ea typeface="Aptos"/>
+                <a:cs typeface="Aptos"/>
+              </a:rPr>
+              <a:t>total_cost</a:t>
+            </a:r>
+            <a:endParaRPr lang="en-US" sz="975" b="0" noProof="0" dirty="0">
+              <a:solidFill>
+                <a:srgbClr val="5E7380"/>
+              </a:solidFill>
+              <a:latin typeface="Aptos"/>
+              <a:ea typeface="Aptos"/>
+              <a:cs typeface="Aptos"/>
+            </a:endParaRPr>
           </a:p>
         </p:txBody>
       </p:sp>
@@ -20976,7 +24173,7 @@
           <a:bodyPr/>
           <a:lstStyle/>
           <a:p>
-            <a:endParaRPr lang="en-US"/>
+            <a:endParaRPr lang="en-US" noProof="0" dirty="0"/>
           </a:p>
         </p:txBody>
       </p:sp>
@@ -21018,7 +24215,7 @@
           <a:bodyPr/>
           <a:lstStyle/>
           <a:p>
-            <a:endParaRPr lang="en-US"/>
+            <a:endParaRPr lang="en-US" noProof="0" dirty="0"/>
           </a:p>
         </p:txBody>
       </p:sp>
@@ -21073,7 +24270,7 @@
               </a:defRPr>
             </a:pPr>
             <a:r>
-              <a:rPr sz="900" b="1">
+              <a:rPr lang="en-US" sz="1200" b="1" noProof="0" dirty="0">
                 <a:solidFill>
                   <a:srgbClr val="1E4D51"/>
                 </a:solidFill>
@@ -21137,7 +24334,7 @@
               </a:defRPr>
             </a:pPr>
             <a:r>
-              <a:rPr sz="2550" b="1">
+              <a:rPr lang="en-US" sz="2550" b="1" dirty="0">
                 <a:solidFill>
                   <a:srgbClr val="182225"/>
                 </a:solidFill>
@@ -21145,7 +24342,18 @@
                 <a:ea typeface="Aptos Display"/>
                 <a:cs typeface="Aptos Display"/>
               </a:rPr>
-              <a:t>Least-cost optimization remains compatible with environmental limits.</a:t>
+              <a:t>min</a:t>
+            </a:r>
+            <a:r>
+              <a:rPr lang="en-US" sz="2550" b="1" noProof="0" dirty="0">
+                <a:solidFill>
+                  <a:srgbClr val="182225"/>
+                </a:solidFill>
+                <a:latin typeface="Aptos Display"/>
+                <a:ea typeface="Aptos Display"/>
+                <a:cs typeface="Aptos Display"/>
+              </a:rPr>
+              <a:t>-cost optimization remains compatible with environmental limits.</a:t>
             </a:r>
           </a:p>
         </p:txBody>
@@ -21188,7 +24396,7 @@
           <a:bodyPr/>
           <a:lstStyle/>
           <a:p>
-            <a:endParaRPr lang="en-US"/>
+            <a:endParaRPr lang="en-US" noProof="0" dirty="0"/>
           </a:p>
         </p:txBody>
       </p:sp>
@@ -21243,7 +24451,7 @@
               </a:defRPr>
             </a:pPr>
             <a:r>
-              <a:rPr sz="750" b="0">
+              <a:rPr lang="en-US" sz="750" b="0" noProof="0" dirty="0">
                 <a:solidFill>
                   <a:srgbClr val="5E7380"/>
                 </a:solidFill>
@@ -21307,7 +24515,7 @@
               </a:defRPr>
             </a:pPr>
             <a:r>
-              <a:rPr sz="825" b="0">
+              <a:rPr lang="en-US" sz="825" b="0" noProof="0" dirty="0">
                 <a:solidFill>
                   <a:srgbClr val="5E7380"/>
                 </a:solidFill>
@@ -21356,7 +24564,7 @@
           <a:bodyPr/>
           <a:lstStyle/>
           <a:p>
-            <a:endParaRPr lang="en-US"/>
+            <a:endParaRPr lang="en-US" noProof="0" dirty="0"/>
           </a:p>
         </p:txBody>
       </p:sp>
@@ -21376,7 +24584,7 @@
         </p:nvSpPr>
         <p:spPr>
           <a:xfrm>
-            <a:off x="1200150" y="2362200"/>
+            <a:off x="1200150" y="2138907"/>
             <a:ext cx="1809750" cy="323850"/>
           </a:xfrm>
           <a:prstGeom prst="rect">
@@ -21411,7 +24619,7 @@
               </a:defRPr>
             </a:pPr>
             <a:r>
-              <a:rPr sz="2100" b="1">
+              <a:rPr lang="en-US" sz="2100" b="1" noProof="0" dirty="0" err="1">
                 <a:solidFill>
                   <a:srgbClr val="1E4D51"/>
                 </a:solidFill>
@@ -21419,7 +24627,18 @@
                 <a:ea typeface="Aptos Mono"/>
                 <a:cs typeface="Aptos Mono"/>
               </a:rPr>
-              <a:t>total_cost =</a:t>
+              <a:t>total_cost</a:t>
+            </a:r>
+            <a:r>
+              <a:rPr lang="en-US" sz="2100" b="1" noProof="0" dirty="0">
+                <a:solidFill>
+                  <a:srgbClr val="1E4D51"/>
+                </a:solidFill>
+                <a:latin typeface="Aptos Mono"/>
+                <a:ea typeface="Aptos Mono"/>
+                <a:cs typeface="Aptos Mono"/>
+              </a:rPr>
+              <a:t> =</a:t>
             </a:r>
           </a:p>
         </p:txBody>
@@ -21440,7 +24659,7 @@
         </p:nvSpPr>
         <p:spPr>
           <a:xfrm>
-            <a:off x="1200150" y="2857500"/>
+            <a:off x="1200150" y="2740532"/>
             <a:ext cx="5619750" cy="342900"/>
           </a:xfrm>
           <a:prstGeom prst="rect">
@@ -21475,7 +24694,7 @@
               </a:defRPr>
             </a:pPr>
             <a:r>
-              <a:rPr sz="1725" b="0">
+              <a:rPr lang="en-US" sz="1725" b="0" noProof="0" dirty="0" err="1">
                 <a:solidFill>
                   <a:srgbClr val="182225"/>
                 </a:solidFill>
@@ -21483,7 +24702,84 @@
                 <a:ea typeface="Aptos Mono"/>
                 <a:cs typeface="Aptos Mono"/>
               </a:rPr>
-              <a:t>sum_t discount_factor[t] * (cost_cap[t] + cost_op[t])</a:t>
+              <a:t>sum_t</a:t>
+            </a:r>
+            <a:r>
+              <a:rPr lang="en-US" sz="1725" b="0" noProof="0" dirty="0">
+                <a:solidFill>
+                  <a:srgbClr val="182225"/>
+                </a:solidFill>
+                <a:latin typeface="Aptos Mono"/>
+                <a:ea typeface="Aptos Mono"/>
+                <a:cs typeface="Aptos Mono"/>
+              </a:rPr>
+              <a:t> </a:t>
+            </a:r>
+            <a:r>
+              <a:rPr lang="en-US" sz="1725" b="0" noProof="0" dirty="0" err="1">
+                <a:solidFill>
+                  <a:srgbClr val="182225"/>
+                </a:solidFill>
+                <a:latin typeface="Aptos Mono"/>
+                <a:ea typeface="Aptos Mono"/>
+                <a:cs typeface="Aptos Mono"/>
+              </a:rPr>
+              <a:t>discount_factor</a:t>
+            </a:r>
+            <a:r>
+              <a:rPr lang="en-US" sz="1725" b="0" noProof="0" dirty="0">
+                <a:solidFill>
+                  <a:srgbClr val="182225"/>
+                </a:solidFill>
+                <a:latin typeface="Aptos Mono"/>
+                <a:ea typeface="Aptos Mono"/>
+                <a:cs typeface="Aptos Mono"/>
+              </a:rPr>
+              <a:t>[t] * (</a:t>
+            </a:r>
+            <a:r>
+              <a:rPr lang="en-US" sz="1725" b="0" noProof="0" dirty="0" err="1">
+                <a:solidFill>
+                  <a:srgbClr val="182225"/>
+                </a:solidFill>
+                <a:latin typeface="Aptos Mono"/>
+                <a:ea typeface="Aptos Mono"/>
+                <a:cs typeface="Aptos Mono"/>
+              </a:rPr>
+              <a:t>cost_cap</a:t>
+            </a:r>
+            <a:r>
+              <a:rPr lang="en-US" sz="1725" b="0" noProof="0" dirty="0">
+                <a:solidFill>
+                  <a:srgbClr val="182225"/>
+                </a:solidFill>
+                <a:latin typeface="Aptos Mono"/>
+                <a:ea typeface="Aptos Mono"/>
+                <a:cs typeface="Aptos Mono"/>
+              </a:rPr>
+              <a:t>[t] + </a:t>
+            </a:r>
+            <a:r>
+              <a:rPr lang="en-US" sz="1725" b="0" noProof="0" dirty="0" err="1">
+                <a:solidFill>
+                  <a:srgbClr val="182225"/>
+                </a:solidFill>
+                <a:latin typeface="Aptos Mono"/>
+                <a:ea typeface="Aptos Mono"/>
+                <a:cs typeface="Aptos Mono"/>
+              </a:rPr>
+              <a:t>cost_op</a:t>
+            </a:r>
+            <a:r>
+              <a:rPr lang="en-US" sz="1725" b="0" noProof="0" dirty="0">
+                <a:solidFill>
+                  <a:srgbClr val="182225"/>
+                </a:solidFill>
+                <a:latin typeface="Aptos Mono"/>
+                <a:ea typeface="Aptos Mono"/>
+                <a:cs typeface="Aptos Mono"/>
+              </a:rPr>
+              <a:t>[t])</a:t>
             </a:r>
           </a:p>
         </p:txBody>
@@ -21504,7 +24800,7 @@
         </p:nvSpPr>
         <p:spPr>
           <a:xfrm>
-            <a:off x="1200150" y="3562350"/>
+            <a:off x="1200150" y="3370956"/>
             <a:ext cx="666750" cy="209550"/>
           </a:xfrm>
           <a:prstGeom prst="rect">
@@ -21539,7 +24835,7 @@
               </a:defRPr>
             </a:pPr>
             <a:r>
-              <a:rPr sz="1200" b="0">
+              <a:rPr lang="en-US" sz="1200" b="0" noProof="0" dirty="0">
                 <a:solidFill>
                   <a:srgbClr val="5E7380"/>
                 </a:solidFill>
@@ -21568,7 +24864,7 @@
         </p:nvSpPr>
         <p:spPr>
           <a:xfrm>
-            <a:off x="1200150" y="3867150"/>
+            <a:off x="1200150" y="3643857"/>
             <a:ext cx="5619750" cy="495300"/>
           </a:xfrm>
           <a:prstGeom prst="rect">
@@ -21603,7 +24899,7 @@
               </a:defRPr>
             </a:pPr>
             <a:r>
-              <a:rPr sz="1275" b="0">
+              <a:rPr lang="en-US" sz="1275" b="0" noProof="0" dirty="0" err="1">
                 <a:solidFill>
                   <a:srgbClr val="182225"/>
                 </a:solidFill>
@@ -21611,7 +24907,128 @@
                 <a:ea typeface="Aptos Mono"/>
                 <a:cs typeface="Aptos Mono"/>
               </a:rPr>
-              <a:t>cost_cap[t] = sum_i c_cap[i,t] * background_purchase_cap[i,t]</a:t>
+              <a:t>cost_cap</a:t>
+            </a:r>
+            <a:r>
+              <a:rPr lang="en-US" sz="1275" b="0" noProof="0" dirty="0">
+                <a:solidFill>
+                  <a:srgbClr val="182225"/>
+                </a:solidFill>
+                <a:latin typeface="Aptos Mono"/>
+                <a:ea typeface="Aptos Mono"/>
+                <a:cs typeface="Aptos Mono"/>
+              </a:rPr>
+              <a:t>[t] = </a:t>
+            </a:r>
+            <a:r>
+              <a:rPr lang="en-US" sz="1275" b="0" noProof="0" dirty="0" err="1">
+                <a:solidFill>
+                  <a:srgbClr val="182225"/>
+                </a:solidFill>
+                <a:latin typeface="Aptos Mono"/>
+                <a:ea typeface="Aptos Mono"/>
+                <a:cs typeface="Aptos Mono"/>
+              </a:rPr>
+              <a:t>sum_i</a:t>
+            </a:r>
+            <a:r>
+              <a:rPr lang="en-US" sz="1275" b="0" noProof="0" dirty="0">
+                <a:solidFill>
+                  <a:srgbClr val="182225"/>
+                </a:solidFill>
+                <a:latin typeface="Aptos Mono"/>
+                <a:ea typeface="Aptos Mono"/>
+                <a:cs typeface="Aptos Mono"/>
+              </a:rPr>
+              <a:t> </a:t>
+            </a:r>
+            <a:r>
+              <a:rPr lang="en-US" sz="1275" b="0" noProof="0" dirty="0" err="1">
+                <a:solidFill>
+                  <a:srgbClr val="182225"/>
+                </a:solidFill>
+                <a:latin typeface="Aptos Mono"/>
+                <a:ea typeface="Aptos Mono"/>
+                <a:cs typeface="Aptos Mono"/>
+              </a:rPr>
+              <a:t>c_cap</a:t>
+            </a:r>
+            <a:r>
+              <a:rPr lang="en-US" sz="1275" b="0" noProof="0" dirty="0">
+                <a:solidFill>
+                  <a:srgbClr val="182225"/>
+                </a:solidFill>
+                <a:latin typeface="Aptos Mono"/>
+                <a:ea typeface="Aptos Mono"/>
+                <a:cs typeface="Aptos Mono"/>
+              </a:rPr>
+              <a:t>[</a:t>
+            </a:r>
+            <a:r>
+              <a:rPr lang="en-US" sz="1275" b="0" noProof="0" dirty="0" err="1">
+                <a:solidFill>
+                  <a:srgbClr val="182225"/>
+                </a:solidFill>
+                <a:latin typeface="Aptos Mono"/>
+                <a:ea typeface="Aptos Mono"/>
+                <a:cs typeface="Aptos Mono"/>
+              </a:rPr>
+              <a:t>i,t</a:t>
+            </a:r>
+            <a:r>
+              <a:rPr lang="en-US" sz="1275" b="0" noProof="0" dirty="0">
+                <a:solidFill>
+                  <a:srgbClr val="182225"/>
+                </a:solidFill>
+                <a:latin typeface="Aptos Mono"/>
+                <a:ea typeface="Aptos Mono"/>
+                <a:cs typeface="Aptos Mono"/>
+              </a:rPr>
+              <a:t>] * </a:t>
+            </a:r>
+            <a:r>
+              <a:rPr lang="en-US" sz="1275" b="0" noProof="0" dirty="0" err="1">
+                <a:solidFill>
+                  <a:srgbClr val="182225"/>
+                </a:solidFill>
+                <a:latin typeface="Aptos Mono"/>
+                <a:ea typeface="Aptos Mono"/>
+                <a:cs typeface="Aptos Mono"/>
+              </a:rPr>
+              <a:t>background_purchase_cap</a:t>
+            </a:r>
+            <a:r>
+              <a:rPr lang="en-US" sz="1275" b="0" noProof="0" dirty="0">
+                <a:solidFill>
+                  <a:srgbClr val="182225"/>
+                </a:solidFill>
+                <a:latin typeface="Aptos Mono"/>
+                <a:ea typeface="Aptos Mono"/>
+                <a:cs typeface="Aptos Mono"/>
+              </a:rPr>
+              <a:t>[</a:t>
+            </a:r>
+            <a:r>
+              <a:rPr lang="en-US" sz="1275" b="0" noProof="0" dirty="0" err="1">
+                <a:solidFill>
+                  <a:srgbClr val="182225"/>
+                </a:solidFill>
+                <a:latin typeface="Aptos Mono"/>
+                <a:ea typeface="Aptos Mono"/>
+                <a:cs typeface="Aptos Mono"/>
+              </a:rPr>
+              <a:t>i,t</a:t>
+            </a:r>
+            <a:r>
+              <a:rPr lang="en-US" sz="1275" b="0" noProof="0" dirty="0">
+                <a:solidFill>
+                  <a:srgbClr val="182225"/>
+                </a:solidFill>
+                <a:latin typeface="Aptos Mono"/>
+                <a:ea typeface="Aptos Mono"/>
+                <a:cs typeface="Aptos Mono"/>
+              </a:rPr>
+              <a:t>]</a:t>
             </a:r>
           </a:p>
           <a:p>
@@ -21626,7 +25043,7 @@
               </a:defRPr>
             </a:pPr>
             <a:r>
-              <a:rPr sz="1275" b="0">
+              <a:rPr lang="en-US" sz="1275" b="0" noProof="0" dirty="0" err="1">
                 <a:solidFill>
                   <a:srgbClr val="182225"/>
                 </a:solidFill>
@@ -21634,7 +25051,128 @@
                 <a:ea typeface="Aptos Mono"/>
                 <a:cs typeface="Aptos Mono"/>
               </a:rPr>
-              <a:t>cost_op[t]  = sum_i c_op[i,t]  * background_purchase_op[i,t]</a:t>
+              <a:t>cost_op</a:t>
+            </a:r>
+            <a:r>
+              <a:rPr lang="en-US" sz="1275" b="0" noProof="0" dirty="0">
+                <a:solidFill>
+                  <a:srgbClr val="182225"/>
+                </a:solidFill>
+                <a:latin typeface="Aptos Mono"/>
+                <a:ea typeface="Aptos Mono"/>
+                <a:cs typeface="Aptos Mono"/>
+              </a:rPr>
+              <a:t>[t]  = </a:t>
+            </a:r>
+            <a:r>
+              <a:rPr lang="en-US" sz="1275" b="0" noProof="0" dirty="0" err="1">
+                <a:solidFill>
+                  <a:srgbClr val="182225"/>
+                </a:solidFill>
+                <a:latin typeface="Aptos Mono"/>
+                <a:ea typeface="Aptos Mono"/>
+                <a:cs typeface="Aptos Mono"/>
+              </a:rPr>
+              <a:t>sum_i</a:t>
+            </a:r>
+            <a:r>
+              <a:rPr lang="en-US" sz="1275" b="0" noProof="0" dirty="0">
+                <a:solidFill>
+                  <a:srgbClr val="182225"/>
+                </a:solidFill>
+                <a:latin typeface="Aptos Mono"/>
+                <a:ea typeface="Aptos Mono"/>
+                <a:cs typeface="Aptos Mono"/>
+              </a:rPr>
+              <a:t> </a:t>
+            </a:r>
+            <a:r>
+              <a:rPr lang="en-US" sz="1275" b="0" noProof="0" dirty="0" err="1">
+                <a:solidFill>
+                  <a:srgbClr val="182225"/>
+                </a:solidFill>
+                <a:latin typeface="Aptos Mono"/>
+                <a:ea typeface="Aptos Mono"/>
+                <a:cs typeface="Aptos Mono"/>
+              </a:rPr>
+              <a:t>c_op</a:t>
+            </a:r>
+            <a:r>
+              <a:rPr lang="en-US" sz="1275" b="0" noProof="0" dirty="0">
+                <a:solidFill>
+                  <a:srgbClr val="182225"/>
+                </a:solidFill>
+                <a:latin typeface="Aptos Mono"/>
+                <a:ea typeface="Aptos Mono"/>
+                <a:cs typeface="Aptos Mono"/>
+              </a:rPr>
+              <a:t>[</a:t>
+            </a:r>
+            <a:r>
+              <a:rPr lang="en-US" sz="1275" b="0" noProof="0" dirty="0" err="1">
+                <a:solidFill>
+                  <a:srgbClr val="182225"/>
+                </a:solidFill>
+                <a:latin typeface="Aptos Mono"/>
+                <a:ea typeface="Aptos Mono"/>
+                <a:cs typeface="Aptos Mono"/>
+              </a:rPr>
+              <a:t>i,t</a:t>
+            </a:r>
+            <a:r>
+              <a:rPr lang="en-US" sz="1275" b="0" noProof="0" dirty="0">
+                <a:solidFill>
+                  <a:srgbClr val="182225"/>
+                </a:solidFill>
+                <a:latin typeface="Aptos Mono"/>
+                <a:ea typeface="Aptos Mono"/>
+                <a:cs typeface="Aptos Mono"/>
+              </a:rPr>
+              <a:t>]  * </a:t>
+            </a:r>
+            <a:r>
+              <a:rPr lang="en-US" sz="1275" b="0" noProof="0" dirty="0" err="1">
+                <a:solidFill>
+                  <a:srgbClr val="182225"/>
+                </a:solidFill>
+                <a:latin typeface="Aptos Mono"/>
+                <a:ea typeface="Aptos Mono"/>
+                <a:cs typeface="Aptos Mono"/>
+              </a:rPr>
+              <a:t>background_purchase_op</a:t>
+            </a:r>
+            <a:r>
+              <a:rPr lang="en-US" sz="1275" b="0" noProof="0" dirty="0">
+                <a:solidFill>
+                  <a:srgbClr val="182225"/>
+                </a:solidFill>
+                <a:latin typeface="Aptos Mono"/>
+                <a:ea typeface="Aptos Mono"/>
+                <a:cs typeface="Aptos Mono"/>
+              </a:rPr>
+              <a:t>[</a:t>
+            </a:r>
+            <a:r>
+              <a:rPr lang="en-US" sz="1275" b="0" noProof="0" dirty="0" err="1">
+                <a:solidFill>
+                  <a:srgbClr val="182225"/>
+                </a:solidFill>
+                <a:latin typeface="Aptos Mono"/>
+                <a:ea typeface="Aptos Mono"/>
+                <a:cs typeface="Aptos Mono"/>
+              </a:rPr>
+              <a:t>i,t</a:t>
+            </a:r>
+            <a:r>
+              <a:rPr lang="en-US" sz="1275" b="0" noProof="0" dirty="0">
+                <a:solidFill>
+                  <a:srgbClr val="182225"/>
+                </a:solidFill>
+                <a:latin typeface="Aptos Mono"/>
+                <a:ea typeface="Aptos Mono"/>
+                <a:cs typeface="Aptos Mono"/>
+              </a:rPr>
+              <a:t>]</a:t>
             </a:r>
           </a:p>
         </p:txBody>
@@ -21675,7 +25213,7 @@
           <a:bodyPr/>
           <a:lstStyle/>
           <a:p>
-            <a:endParaRPr lang="en-US"/>
+            <a:endParaRPr lang="en-US" noProof="0" dirty="0"/>
           </a:p>
         </p:txBody>
       </p:sp>
@@ -21730,7 +25268,7 @@
               </a:defRPr>
             </a:pPr>
             <a:r>
-              <a:rPr sz="1650" b="1">
+              <a:rPr lang="en-US" sz="1650" b="1" noProof="0" dirty="0">
                 <a:solidFill>
                   <a:srgbClr val="1E4D51"/>
                 </a:solidFill>
@@ -21781,7 +25319,7 @@
           <a:bodyPr/>
           <a:lstStyle/>
           <a:p>
-            <a:endParaRPr lang="en-US"/>
+            <a:endParaRPr lang="en-US" noProof="0" dirty="0"/>
           </a:p>
         </p:txBody>
       </p:sp>
@@ -21836,7 +25374,7 @@
               </a:defRPr>
             </a:pPr>
             <a:r>
-              <a:rPr sz="1125" b="0">
+              <a:rPr lang="en-US" sz="1125" b="0" noProof="0" dirty="0" err="1">
                 <a:solidFill>
                   <a:srgbClr val="182225"/>
                 </a:solidFill>
@@ -21846,6 +25384,14 @@
               </a:rPr>
               <a:t>category_impact_limits</a:t>
             </a:r>
+            <a:endParaRPr lang="en-US" sz="1125" b="0" noProof="0" dirty="0">
+              <a:solidFill>
+                <a:srgbClr val="182225"/>
+              </a:solidFill>
+              <a:latin typeface="Aptos"/>
+              <a:ea typeface="Aptos"/>
+              <a:cs typeface="Aptos"/>
+            </a:endParaRPr>
           </a:p>
         </p:txBody>
       </p:sp>
@@ -21887,7 +25433,7 @@
           <a:bodyPr/>
           <a:lstStyle/>
           <a:p>
-            <a:endParaRPr lang="en-US"/>
+            <a:endParaRPr lang="en-US" noProof="0" dirty="0"/>
           </a:p>
         </p:txBody>
       </p:sp>
@@ -21907,7 +25453,7 @@
         </p:nvSpPr>
         <p:spPr>
           <a:xfrm>
-            <a:off x="8515350" y="3562350"/>
+            <a:off x="8515350" y="3498552"/>
             <a:ext cx="1905000" cy="361950"/>
           </a:xfrm>
           <a:prstGeom prst="rect">
@@ -21942,7 +25488,7 @@
               </a:defRPr>
             </a:pPr>
             <a:r>
-              <a:rPr sz="1125" b="0">
+              <a:rPr lang="en-US" sz="1125" b="0" noProof="0" dirty="0" err="1">
                 <a:solidFill>
                   <a:srgbClr val="182225"/>
                 </a:solidFill>
@@ -21952,6 +25498,14 @@
               </a:rPr>
               <a:t>cumulative_category_impact_limits</a:t>
             </a:r>
+            <a:endParaRPr lang="en-US" sz="1125" b="0" noProof="0" dirty="0">
+              <a:solidFill>
+                <a:srgbClr val="182225"/>
+              </a:solidFill>
+              <a:latin typeface="Aptos"/>
+              <a:ea typeface="Aptos"/>
+              <a:cs typeface="Aptos"/>
+            </a:endParaRPr>
           </a:p>
         </p:txBody>
       </p:sp>
@@ -21993,7 +25547,7 @@
           <a:bodyPr/>
           <a:lstStyle/>
           <a:p>
-            <a:endParaRPr lang="en-US"/>
+            <a:endParaRPr lang="en-US" noProof="0" dirty="0"/>
           </a:p>
         </p:txBody>
       </p:sp>
@@ -22048,15 +25602,26 @@
               </a:defRPr>
             </a:pPr>
             <a:r>
-              <a:rPr sz="1125" b="0">
-                <a:solidFill>
-                  <a:srgbClr val="182225"/>
-                </a:solidFill>
-                <a:latin typeface="Aptos"/>
-                <a:ea typeface="Aptos"/>
-                <a:cs typeface="Aptos"/>
-              </a:rPr>
-              <a:t>objective_category still required</a:t>
+              <a:rPr lang="en-US" sz="1125" b="0" noProof="0" dirty="0" err="1">
+                <a:solidFill>
+                  <a:srgbClr val="182225"/>
+                </a:solidFill>
+                <a:latin typeface="Aptos"/>
+                <a:ea typeface="Aptos"/>
+                <a:cs typeface="Aptos"/>
+              </a:rPr>
+              <a:t>objective_category</a:t>
+            </a:r>
+            <a:r>
+              <a:rPr lang="en-US" sz="1125" b="0" noProof="0" dirty="0">
+                <a:solidFill>
+                  <a:srgbClr val="182225"/>
+                </a:solidFill>
+                <a:latin typeface="Aptos"/>
+                <a:ea typeface="Aptos"/>
+                <a:cs typeface="Aptos"/>
+              </a:rPr>
+              <a:t> still required</a:t>
             </a:r>
           </a:p>
         </p:txBody>
@@ -22112,7 +25677,7 @@
               </a:defRPr>
             </a:pPr>
             <a:r>
-              <a:rPr sz="1500" b="0">
+              <a:rPr lang="en-US" sz="1500" b="0" noProof="0" dirty="0">
                 <a:solidFill>
                   <a:srgbClr val="182225"/>
                 </a:solidFill>
@@ -22193,7 +25758,7 @@
           <a:bodyPr/>
           <a:lstStyle/>
           <a:p>
-            <a:endParaRPr lang="en-US"/>
+            <a:endParaRPr lang="en-US" noProof="0" dirty="0"/>
           </a:p>
         </p:txBody>
       </p:sp>
@@ -22235,7 +25800,7 @@
           <a:bodyPr/>
           <a:lstStyle/>
           <a:p>
-            <a:endParaRPr lang="en-US"/>
+            <a:endParaRPr lang="en-US" noProof="0" dirty="0"/>
           </a:p>
         </p:txBody>
       </p:sp>
@@ -22290,7 +25855,7 @@
               </a:defRPr>
             </a:pPr>
             <a:r>
-              <a:rPr sz="900" b="1">
+              <a:rPr lang="en-US" sz="1200" b="1" noProof="0" dirty="0">
                 <a:solidFill>
                   <a:srgbClr val="1E4D51"/>
                 </a:solidFill>
@@ -22354,7 +25919,7 @@
               </a:defRPr>
             </a:pPr>
             <a:r>
-              <a:rPr sz="2550" b="1">
+              <a:rPr lang="en-US" sz="2550" b="1" noProof="0" dirty="0">
                 <a:solidFill>
                   <a:srgbClr val="182225"/>
                 </a:solidFill>
@@ -22405,7 +25970,7 @@
           <a:bodyPr/>
           <a:lstStyle/>
           <a:p>
-            <a:endParaRPr lang="en-US"/>
+            <a:endParaRPr lang="en-US" noProof="0" dirty="0"/>
           </a:p>
         </p:txBody>
       </p:sp>
@@ -22460,7 +26025,7 @@
               </a:defRPr>
             </a:pPr>
             <a:r>
-              <a:rPr sz="750" b="0">
+              <a:rPr lang="en-US" sz="750" b="0" noProof="0" dirty="0">
                 <a:solidFill>
                   <a:srgbClr val="5E7380"/>
                 </a:solidFill>
@@ -22524,7 +26089,7 @@
               </a:defRPr>
             </a:pPr>
             <a:r>
-              <a:rPr sz="825" b="0">
+              <a:rPr lang="en-US" sz="825" b="0" noProof="0" dirty="0">
                 <a:solidFill>
                   <a:srgbClr val="5E7380"/>
                 </a:solidFill>
@@ -22573,7 +26138,7 @@
           <a:bodyPr/>
           <a:lstStyle/>
           <a:p>
-            <a:endParaRPr lang="en-US"/>
+            <a:endParaRPr lang="en-US" noProof="0" dirty="0"/>
           </a:p>
         </p:txBody>
       </p:sp>
@@ -22628,7 +26193,7 @@
               </a:defRPr>
             </a:pPr>
             <a:r>
-              <a:rPr sz="975" b="1">
+              <a:rPr lang="en-US" sz="975" b="1" noProof="0" dirty="0">
                 <a:solidFill>
                   <a:srgbClr val="1E4D51"/>
                 </a:solidFill>
@@ -22677,7 +26242,7 @@
           <a:bodyPr/>
           <a:lstStyle/>
           <a:p>
-            <a:endParaRPr lang="en-US"/>
+            <a:endParaRPr lang="en-US" noProof="0" dirty="0"/>
           </a:p>
         </p:txBody>
       </p:sp>
@@ -22732,7 +26297,7 @@
               </a:defRPr>
             </a:pPr>
             <a:r>
-              <a:rPr sz="975" b="1">
+              <a:rPr lang="en-US" sz="975" b="1" noProof="0" dirty="0">
                 <a:solidFill>
                   <a:srgbClr val="1E4D51"/>
                 </a:solidFill>
@@ -22781,7 +26346,7 @@
           <a:bodyPr/>
           <a:lstStyle/>
           <a:p>
-            <a:endParaRPr lang="en-US"/>
+            <a:endParaRPr lang="en-US" noProof="0" dirty="0"/>
           </a:p>
         </p:txBody>
       </p:sp>
@@ -22836,7 +26401,7 @@
               </a:defRPr>
             </a:pPr>
             <a:r>
-              <a:rPr sz="975" b="1">
+              <a:rPr lang="en-US" sz="975" b="1" noProof="0" dirty="0">
                 <a:solidFill>
                   <a:srgbClr val="1E4D51"/>
                 </a:solidFill>
@@ -22885,7 +26450,7 @@
           <a:bodyPr/>
           <a:lstStyle/>
           <a:p>
-            <a:endParaRPr lang="en-US"/>
+            <a:endParaRPr lang="en-US" noProof="0" dirty="0"/>
           </a:p>
         </p:txBody>
       </p:sp>
@@ -22940,7 +26505,7 @@
               </a:defRPr>
             </a:pPr>
             <a:r>
-              <a:rPr sz="1050" b="1">
+              <a:rPr lang="en-US" sz="1050" b="1" noProof="0" dirty="0">
                 <a:solidFill>
                   <a:srgbClr val="182225"/>
                 </a:solidFill>
@@ -22989,7 +26554,7 @@
           <a:bodyPr/>
           <a:lstStyle/>
           <a:p>
-            <a:endParaRPr lang="en-US"/>
+            <a:endParaRPr lang="en-US" noProof="0" dirty="0"/>
           </a:p>
         </p:txBody>
       </p:sp>
@@ -23044,15 +26609,59 @@
               </a:defRPr>
             </a:pPr>
             <a:r>
-              <a:rPr sz="1050" b="0">
-                <a:solidFill>
-                  <a:srgbClr val="182225"/>
-                </a:solidFill>
-                <a:latin typeface="Aptos"/>
-                <a:ea typeface="Aptos"/>
-                <a:cs typeface="Aptos"/>
-              </a:rPr>
-              <a:t>list/dict, DataFrame, custom columns, product/unit lookup, overwrite, strict errors</a:t>
+              <a:rPr lang="en-US" sz="1050" b="0" noProof="0" dirty="0">
+                <a:solidFill>
+                  <a:srgbClr val="182225"/>
+                </a:solidFill>
+                <a:latin typeface="Aptos"/>
+                <a:ea typeface="Aptos"/>
+                <a:cs typeface="Aptos"/>
+              </a:rPr>
+              <a:t>list/</a:t>
+            </a:r>
+            <a:r>
+              <a:rPr lang="en-US" sz="1050" b="0" noProof="0" dirty="0" err="1">
+                <a:solidFill>
+                  <a:srgbClr val="182225"/>
+                </a:solidFill>
+                <a:latin typeface="Aptos"/>
+                <a:ea typeface="Aptos"/>
+                <a:cs typeface="Aptos"/>
+              </a:rPr>
+              <a:t>dict</a:t>
+            </a:r>
+            <a:r>
+              <a:rPr lang="en-US" sz="1050" b="0" noProof="0" dirty="0">
+                <a:solidFill>
+                  <a:srgbClr val="182225"/>
+                </a:solidFill>
+                <a:latin typeface="Aptos"/>
+                <a:ea typeface="Aptos"/>
+                <a:cs typeface="Aptos"/>
+              </a:rPr>
+              <a:t>, </a:t>
+            </a:r>
+            <a:r>
+              <a:rPr lang="en-US" sz="1050" b="0" noProof="0" dirty="0" err="1">
+                <a:solidFill>
+                  <a:srgbClr val="182225"/>
+                </a:solidFill>
+                <a:latin typeface="Aptos"/>
+                <a:ea typeface="Aptos"/>
+                <a:cs typeface="Aptos"/>
+              </a:rPr>
+              <a:t>DataFrame</a:t>
+            </a:r>
+            <a:r>
+              <a:rPr lang="en-US" sz="1050" b="0" noProof="0" dirty="0">
+                <a:solidFill>
+                  <a:srgbClr val="182225"/>
+                </a:solidFill>
+                <a:latin typeface="Aptos"/>
+                <a:ea typeface="Aptos"/>
+                <a:cs typeface="Aptos"/>
+              </a:rPr>
+              <a:t>, custom columns, product/unit lookup, overwrite, strict errors</a:t>
             </a:r>
           </a:p>
         </p:txBody>
@@ -23093,7 +26702,7 @@
           <a:bodyPr/>
           <a:lstStyle/>
           <a:p>
-            <a:endParaRPr lang="en-US"/>
+            <a:endParaRPr lang="en-US" noProof="0" dirty="0"/>
           </a:p>
         </p:txBody>
       </p:sp>
@@ -23148,7 +26757,7 @@
               </a:defRPr>
             </a:pPr>
             <a:r>
-              <a:rPr sz="1050" b="1">
+              <a:rPr lang="en-US" sz="1050" b="1" noProof="0" dirty="0">
                 <a:solidFill>
                   <a:srgbClr val="1E4D51"/>
                 </a:solidFill>
@@ -23197,7 +26806,7 @@
           <a:bodyPr/>
           <a:lstStyle/>
           <a:p>
-            <a:endParaRPr lang="en-US"/>
+            <a:endParaRPr lang="en-US" noProof="0" dirty="0"/>
           </a:p>
         </p:txBody>
       </p:sp>
@@ -23252,7 +26861,7 @@
               </a:defRPr>
             </a:pPr>
             <a:r>
-              <a:rPr sz="1050" b="1">
+              <a:rPr lang="en-US" sz="1050" b="1" noProof="0" dirty="0">
                 <a:solidFill>
                   <a:srgbClr val="182225"/>
                 </a:solidFill>
@@ -23301,7 +26910,7 @@
           <a:bodyPr/>
           <a:lstStyle/>
           <a:p>
-            <a:endParaRPr lang="en-US"/>
+            <a:endParaRPr lang="en-US" noProof="0" dirty="0"/>
           </a:p>
         </p:txBody>
       </p:sp>
@@ -23356,15 +26965,26 @@
               </a:defRPr>
             </a:pPr>
             <a:r>
-              <a:rPr sz="1050" b="0">
-                <a:solidFill>
-                  <a:srgbClr val="182225"/>
-                </a:solidFill>
-                <a:latin typeface="Aptos"/>
-                <a:ea typeface="Aptos"/>
-                <a:cs typeface="Aptos"/>
-              </a:rPr>
-              <a:t>market_price read, interpolation to SYSTEM_TIME, metadata fallback when codes differ</a:t>
+              <a:rPr lang="en-US" sz="1050" b="0" noProof="0" dirty="0" err="1">
+                <a:solidFill>
+                  <a:srgbClr val="182225"/>
+                </a:solidFill>
+                <a:latin typeface="Aptos"/>
+                <a:ea typeface="Aptos"/>
+                <a:cs typeface="Aptos"/>
+              </a:rPr>
+              <a:t>market_price</a:t>
+            </a:r>
+            <a:r>
+              <a:rPr lang="en-US" sz="1050" b="0" noProof="0" dirty="0">
+                <a:solidFill>
+                  <a:srgbClr val="182225"/>
+                </a:solidFill>
+                <a:latin typeface="Aptos"/>
+                <a:ea typeface="Aptos"/>
+                <a:cs typeface="Aptos"/>
+              </a:rPr>
+              <a:t> read, interpolation to SYSTEM_TIME, metadata fallback when codes differ</a:t>
             </a:r>
           </a:p>
         </p:txBody>
@@ -23405,7 +27025,7 @@
           <a:bodyPr/>
           <a:lstStyle/>
           <a:p>
-            <a:endParaRPr lang="en-US"/>
+            <a:endParaRPr lang="en-US" noProof="0" dirty="0"/>
           </a:p>
         </p:txBody>
       </p:sp>
@@ -23460,7 +27080,7 @@
               </a:defRPr>
             </a:pPr>
             <a:r>
-              <a:rPr sz="1050" b="1">
+              <a:rPr lang="en-US" sz="1050" b="1" noProof="0" dirty="0">
                 <a:solidFill>
                   <a:srgbClr val="1E4D51"/>
                 </a:solidFill>
@@ -23509,7 +27129,7 @@
           <a:bodyPr/>
           <a:lstStyle/>
           <a:p>
-            <a:endParaRPr lang="en-US"/>
+            <a:endParaRPr lang="en-US" noProof="0" dirty="0"/>
           </a:p>
         </p:txBody>
       </p:sp>
@@ -23564,7 +27184,7 @@
               </a:defRPr>
             </a:pPr>
             <a:r>
-              <a:rPr sz="1050" b="1">
+              <a:rPr lang="en-US" sz="1050" b="1" noProof="0" dirty="0">
                 <a:solidFill>
                   <a:srgbClr val="182225"/>
                 </a:solidFill>
@@ -23613,7 +27233,7 @@
           <a:bodyPr/>
           <a:lstStyle/>
           <a:p>
-            <a:endParaRPr lang="en-US"/>
+            <a:endParaRPr lang="en-US" noProof="0" dirty="0"/>
           </a:p>
         </p:txBody>
       </p:sp>
@@ -23668,7 +27288,7 @@
               </a:defRPr>
             </a:pPr>
             <a:r>
-              <a:rPr sz="1050" b="0">
+              <a:rPr lang="en-US" sz="1050" b="0" noProof="0" dirty="0">
                 <a:solidFill>
                   <a:srgbClr val="182225"/>
                 </a:solidFill>
@@ -23717,7 +27337,7 @@
           <a:bodyPr/>
           <a:lstStyle/>
           <a:p>
-            <a:endParaRPr lang="en-US"/>
+            <a:endParaRPr lang="en-US" noProof="0" dirty="0"/>
           </a:p>
         </p:txBody>
       </p:sp>
@@ -23772,7 +27392,7 @@
               </a:defRPr>
             </a:pPr>
             <a:r>
-              <a:rPr sz="1050" b="1">
+              <a:rPr lang="en-US" sz="1050" b="1" noProof="0" dirty="0">
                 <a:solidFill>
                   <a:srgbClr val="1E4D51"/>
                 </a:solidFill>
@@ -23821,7 +27441,7 @@
           <a:bodyPr/>
           <a:lstStyle/>
           <a:p>
-            <a:endParaRPr lang="en-US"/>
+            <a:endParaRPr lang="en-US" noProof="0" dirty="0"/>
           </a:p>
         </p:txBody>
       </p:sp>
@@ -23876,7 +27496,7 @@
               </a:defRPr>
             </a:pPr>
             <a:r>
-              <a:rPr sz="1050" b="1">
+              <a:rPr lang="en-US" sz="1050" b="1" noProof="0" dirty="0">
                 <a:solidFill>
                   <a:srgbClr val="182225"/>
                 </a:solidFill>
@@ -23925,7 +27545,7 @@
           <a:bodyPr/>
           <a:lstStyle/>
           <a:p>
-            <a:endParaRPr lang="en-US"/>
+            <a:endParaRPr lang="en-US" noProof="0" dirty="0"/>
           </a:p>
         </p:txBody>
       </p:sp>
@@ -23980,7 +27600,7 @@
               </a:defRPr>
             </a:pPr>
             <a:r>
-              <a:rPr sz="1050" b="0">
+              <a:rPr lang="en-US" sz="1050" b="0" noProof="0" dirty="0">
                 <a:solidFill>
                   <a:srgbClr val="182225"/>
                 </a:solidFill>
@@ -24029,7 +27649,7 @@
           <a:bodyPr/>
           <a:lstStyle/>
           <a:p>
-            <a:endParaRPr lang="en-US"/>
+            <a:endParaRPr lang="en-US" noProof="0" dirty="0"/>
           </a:p>
         </p:txBody>
       </p:sp>
@@ -24084,7 +27704,7 @@
               </a:defRPr>
             </a:pPr>
             <a:r>
-              <a:rPr sz="1050" b="1">
+              <a:rPr lang="en-US" sz="1050" b="1" noProof="0" dirty="0">
                 <a:solidFill>
                   <a:srgbClr val="1E4D51"/>
                 </a:solidFill>
@@ -24133,7 +27753,7 @@
           <a:bodyPr/>
           <a:lstStyle/>
           <a:p>
-            <a:endParaRPr lang="en-US"/>
+            <a:endParaRPr lang="en-US" noProof="0" dirty="0"/>
           </a:p>
         </p:txBody>
       </p:sp>
@@ -24188,15 +27808,26 @@
               </a:defRPr>
             </a:pPr>
             <a:r>
-              <a:rPr sz="1050" b="1">
-                <a:solidFill>
-                  <a:srgbClr val="182225"/>
-                </a:solidFill>
-                <a:latin typeface="Aptos"/>
-                <a:ea typeface="Aptos"/>
-                <a:cs typeface="Aptos"/>
-              </a:rPr>
-              <a:t>Pyomo expressions</a:t>
+              <a:rPr lang="en-US" sz="1050" b="1" noProof="0" dirty="0" err="1">
+                <a:solidFill>
+                  <a:srgbClr val="182225"/>
+                </a:solidFill>
+                <a:latin typeface="Aptos"/>
+                <a:ea typeface="Aptos"/>
+                <a:cs typeface="Aptos"/>
+              </a:rPr>
+              <a:t>Pyomo</a:t>
+            </a:r>
+            <a:r>
+              <a:rPr lang="en-US" sz="1050" b="1" noProof="0" dirty="0">
+                <a:solidFill>
+                  <a:srgbClr val="182225"/>
+                </a:solidFill>
+                <a:latin typeface="Aptos"/>
+                <a:ea typeface="Aptos"/>
+                <a:cs typeface="Aptos"/>
+              </a:rPr>
+              <a:t> expressions</a:t>
             </a:r>
           </a:p>
         </p:txBody>
@@ -24237,7 +27868,7 @@
           <a:bodyPr/>
           <a:lstStyle/>
           <a:p>
-            <a:endParaRPr lang="en-US"/>
+            <a:endParaRPr lang="en-US" noProof="0" dirty="0"/>
           </a:p>
         </p:txBody>
       </p:sp>
@@ -24292,16 +27923,57 @@
               </a:defRPr>
             </a:pPr>
             <a:r>
-              <a:rPr sz="1050" b="0">
-                <a:solidFill>
-                  <a:srgbClr val="182225"/>
-                </a:solidFill>
-                <a:latin typeface="Aptos"/>
-                <a:ea typeface="Aptos"/>
-                <a:cs typeface="Aptos"/>
-              </a:rPr>
-              <a:t>purchase quantities, cost_cap/op and discount_factor</a:t>
-            </a:r>
+              <a:rPr lang="en-US" sz="1050" b="0" noProof="0" dirty="0">
+                <a:solidFill>
+                  <a:srgbClr val="182225"/>
+                </a:solidFill>
+                <a:latin typeface="Aptos"/>
+                <a:ea typeface="Aptos"/>
+                <a:cs typeface="Aptos"/>
+              </a:rPr>
+              <a:t>purchase quantities, </a:t>
+            </a:r>
+            <a:r>
+              <a:rPr lang="en-US" sz="1050" b="0" noProof="0" dirty="0" err="1">
+                <a:solidFill>
+                  <a:srgbClr val="182225"/>
+                </a:solidFill>
+                <a:latin typeface="Aptos"/>
+                <a:ea typeface="Aptos"/>
+                <a:cs typeface="Aptos"/>
+              </a:rPr>
+              <a:t>cost_cap</a:t>
+            </a:r>
+            <a:r>
+              <a:rPr lang="en-US" sz="1050" b="0" noProof="0" dirty="0">
+                <a:solidFill>
+                  <a:srgbClr val="182225"/>
+                </a:solidFill>
+                <a:latin typeface="Aptos"/>
+                <a:ea typeface="Aptos"/>
+                <a:cs typeface="Aptos"/>
+              </a:rPr>
+              <a:t>/op and </a:t>
+            </a:r>
+            <a:r>
+              <a:rPr lang="en-US" sz="1050" b="0" noProof="0" dirty="0" err="1">
+                <a:solidFill>
+                  <a:srgbClr val="182225"/>
+                </a:solidFill>
+                <a:latin typeface="Aptos"/>
+                <a:ea typeface="Aptos"/>
+                <a:cs typeface="Aptos"/>
+              </a:rPr>
+              <a:t>discount_factor</a:t>
+            </a:r>
+            <a:endParaRPr lang="en-US" sz="1050" b="0" noProof="0" dirty="0">
+              <a:solidFill>
+                <a:srgbClr val="182225"/>
+              </a:solidFill>
+              <a:latin typeface="Aptos"/>
+              <a:ea typeface="Aptos"/>
+              <a:cs typeface="Aptos"/>
+            </a:endParaRPr>
           </a:p>
         </p:txBody>
       </p:sp>
@@ -24341,7 +28013,7 @@
           <a:bodyPr/>
           <a:lstStyle/>
           <a:p>
-            <a:endParaRPr lang="en-US"/>
+            <a:endParaRPr lang="en-US" noProof="0" dirty="0"/>
           </a:p>
         </p:txBody>
       </p:sp>
@@ -24396,7 +28068,7 @@
               </a:defRPr>
             </a:pPr>
             <a:r>
-              <a:rPr sz="1050" b="1">
+              <a:rPr lang="en-US" sz="1050" b="1" noProof="0" dirty="0">
                 <a:solidFill>
                   <a:srgbClr val="1E4D51"/>
                 </a:solidFill>
@@ -24445,7 +28117,7 @@
           <a:bodyPr/>
           <a:lstStyle/>
           <a:p>
-            <a:endParaRPr lang="en-US"/>
+            <a:endParaRPr lang="en-US" noProof="0" dirty="0"/>
           </a:p>
         </p:txBody>
       </p:sp>
@@ -24500,7 +28172,7 @@
               </a:defRPr>
             </a:pPr>
             <a:r>
-              <a:rPr sz="1050" b="1">
+              <a:rPr lang="en-US" sz="1050" b="1" noProof="0" dirty="0">
                 <a:solidFill>
                   <a:srgbClr val="182225"/>
                 </a:solidFill>
@@ -24549,7 +28221,7 @@
           <a:bodyPr/>
           <a:lstStyle/>
           <a:p>
-            <a:endParaRPr lang="en-US"/>
+            <a:endParaRPr lang="en-US" noProof="0" dirty="0"/>
           </a:p>
         </p:txBody>
       </p:sp>
@@ -24604,7 +28276,7 @@
               </a:defRPr>
             </a:pPr>
             <a:r>
-              <a:rPr sz="1050" b="0">
+              <a:rPr lang="en-US" sz="1050" b="0" noProof="0" dirty="0">
                 <a:solidFill>
                   <a:srgbClr val="182225"/>
                 </a:solidFill>
@@ -24653,7 +28325,7 @@
           <a:bodyPr/>
           <a:lstStyle/>
           <a:p>
-            <a:endParaRPr lang="en-US"/>
+            <a:endParaRPr lang="en-US" noProof="0" dirty="0"/>
           </a:p>
         </p:txBody>
       </p:sp>
@@ -24708,7 +28380,7 @@
               </a:defRPr>
             </a:pPr>
             <a:r>
-              <a:rPr sz="1050" b="1">
+              <a:rPr lang="en-US" sz="1050" b="1" noProof="0" dirty="0">
                 <a:solidFill>
                   <a:srgbClr val="1E4D51"/>
                 </a:solidFill>
@@ -24757,7 +28429,7 @@
           <a:bodyPr/>
           <a:lstStyle/>
           <a:p>
-            <a:endParaRPr lang="en-US"/>
+            <a:endParaRPr lang="en-US" noProof="0" dirty="0"/>
           </a:p>
         </p:txBody>
       </p:sp>
@@ -24777,8 +28449,8 @@
         </p:nvSpPr>
         <p:spPr>
           <a:xfrm>
-            <a:off x="8191500" y="5105400"/>
-            <a:ext cx="2190750" cy="228600"/>
+            <a:off x="8063907" y="5105400"/>
+            <a:ext cx="2590800" cy="266700"/>
           </a:xfrm>
           <a:prstGeom prst="rect">
             <a:avLst/>
@@ -24812,7 +28484,7 @@
               </a:defRPr>
             </a:pPr>
             <a:r>
-              <a:rPr sz="975" b="0">
+              <a:rPr lang="en-US" sz="975" b="0" noProof="0" dirty="0">
                 <a:solidFill>
                   <a:srgbClr val="A65F3B"/>
                 </a:solidFill>
